--- a/applications/feminist-ai/documents/feminist-ai_ppt.pptx
+++ b/applications/feminist-ai/documents/feminist-ai_ppt.pptx
@@ -13,8 +13,6 @@
     <p:sldId id="261" r:id="rId12"/>
     <p:sldId id="262" r:id="rId13"/>
     <p:sldId id="263" r:id="rId14"/>
-    <p:sldId id="264" r:id="rId15"/>
-    <p:sldId id="265" r:id="rId16"/>
   </p:sldIdLst>
   <p:sldSz cx="12191695" cy="6858000" type="screen4x3"/>
   <p:notesSz cx="6858000" cy="9144000"/>
@@ -3107,7 +3105,6 @@
         </p:nvPicPr>
         <p:blipFill>
           <a:blip r:embed="rId2"/>
-          <a:srcRect l="33" r="33"/>
           <a:stretch>
             <a:fillRect/>
           </a:stretch>
@@ -3130,8 +3127,8 @@
         </p:nvSpPr>
         <p:spPr>
           <a:xfrm>
-            <a:off x="0" y="3474720"/>
-            <a:ext cx="12191695" cy="3383280"/>
+            <a:off x="0" y="3931920"/>
+            <a:ext cx="12191695" cy="2926080"/>
           </a:xfrm>
           <a:prstGeom prst="rect">
             <a:avLst/>
@@ -3142,7 +3139,6 @@
           <a:ln>
             <a:noFill/>
           </a:ln>
-          <a:effectLst/>
         </p:spPr>
         <p:style>
           <a:lnRef idx="1">
@@ -3174,7 +3170,7 @@
         </p:nvSpPr>
         <p:spPr>
           <a:xfrm>
-            <a:off x="594360" y="3749040"/>
+            <a:off x="548640" y="4206240"/>
             <a:ext cx="10972800" cy="320040"/>
           </a:xfrm>
           <a:prstGeom prst="rect">
@@ -3183,16 +3179,12 @@
           <a:noFill/>
         </p:spPr>
         <p:txBody>
-          <a:bodyPr wrap="square" anchor="t">
+          <a:bodyPr wrap="square">
             <a:spAutoFit/>
           </a:bodyPr>
           <a:lstStyle/>
           <a:p>
-            <a:pPr algn="l">
-              <a:spcAft>
-                <a:spcPts val="0"/>
-              </a:spcAft>
-            </a:pPr>
+            <a:pPr algn="l"/>
             <a:r>
               <a:rPr sz="1300" b="1" i="0">
                 <a:solidFill>
@@ -3200,7 +3192,7 @@
                 </a:solidFill>
                 <a:latin typeface="Calibri"/>
               </a:rPr>
-              <a:t>Young Feminist AI School 2026 (UN Women)</a:t>
+              <a:t>Young Feminist AI School 2026 — UN Women</a:t>
             </a:r>
           </a:p>
         </p:txBody>
@@ -3213,8 +3205,8 @@
         </p:nvSpPr>
         <p:spPr>
           <a:xfrm>
-            <a:off x="594360" y="4206240"/>
-            <a:ext cx="10972800" cy="640080"/>
+            <a:off x="548640" y="4663440"/>
+            <a:ext cx="10972800" cy="548640"/>
           </a:xfrm>
           <a:prstGeom prst="rect">
             <a:avLst/>
@@ -3222,16 +3214,12 @@
           <a:noFill/>
         </p:spPr>
         <p:txBody>
-          <a:bodyPr wrap="square" anchor="t">
+          <a:bodyPr wrap="square">
             <a:spAutoFit/>
           </a:bodyPr>
           <a:lstStyle/>
           <a:p>
-            <a:pPr algn="l">
-              <a:spcAft>
-                <a:spcPts val="0"/>
-              </a:spcAft>
-            </a:pPr>
+            <a:pPr algn="l"/>
             <a:r>
               <a:rPr sz="2600" b="1" i="0">
                 <a:solidFill>
@@ -3239,7 +3227,7 @@
                 </a:solidFill>
                 <a:latin typeface="Calibri"/>
               </a:rPr>
-              <a:t>Gender-Responsive AI for Community Health</a:t>
+              <a:t>Learning Plan &amp; Gender-Responsive AI Project</a:t>
             </a:r>
           </a:p>
         </p:txBody>
@@ -3252,8 +3240,8 @@
         </p:nvSpPr>
         <p:spPr>
           <a:xfrm>
-            <a:off x="594360" y="4983481"/>
-            <a:ext cx="10972800" cy="365760"/>
+            <a:off x="548640" y="5440680"/>
+            <a:ext cx="10972800" cy="320040"/>
           </a:xfrm>
           <a:prstGeom prst="rect">
             <a:avLst/>
@@ -3261,337 +3249,12 @@
           <a:noFill/>
         </p:spPr>
         <p:txBody>
-          <a:bodyPr wrap="square" anchor="t">
+          <a:bodyPr wrap="square">
             <a:spAutoFit/>
           </a:bodyPr>
           <a:lstStyle/>
           <a:p>
-            <a:pPr algn="l">
-              <a:spcAft>
-                <a:spcPts val="0"/>
-              </a:spcAft>
-            </a:pPr>
-            <a:r>
-              <a:rPr sz="1500" b="0" i="1">
-                <a:solidFill>
-                  <a:srgbClr val="F2C79B"/>
-                </a:solidFill>
-                <a:latin typeface="Calibri"/>
-              </a:rPr>
-              <a:t>Practical AI skills that put women, girls, and mothers at the centre of FCHIP</a:t>
-            </a:r>
-          </a:p>
-        </p:txBody>
-      </p:sp>
-      <p:sp>
-        <p:nvSpPr>
-          <p:cNvPr id="7" name="TextBox 6"/>
-          <p:cNvSpPr txBox="1"/>
-          <p:nvPr/>
-        </p:nvSpPr>
-        <p:spPr>
-          <a:xfrm>
-            <a:off x="594360" y="5532120"/>
-            <a:ext cx="10972800" cy="274320"/>
-          </a:xfrm>
-          <a:prstGeom prst="rect">
-            <a:avLst/>
-          </a:prstGeom>
-          <a:noFill/>
-        </p:spPr>
-        <p:txBody>
-          <a:bodyPr wrap="square" anchor="t">
-            <a:spAutoFit/>
-          </a:bodyPr>
-          <a:lstStyle/>
-          <a:p>
-            <a:pPr algn="l">
-              <a:spcAft>
-                <a:spcPts val="0"/>
-              </a:spcAft>
-            </a:pPr>
-            <a:r>
-              <a:rPr sz="1300" b="1" i="0">
-                <a:solidFill>
-                  <a:srgbClr val="FFFFFF"/>
-                </a:solidFill>
-                <a:latin typeface="Calibri"/>
-              </a:rPr>
-              <a:t>Your health, our mission.</a:t>
-            </a:r>
-          </a:p>
-        </p:txBody>
-      </p:sp>
-      <p:sp>
-        <p:nvSpPr>
-          <p:cNvPr id="8" name="TextBox 7"/>
-          <p:cNvSpPr txBox="1"/>
-          <p:nvPr/>
-        </p:nvSpPr>
-        <p:spPr>
-          <a:xfrm>
-            <a:off x="594360" y="5989320"/>
-            <a:ext cx="10972800" cy="365760"/>
-          </a:xfrm>
-          <a:prstGeom prst="rect">
-            <a:avLst/>
-          </a:prstGeom>
-          <a:noFill/>
-        </p:spPr>
-        <p:txBody>
-          <a:bodyPr wrap="square" anchor="t">
-            <a:spAutoFit/>
-          </a:bodyPr>
-          <a:lstStyle/>
-          <a:p>
-            <a:pPr algn="l">
-              <a:spcAft>
-                <a:spcPts val="0"/>
-              </a:spcAft>
-            </a:pPr>
-            <a:r>
-              <a:rPr sz="1200" b="0" i="0">
-                <a:solidFill>
-                  <a:srgbClr val="D0E8E8"/>
-                </a:solidFill>
-                <a:latin typeface="Calibri"/>
-              </a:rPr>
-              <a:t>Admit FairBanks youth / women team members to the 12-week AI School cohort.</a:t>
-            </a:r>
-          </a:p>
-        </p:txBody>
-      </p:sp>
-    </p:spTree>
-  </p:cSld>
-  <p:clrMapOvr>
-    <a:masterClrMapping/>
-  </p:clrMapOvr>
-</p:sld>
-</file>
-
-<file path=ppt/slides/slide10.xml><?xml version="1.0" encoding="utf-8"?>
-<p:sld xmlns:a="http://schemas.openxmlformats.org/drawingml/2006/main" xmlns:p="http://schemas.openxmlformats.org/presentationml/2006/main" xmlns:r="http://schemas.openxmlformats.org/officeDocument/2006/relationships">
-  <p:cSld>
-    <p:spTree>
-      <p:nvGrpSpPr>
-        <p:cNvPr id="1" name=""/>
-        <p:cNvGrpSpPr/>
-        <p:nvPr/>
-      </p:nvGrpSpPr>
-      <p:grpSpPr/>
-      <p:pic>
-        <p:nvPicPr>
-          <p:cNvPr id="2" name="Picture 1" descr="outreach_audience_full_group_01_opt.jpg"/>
-          <p:cNvPicPr>
-            <a:picLocks noChangeAspect="1"/>
-          </p:cNvPicPr>
-          <p:nvPr/>
-        </p:nvPicPr>
-        <p:blipFill>
-          <a:blip r:embed="rId2"/>
-          <a:srcRect t="7796" b="7796"/>
-          <a:stretch>
-            <a:fillRect/>
-          </a:stretch>
-        </p:blipFill>
-        <p:spPr>
-          <a:xfrm>
-            <a:off x="0" y="0"/>
-            <a:ext cx="12191695" cy="6858000"/>
-          </a:xfrm>
-          <a:prstGeom prst="rect">
-            <a:avLst/>
-          </a:prstGeom>
-        </p:spPr>
-      </p:pic>
-      <p:sp>
-        <p:nvSpPr>
-          <p:cNvPr id="3" name="Rectangle 2"/>
-          <p:cNvSpPr/>
-          <p:nvPr/>
-        </p:nvSpPr>
-        <p:spPr>
-          <a:xfrm>
-            <a:off x="0" y="3657600"/>
-            <a:ext cx="12191695" cy="3200400"/>
-          </a:xfrm>
-          <a:prstGeom prst="rect">
-            <a:avLst/>
-          </a:prstGeom>
-          <a:solidFill>
-            <a:srgbClr val="0A1F2E"/>
-          </a:solidFill>
-          <a:ln>
-            <a:noFill/>
-          </a:ln>
-          <a:effectLst/>
-        </p:spPr>
-        <p:style>
-          <a:lnRef idx="1">
-            <a:schemeClr val="accent1"/>
-          </a:lnRef>
-          <a:fillRef idx="3">
-            <a:schemeClr val="accent1"/>
-          </a:fillRef>
-          <a:effectRef idx="2">
-            <a:schemeClr val="accent1"/>
-          </a:effectRef>
-          <a:fontRef idx="minor">
-            <a:schemeClr val="lt1"/>
-          </a:fontRef>
-        </p:style>
-        <p:txBody>
-          <a:bodyPr rtlCol="0" anchor="ctr"/>
-          <a:lstStyle/>
-          <a:p>
-            <a:pPr algn="ctr"/>
-          </a:p>
-        </p:txBody>
-      </p:sp>
-      <p:sp>
-        <p:nvSpPr>
-          <p:cNvPr id="4" name="TextBox 3"/>
-          <p:cNvSpPr txBox="1"/>
-          <p:nvPr/>
-        </p:nvSpPr>
-        <p:spPr>
-          <a:xfrm>
-            <a:off x="594360" y="3931920"/>
-            <a:ext cx="10972800" cy="274320"/>
-          </a:xfrm>
-          <a:prstGeom prst="rect">
-            <a:avLst/>
-          </a:prstGeom>
-          <a:noFill/>
-        </p:spPr>
-        <p:txBody>
-          <a:bodyPr wrap="square" anchor="t">
-            <a:spAutoFit/>
-          </a:bodyPr>
-          <a:lstStyle/>
-          <a:p>
-            <a:pPr algn="l">
-              <a:spcAft>
-                <a:spcPts val="0"/>
-              </a:spcAft>
-            </a:pPr>
-            <a:r>
-              <a:rPr sz="1300" b="1" i="0">
-                <a:solidFill>
-                  <a:srgbClr val="14A3A3"/>
-                </a:solidFill>
-                <a:latin typeface="Calibri"/>
-              </a:rPr>
-              <a:t>The ask</a:t>
-            </a:r>
-          </a:p>
-        </p:txBody>
-      </p:sp>
-      <p:sp>
-        <p:nvSpPr>
-          <p:cNvPr id="5" name="TextBox 4"/>
-          <p:cNvSpPr txBox="1"/>
-          <p:nvPr/>
-        </p:nvSpPr>
-        <p:spPr>
-          <a:xfrm>
-            <a:off x="594360" y="4389120"/>
-            <a:ext cx="10972800" cy="822960"/>
-          </a:xfrm>
-          <a:prstGeom prst="rect">
-            <a:avLst/>
-          </a:prstGeom>
-          <a:noFill/>
-        </p:spPr>
-        <p:txBody>
-          <a:bodyPr wrap="square" anchor="t">
-            <a:spAutoFit/>
-          </a:bodyPr>
-          <a:lstStyle/>
-          <a:p>
-            <a:pPr algn="l">
-              <a:spcAft>
-                <a:spcPts val="0"/>
-              </a:spcAft>
-            </a:pPr>
-            <a:r>
-              <a:rPr sz="2200" b="1" i="0">
-                <a:solidFill>
-                  <a:srgbClr val="FFFFFF"/>
-                </a:solidFill>
-                <a:latin typeface="Calibri"/>
-              </a:rPr>
-              <a:t>Admit FairBanks youth / women team members to the 12-week AI School cohort.</a:t>
-            </a:r>
-          </a:p>
-        </p:txBody>
-      </p:sp>
-      <p:sp>
-        <p:nvSpPr>
-          <p:cNvPr id="6" name="TextBox 5"/>
-          <p:cNvSpPr txBox="1"/>
-          <p:nvPr/>
-        </p:nvSpPr>
-        <p:spPr>
-          <a:xfrm>
-            <a:off x="594360" y="5394960"/>
-            <a:ext cx="10972800" cy="365760"/>
-          </a:xfrm>
-          <a:prstGeom prst="rect">
-            <a:avLst/>
-          </a:prstGeom>
-          <a:noFill/>
-        </p:spPr>
-        <p:txBody>
-          <a:bodyPr wrap="square" anchor="t">
-            <a:spAutoFit/>
-          </a:bodyPr>
-          <a:lstStyle/>
-          <a:p>
-            <a:pPr algn="l">
-              <a:spcAft>
-                <a:spcPts val="0"/>
-              </a:spcAft>
-            </a:pPr>
-            <a:r>
-              <a:rPr sz="1400" b="0" i="1">
-                <a:solidFill>
-                  <a:srgbClr val="F2C79B"/>
-                </a:solidFill>
-                <a:latin typeface="Calibri"/>
-              </a:rPr>
-              <a:t>Practical AI skills that put women, girls, and mothers at the centre of FCHIP</a:t>
-            </a:r>
-          </a:p>
-        </p:txBody>
-      </p:sp>
-      <p:sp>
-        <p:nvSpPr>
-          <p:cNvPr id="7" name="TextBox 6"/>
-          <p:cNvSpPr txBox="1"/>
-          <p:nvPr/>
-        </p:nvSpPr>
-        <p:spPr>
-          <a:xfrm>
-            <a:off x="594360" y="5943600"/>
-            <a:ext cx="10972800" cy="320040"/>
-          </a:xfrm>
-          <a:prstGeom prst="rect">
-            <a:avLst/>
-          </a:prstGeom>
-          <a:noFill/>
-        </p:spPr>
-        <p:txBody>
-          <a:bodyPr wrap="square" anchor="t">
-            <a:spAutoFit/>
-          </a:bodyPr>
-          <a:lstStyle/>
-          <a:p>
-            <a:pPr algn="l">
-              <a:spcAft>
-                <a:spcPts val="0"/>
-              </a:spcAft>
-            </a:pPr>
+            <a:pPr algn="l"/>
             <a:r>
               <a:rPr sz="1400" b="1" i="0">
                 <a:solidFill>
@@ -3631,7 +3294,7 @@
         <p:spPr>
           <a:xfrm>
             <a:off x="0" y="0"/>
-            <a:ext cx="12191695" cy="960120"/>
+            <a:ext cx="12191695" cy="914400"/>
           </a:xfrm>
           <a:prstGeom prst="rect">
             <a:avLst/>
@@ -3642,7 +3305,6 @@
           <a:ln>
             <a:noFill/>
           </a:ln>
-          <a:effectLst/>
         </p:spPr>
         <p:style>
           <a:lnRef idx="1">
@@ -3675,7 +3337,7 @@
         <p:spPr>
           <a:xfrm>
             <a:off x="0" y="0"/>
-            <a:ext cx="164592" cy="960120"/>
+            <a:ext cx="137160" cy="914400"/>
           </a:xfrm>
           <a:prstGeom prst="rect">
             <a:avLst/>
@@ -3686,7 +3348,6 @@
           <a:ln>
             <a:noFill/>
           </a:ln>
-          <a:effectLst/>
         </p:spPr>
         <p:style>
           <a:lnRef idx="1">
@@ -3718,125 +3379,8 @@
         </p:nvSpPr>
         <p:spPr>
           <a:xfrm>
-            <a:off x="457200" y="109728"/>
-            <a:ext cx="10972800" cy="256032"/>
-          </a:xfrm>
-          <a:prstGeom prst="rect">
-            <a:avLst/>
-          </a:prstGeom>
-          <a:noFill/>
-        </p:spPr>
-        <p:txBody>
-          <a:bodyPr wrap="square" anchor="t">
-            <a:spAutoFit/>
-          </a:bodyPr>
-          <a:lstStyle/>
-          <a:p>
-            <a:pPr algn="l">
-              <a:spcAft>
-                <a:spcPts val="0"/>
-              </a:spcAft>
-            </a:pPr>
-            <a:r>
-              <a:rPr sz="1100" b="1" i="0">
-                <a:solidFill>
-                  <a:srgbClr val="C45C26"/>
-                </a:solidFill>
-                <a:latin typeface="Calibri"/>
-              </a:rPr>
-              <a:t>WIN-WIN</a:t>
-            </a:r>
-          </a:p>
-        </p:txBody>
-      </p:sp>
-      <p:sp>
-        <p:nvSpPr>
-          <p:cNvPr id="5" name="TextBox 4"/>
-          <p:cNvSpPr txBox="1"/>
-          <p:nvPr/>
-        </p:nvSpPr>
-        <p:spPr>
-          <a:xfrm>
-            <a:off x="457200" y="384048"/>
-            <a:ext cx="11247120" cy="475488"/>
-          </a:xfrm>
-          <a:prstGeom prst="rect">
-            <a:avLst/>
-          </a:prstGeom>
-          <a:noFill/>
-        </p:spPr>
-        <p:txBody>
-          <a:bodyPr wrap="square" anchor="t">
-            <a:spAutoFit/>
-          </a:bodyPr>
-          <a:lstStyle/>
-          <a:p>
-            <a:pPr algn="l">
-              <a:spcAft>
-                <a:spcPts val="0"/>
-              </a:spcAft>
-            </a:pPr>
-            <a:r>
-              <a:rPr sz="2200" b="1" i="0">
-                <a:solidFill>
-                  <a:srgbClr val="0A1F2E"/>
-                </a:solidFill>
-                <a:latin typeface="Calibri"/>
-              </a:rPr>
-              <a:t>Mutual value for FairBanks and the programme</a:t>
-            </a:r>
-          </a:p>
-        </p:txBody>
-      </p:sp>
-      <p:sp>
-        <p:nvSpPr>
-          <p:cNvPr id="6" name="TextBox 5"/>
-          <p:cNvSpPr txBox="1"/>
-          <p:nvPr/>
-        </p:nvSpPr>
-        <p:spPr>
-          <a:xfrm>
-            <a:off x="457200" y="1143000"/>
-            <a:ext cx="5486400" cy="320040"/>
-          </a:xfrm>
-          <a:prstGeom prst="rect">
-            <a:avLst/>
-          </a:prstGeom>
-          <a:noFill/>
-        </p:spPr>
-        <p:txBody>
-          <a:bodyPr wrap="square" anchor="t">
-            <a:spAutoFit/>
-          </a:bodyPr>
-          <a:lstStyle/>
-          <a:p>
-            <a:pPr algn="l">
-              <a:spcAft>
-                <a:spcPts val="0"/>
-              </a:spcAft>
-            </a:pPr>
-            <a:r>
-              <a:rPr sz="1600" b="1" i="0">
-                <a:solidFill>
-                  <a:srgbClr val="0D6E6E"/>
-                </a:solidFill>
-                <a:latin typeface="Calibri"/>
-              </a:rPr>
-              <a:t>What we gain</a:t>
-            </a:r>
-          </a:p>
-        </p:txBody>
-      </p:sp>
-      <p:sp>
-        <p:nvSpPr>
-          <p:cNvPr id="7" name="TextBox 6"/>
-          <p:cNvSpPr txBox="1"/>
-          <p:nvPr/>
-        </p:nvSpPr>
-        <p:spPr>
-          <a:xfrm>
-            <a:off x="457200" y="1508760"/>
-            <a:ext cx="5486400" cy="4800600"/>
+            <a:off x="411480" y="91440"/>
+            <a:ext cx="10972800" cy="274320"/>
           </a:xfrm>
           <a:prstGeom prst="rect">
             <a:avLst/>
@@ -3849,120 +3393,29 @@
           </a:bodyPr>
           <a:lstStyle/>
           <a:p>
-            <a:pPr>
-              <a:spcAft>
-                <a:spcPts val="800"/>
-              </a:spcAft>
-            </a:pPr>
-            <a:r>
-              <a:rPr sz="1300">
-                <a:solidFill>
-                  <a:srgbClr val="1E2F38"/>
+            <a:pPr algn="l"/>
+            <a:r>
+              <a:rPr sz="1100" b="1" i="0">
+                <a:solidFill>
+                  <a:srgbClr val="C45C26"/>
                 </a:solidFill>
                 <a:latin typeface="Calibri"/>
               </a:rPr>
-              <a:t>•  Hands-on AI skills for young women on the FairBanks team</a:t>
-            </a:r>
-          </a:p>
-          <a:p>
-            <a:pPr>
-              <a:spcAft>
-                <a:spcPts val="800"/>
-              </a:spcAft>
-            </a:pPr>
-            <a:r>
-              <a:rPr sz="1300">
-                <a:solidFill>
-                  <a:srgbClr val="1E2F38"/>
-                </a:solidFill>
-                <a:latin typeface="Calibri"/>
-              </a:rPr>
-              <a:t>•  Gender lens for FCHIP features (maternal risk, adolescent SRH, consent)</a:t>
-            </a:r>
-          </a:p>
-          <a:p>
-            <a:pPr>
-              <a:spcAft>
-                <a:spcPts val="800"/>
-              </a:spcAft>
-            </a:pPr>
-            <a:r>
-              <a:rPr sz="1300">
-                <a:solidFill>
-                  <a:srgbClr val="1E2F38"/>
-                </a:solidFill>
-                <a:latin typeface="Calibri"/>
-              </a:rPr>
-              <a:t>•  A real project deliverable that can plug into community outreach</a:t>
-            </a:r>
-          </a:p>
-          <a:p>
-            <a:pPr>
-              <a:spcAft>
-                <a:spcPts val="800"/>
-              </a:spcAft>
-            </a:pPr>
-            <a:r>
-              <a:rPr sz="1300">
-                <a:solidFill>
-                  <a:srgbClr val="1E2F38"/>
-                </a:solidFill>
-                <a:latin typeface="Calibri"/>
-              </a:rPr>
-              <a:t>•  Global peer network on feminist and responsible AI</a:t>
-            </a:r>
-          </a:p>
-        </p:txBody>
-      </p:sp>
-      <p:sp>
-        <p:nvSpPr>
-          <p:cNvPr id="8" name="TextBox 7"/>
+              <a:t>CURRICULUM MAP</a:t>
+            </a:r>
+          </a:p>
+        </p:txBody>
+      </p:sp>
+      <p:sp>
+        <p:nvSpPr>
+          <p:cNvPr id="5" name="TextBox 4"/>
           <p:cNvSpPr txBox="1"/>
           <p:nvPr/>
         </p:nvSpPr>
         <p:spPr>
           <a:xfrm>
-            <a:off x="6309360" y="1143000"/>
-            <a:ext cx="5486400" cy="320040"/>
-          </a:xfrm>
-          <a:prstGeom prst="rect">
-            <a:avLst/>
-          </a:prstGeom>
-          <a:noFill/>
-        </p:spPr>
-        <p:txBody>
-          <a:bodyPr wrap="square" anchor="t">
-            <a:spAutoFit/>
-          </a:bodyPr>
-          <a:lstStyle/>
-          <a:p>
-            <a:pPr algn="l">
-              <a:spcAft>
-                <a:spcPts val="0"/>
-              </a:spcAft>
-            </a:pPr>
-            <a:r>
-              <a:rPr sz="1600" b="1" i="0">
-                <a:solidFill>
-                  <a:srgbClr val="0D6E6E"/>
-                </a:solidFill>
-                <a:latin typeface="Calibri"/>
-              </a:rPr>
-              <a:t>What they gain</a:t>
-            </a:r>
-          </a:p>
-        </p:txBody>
-      </p:sp>
-      <p:sp>
-        <p:nvSpPr>
-          <p:cNvPr id="9" name="TextBox 8"/>
-          <p:cNvSpPr txBox="1"/>
-          <p:nvPr/>
-        </p:nvSpPr>
-        <p:spPr>
-          <a:xfrm>
-            <a:off x="6309360" y="1508760"/>
-            <a:ext cx="5394960" cy="4800600"/>
+            <a:off x="411480" y="384048"/>
+            <a:ext cx="10972800" cy="457200"/>
           </a:xfrm>
           <a:prstGeom prst="rect">
             <a:avLst/>
@@ -3975,81 +3428,661 @@
           </a:bodyPr>
           <a:lstStyle/>
           <a:p>
-            <a:pPr>
-              <a:spcAft>
-                <a:spcPts val="800"/>
-              </a:spcAft>
-            </a:pPr>
-            <a:r>
-              <a:rPr sz="1300">
-                <a:solidFill>
-                  <a:srgbClr val="1E2F38"/>
+            <a:pPr algn="l"/>
+            <a:r>
+              <a:rPr sz="2400" b="1" i="0">
+                <a:solidFill>
+                  <a:srgbClr val="0A1F2E"/>
                 </a:solidFill>
                 <a:latin typeface="Calibri"/>
               </a:rPr>
-              <a:t>•  Participants who will apply skills immediately in community health</a:t>
-            </a:r>
-          </a:p>
-          <a:p>
-            <a:pPr>
-              <a:spcAft>
-                <a:spcPts val="800"/>
-              </a:spcAft>
-            </a:pPr>
-            <a:r>
-              <a:rPr sz="1300">
-                <a:solidFill>
-                  <a:srgbClr val="1E2F38"/>
+              <a:t>Four learning blocks I will complete</a:t>
+            </a:r>
+          </a:p>
+        </p:txBody>
+      </p:sp>
+      <p:sp>
+        <p:nvSpPr>
+          <p:cNvPr id="6" name="Rectangle 5"/>
+          <p:cNvSpPr/>
+          <p:nvPr/>
+        </p:nvSpPr>
+        <p:spPr>
+          <a:xfrm>
+            <a:off x="457200" y="1143000"/>
+            <a:ext cx="5577840" cy="2377440"/>
+          </a:xfrm>
+          <a:prstGeom prst="rect">
+            <a:avLst/>
+          </a:prstGeom>
+          <a:solidFill>
+            <a:srgbClr val="FFFFFF"/>
+          </a:solidFill>
+          <a:ln>
+            <a:solidFill>
+              <a:srgbClr val="D0DCDC"/>
+            </a:solidFill>
+          </a:ln>
+        </p:spPr>
+        <p:style>
+          <a:lnRef idx="1">
+            <a:schemeClr val="accent1"/>
+          </a:lnRef>
+          <a:fillRef idx="3">
+            <a:schemeClr val="accent1"/>
+          </a:fillRef>
+          <a:effectRef idx="2">
+            <a:schemeClr val="accent1"/>
+          </a:effectRef>
+          <a:fontRef idx="minor">
+            <a:schemeClr val="lt1"/>
+          </a:fontRef>
+        </p:style>
+        <p:txBody>
+          <a:bodyPr rtlCol="0" anchor="ctr"/>
+          <a:lstStyle/>
+          <a:p>
+            <a:pPr algn="ctr"/>
+          </a:p>
+        </p:txBody>
+      </p:sp>
+      <p:sp>
+        <p:nvSpPr>
+          <p:cNvPr id="7" name="Rectangle 6"/>
+          <p:cNvSpPr/>
+          <p:nvPr/>
+        </p:nvSpPr>
+        <p:spPr>
+          <a:xfrm>
+            <a:off x="457200" y="1143000"/>
+            <a:ext cx="5577840" cy="109728"/>
+          </a:xfrm>
+          <a:prstGeom prst="rect">
+            <a:avLst/>
+          </a:prstGeom>
+          <a:solidFill>
+            <a:srgbClr val="0D6E6E"/>
+          </a:solidFill>
+          <a:ln>
+            <a:noFill/>
+          </a:ln>
+        </p:spPr>
+        <p:style>
+          <a:lnRef idx="1">
+            <a:schemeClr val="accent1"/>
+          </a:lnRef>
+          <a:fillRef idx="3">
+            <a:schemeClr val="accent1"/>
+          </a:fillRef>
+          <a:effectRef idx="2">
+            <a:schemeClr val="accent1"/>
+          </a:effectRef>
+          <a:fontRef idx="minor">
+            <a:schemeClr val="lt1"/>
+          </a:fontRef>
+        </p:style>
+        <p:txBody>
+          <a:bodyPr rtlCol="0" anchor="ctr"/>
+          <a:lstStyle/>
+          <a:p>
+            <a:pPr algn="ctr"/>
+          </a:p>
+        </p:txBody>
+      </p:sp>
+      <p:sp>
+        <p:nvSpPr>
+          <p:cNvPr id="8" name="TextBox 7"/>
+          <p:cNvSpPr txBox="1"/>
+          <p:nvPr/>
+        </p:nvSpPr>
+        <p:spPr>
+          <a:xfrm>
+            <a:off x="640080" y="1371600"/>
+            <a:ext cx="5212080" cy="411480"/>
+          </a:xfrm>
+          <a:prstGeom prst="rect">
+            <a:avLst/>
+          </a:prstGeom>
+          <a:noFill/>
+        </p:spPr>
+        <p:txBody>
+          <a:bodyPr wrap="square">
+            <a:spAutoFit/>
+          </a:bodyPr>
+          <a:lstStyle/>
+          <a:p>
+            <a:pPr algn="l"/>
+            <a:r>
+              <a:rPr sz="1500" b="1" i="0">
+                <a:solidFill>
+                  <a:srgbClr val="0D6E6E"/>
                 </a:solidFill>
                 <a:latin typeface="Calibri"/>
               </a:rPr>
-              <a:t>•  A Uganda case study linking AI for gender equality to primary care</a:t>
-            </a:r>
-          </a:p>
-          <a:p>
-            <a:pPr>
-              <a:spcAft>
-                <a:spcPts val="800"/>
-              </a:spcAft>
-            </a:pPr>
-            <a:r>
-              <a:rPr sz="1300">
-                <a:solidFill>
-                  <a:srgbClr val="1E2F38"/>
+              <a:t>Foundations of feminist AI</a:t>
+            </a:r>
+          </a:p>
+        </p:txBody>
+      </p:sp>
+      <p:sp>
+        <p:nvSpPr>
+          <p:cNvPr id="9" name="TextBox 8"/>
+          <p:cNvSpPr txBox="1"/>
+          <p:nvPr/>
+        </p:nvSpPr>
+        <p:spPr>
+          <a:xfrm>
+            <a:off x="640080" y="1828800"/>
+            <a:ext cx="5212080" cy="1463040"/>
+          </a:xfrm>
+          <a:prstGeom prst="rect">
+            <a:avLst/>
+          </a:prstGeom>
+          <a:noFill/>
+        </p:spPr>
+        <p:txBody>
+          <a:bodyPr wrap="square">
+            <a:spAutoFit/>
+          </a:bodyPr>
+          <a:lstStyle/>
+          <a:p>
+            <a:pPr algn="l"/>
+            <a:r>
+              <a:rPr sz="1300" b="0" i="0">
+                <a:solidFill>
+                  <a:srgbClr val="3A4A54"/>
                 </a:solidFill>
                 <a:latin typeface="Calibri"/>
               </a:rPr>
-              <a:t>•  Amplification through FairBanks Community Reach programmes</a:t>
-            </a:r>
-          </a:p>
-          <a:p>
-            <a:pPr>
-              <a:spcAft>
-                <a:spcPts val="800"/>
-              </a:spcAft>
-            </a:pPr>
-            <a:r>
-              <a:rPr sz="1300">
-                <a:solidFill>
-                  <a:srgbClr val="1E2F38"/>
+              <a:t>Bias in health datasets; who is missing from training data; participatory design with women and girls.</a:t>
+            </a:r>
+          </a:p>
+        </p:txBody>
+      </p:sp>
+      <p:sp>
+        <p:nvSpPr>
+          <p:cNvPr id="10" name="Rectangle 9"/>
+          <p:cNvSpPr/>
+          <p:nvPr/>
+        </p:nvSpPr>
+        <p:spPr>
+          <a:xfrm>
+            <a:off x="6263640" y="1143000"/>
+            <a:ext cx="5577840" cy="2377440"/>
+          </a:xfrm>
+          <a:prstGeom prst="rect">
+            <a:avLst/>
+          </a:prstGeom>
+          <a:solidFill>
+            <a:srgbClr val="FFFFFF"/>
+          </a:solidFill>
+          <a:ln>
+            <a:solidFill>
+              <a:srgbClr val="D0DCDC"/>
+            </a:solidFill>
+          </a:ln>
+        </p:spPr>
+        <p:style>
+          <a:lnRef idx="1">
+            <a:schemeClr val="accent1"/>
+          </a:lnRef>
+          <a:fillRef idx="3">
+            <a:schemeClr val="accent1"/>
+          </a:fillRef>
+          <a:effectRef idx="2">
+            <a:schemeClr val="accent1"/>
+          </a:effectRef>
+          <a:fontRef idx="minor">
+            <a:schemeClr val="lt1"/>
+          </a:fontRef>
+        </p:style>
+        <p:txBody>
+          <a:bodyPr rtlCol="0" anchor="ctr"/>
+          <a:lstStyle/>
+          <a:p>
+            <a:pPr algn="ctr"/>
+          </a:p>
+        </p:txBody>
+      </p:sp>
+      <p:sp>
+        <p:nvSpPr>
+          <p:cNvPr id="11" name="Rectangle 10"/>
+          <p:cNvSpPr/>
+          <p:nvPr/>
+        </p:nvSpPr>
+        <p:spPr>
+          <a:xfrm>
+            <a:off x="6263640" y="1143000"/>
+            <a:ext cx="5577840" cy="109728"/>
+          </a:xfrm>
+          <a:prstGeom prst="rect">
+            <a:avLst/>
+          </a:prstGeom>
+          <a:solidFill>
+            <a:srgbClr val="0D6E6E"/>
+          </a:solidFill>
+          <a:ln>
+            <a:noFill/>
+          </a:ln>
+        </p:spPr>
+        <p:style>
+          <a:lnRef idx="1">
+            <a:schemeClr val="accent1"/>
+          </a:lnRef>
+          <a:fillRef idx="3">
+            <a:schemeClr val="accent1"/>
+          </a:fillRef>
+          <a:effectRef idx="2">
+            <a:schemeClr val="accent1"/>
+          </a:effectRef>
+          <a:fontRef idx="minor">
+            <a:schemeClr val="lt1"/>
+          </a:fontRef>
+        </p:style>
+        <p:txBody>
+          <a:bodyPr rtlCol="0" anchor="ctr"/>
+          <a:lstStyle/>
+          <a:p>
+            <a:pPr algn="ctr"/>
+          </a:p>
+        </p:txBody>
+      </p:sp>
+      <p:sp>
+        <p:nvSpPr>
+          <p:cNvPr id="12" name="TextBox 11"/>
+          <p:cNvSpPr txBox="1"/>
+          <p:nvPr/>
+        </p:nvSpPr>
+        <p:spPr>
+          <a:xfrm>
+            <a:off x="6446520" y="1371600"/>
+            <a:ext cx="5212080" cy="411480"/>
+          </a:xfrm>
+          <a:prstGeom prst="rect">
+            <a:avLst/>
+          </a:prstGeom>
+          <a:noFill/>
+        </p:spPr>
+        <p:txBody>
+          <a:bodyPr wrap="square">
+            <a:spAutoFit/>
+          </a:bodyPr>
+          <a:lstStyle/>
+          <a:p>
+            <a:pPr algn="l"/>
+            <a:r>
+              <a:rPr sz="1500" b="1" i="0">
+                <a:solidFill>
+                  <a:srgbClr val="0D6E6E"/>
                 </a:solidFill>
                 <a:latin typeface="Calibri"/>
               </a:rPr>
-              <a:t>•  Contribution to the 70%+ young women participation goal with serious applicants</a:t>
-            </a:r>
-          </a:p>
-        </p:txBody>
-      </p:sp>
-      <p:sp>
-        <p:nvSpPr>
-          <p:cNvPr id="10" name="Rectangle 9"/>
+              <a:t>Responsible ML for community health</a:t>
+            </a:r>
+          </a:p>
+        </p:txBody>
+      </p:sp>
+      <p:sp>
+        <p:nvSpPr>
+          <p:cNvPr id="13" name="TextBox 12"/>
+          <p:cNvSpPr txBox="1"/>
+          <p:nvPr/>
+        </p:nvSpPr>
+        <p:spPr>
+          <a:xfrm>
+            <a:off x="6446520" y="1828800"/>
+            <a:ext cx="5212080" cy="1463040"/>
+          </a:xfrm>
+          <a:prstGeom prst="rect">
+            <a:avLst/>
+          </a:prstGeom>
+          <a:noFill/>
+        </p:spPr>
+        <p:txBody>
+          <a:bodyPr wrap="square">
+            <a:spAutoFit/>
+          </a:bodyPr>
+          <a:lstStyle/>
+          <a:p>
+            <a:pPr algn="l"/>
+            <a:r>
+              <a:rPr sz="1300" b="0" i="0">
+                <a:solidFill>
+                  <a:srgbClr val="3A4A54"/>
+                </a:solidFill>
+                <a:latin typeface="Calibri"/>
+              </a:rPr>
+              <a:t>Explainable alerts, consent, and offline-first capture for CHWs in low-bandwidth settings.</a:t>
+            </a:r>
+          </a:p>
+        </p:txBody>
+      </p:sp>
+      <p:sp>
+        <p:nvSpPr>
+          <p:cNvPr id="14" name="Rectangle 13"/>
           <p:cNvSpPr/>
           <p:nvPr/>
         </p:nvSpPr>
         <p:spPr>
           <a:xfrm>
-            <a:off x="0" y="6565392"/>
-            <a:ext cx="12191695" cy="292608"/>
+            <a:off x="457200" y="3749040"/>
+            <a:ext cx="5577840" cy="2377440"/>
+          </a:xfrm>
+          <a:prstGeom prst="rect">
+            <a:avLst/>
+          </a:prstGeom>
+          <a:solidFill>
+            <a:srgbClr val="FFFFFF"/>
+          </a:solidFill>
+          <a:ln>
+            <a:solidFill>
+              <a:srgbClr val="D0DCDC"/>
+            </a:solidFill>
+          </a:ln>
+        </p:spPr>
+        <p:style>
+          <a:lnRef idx="1">
+            <a:schemeClr val="accent1"/>
+          </a:lnRef>
+          <a:fillRef idx="3">
+            <a:schemeClr val="accent1"/>
+          </a:fillRef>
+          <a:effectRef idx="2">
+            <a:schemeClr val="accent1"/>
+          </a:effectRef>
+          <a:fontRef idx="minor">
+            <a:schemeClr val="lt1"/>
+          </a:fontRef>
+        </p:style>
+        <p:txBody>
+          <a:bodyPr rtlCol="0" anchor="ctr"/>
+          <a:lstStyle/>
+          <a:p>
+            <a:pPr algn="ctr"/>
+          </a:p>
+        </p:txBody>
+      </p:sp>
+      <p:sp>
+        <p:nvSpPr>
+          <p:cNvPr id="15" name="Rectangle 14"/>
+          <p:cNvSpPr/>
+          <p:nvPr/>
+        </p:nvSpPr>
+        <p:spPr>
+          <a:xfrm>
+            <a:off x="457200" y="3749040"/>
+            <a:ext cx="5577840" cy="109728"/>
+          </a:xfrm>
+          <a:prstGeom prst="rect">
+            <a:avLst/>
+          </a:prstGeom>
+          <a:solidFill>
+            <a:srgbClr val="0D6E6E"/>
+          </a:solidFill>
+          <a:ln>
+            <a:noFill/>
+          </a:ln>
+        </p:spPr>
+        <p:style>
+          <a:lnRef idx="1">
+            <a:schemeClr val="accent1"/>
+          </a:lnRef>
+          <a:fillRef idx="3">
+            <a:schemeClr val="accent1"/>
+          </a:fillRef>
+          <a:effectRef idx="2">
+            <a:schemeClr val="accent1"/>
+          </a:effectRef>
+          <a:fontRef idx="minor">
+            <a:schemeClr val="lt1"/>
+          </a:fontRef>
+        </p:style>
+        <p:txBody>
+          <a:bodyPr rtlCol="0" anchor="ctr"/>
+          <a:lstStyle/>
+          <a:p>
+            <a:pPr algn="ctr"/>
+          </a:p>
+        </p:txBody>
+      </p:sp>
+      <p:sp>
+        <p:nvSpPr>
+          <p:cNvPr id="16" name="TextBox 15"/>
+          <p:cNvSpPr txBox="1"/>
+          <p:nvPr/>
+        </p:nvSpPr>
+        <p:spPr>
+          <a:xfrm>
+            <a:off x="640080" y="3977640"/>
+            <a:ext cx="5212080" cy="411480"/>
+          </a:xfrm>
+          <a:prstGeom prst="rect">
+            <a:avLst/>
+          </a:prstGeom>
+          <a:noFill/>
+        </p:spPr>
+        <p:txBody>
+          <a:bodyPr wrap="square">
+            <a:spAutoFit/>
+          </a:bodyPr>
+          <a:lstStyle/>
+          <a:p>
+            <a:pPr algn="l"/>
+            <a:r>
+              <a:rPr sz="1500" b="1" i="0">
+                <a:solidFill>
+                  <a:srgbClr val="0D6E6E"/>
+                </a:solidFill>
+                <a:latin typeface="Calibri"/>
+              </a:rPr>
+              <a:t>Gender-responsive product design</a:t>
+            </a:r>
+          </a:p>
+        </p:txBody>
+      </p:sp>
+      <p:sp>
+        <p:nvSpPr>
+          <p:cNvPr id="17" name="TextBox 16"/>
+          <p:cNvSpPr txBox="1"/>
+          <p:nvPr/>
+        </p:nvSpPr>
+        <p:spPr>
+          <a:xfrm>
+            <a:off x="640080" y="4434840"/>
+            <a:ext cx="5212080" cy="1463040"/>
+          </a:xfrm>
+          <a:prstGeom prst="rect">
+            <a:avLst/>
+          </a:prstGeom>
+          <a:noFill/>
+        </p:spPr>
+        <p:txBody>
+          <a:bodyPr wrap="square">
+            <a:spAutoFit/>
+          </a:bodyPr>
+          <a:lstStyle/>
+          <a:p>
+            <a:pPr algn="l"/>
+            <a:r>
+              <a:rPr sz="1300" b="0" i="0">
+                <a:solidFill>
+                  <a:srgbClr val="3A4A54"/>
+                </a:solidFill>
+                <a:latin typeface="Calibri"/>
+              </a:rPr>
+              <a:t>Interfaces and workflows that work for mothers, adolescents, and CHWs — not only engineers.</a:t>
+            </a:r>
+          </a:p>
+        </p:txBody>
+      </p:sp>
+      <p:sp>
+        <p:nvSpPr>
+          <p:cNvPr id="18" name="Rectangle 17"/>
+          <p:cNvSpPr/>
+          <p:nvPr/>
+        </p:nvSpPr>
+        <p:spPr>
+          <a:xfrm>
+            <a:off x="6263640" y="3749040"/>
+            <a:ext cx="5577840" cy="2377440"/>
+          </a:xfrm>
+          <a:prstGeom prst="rect">
+            <a:avLst/>
+          </a:prstGeom>
+          <a:solidFill>
+            <a:srgbClr val="FFFFFF"/>
+          </a:solidFill>
+          <a:ln>
+            <a:solidFill>
+              <a:srgbClr val="D0DCDC"/>
+            </a:solidFill>
+          </a:ln>
+        </p:spPr>
+        <p:style>
+          <a:lnRef idx="1">
+            <a:schemeClr val="accent1"/>
+          </a:lnRef>
+          <a:fillRef idx="3">
+            <a:schemeClr val="accent1"/>
+          </a:fillRef>
+          <a:effectRef idx="2">
+            <a:schemeClr val="accent1"/>
+          </a:effectRef>
+          <a:fontRef idx="minor">
+            <a:schemeClr val="lt1"/>
+          </a:fontRef>
+        </p:style>
+        <p:txBody>
+          <a:bodyPr rtlCol="0" anchor="ctr"/>
+          <a:lstStyle/>
+          <a:p>
+            <a:pPr algn="ctr"/>
+          </a:p>
+        </p:txBody>
+      </p:sp>
+      <p:sp>
+        <p:nvSpPr>
+          <p:cNvPr id="19" name="Rectangle 18"/>
+          <p:cNvSpPr/>
+          <p:nvPr/>
+        </p:nvSpPr>
+        <p:spPr>
+          <a:xfrm>
+            <a:off x="6263640" y="3749040"/>
+            <a:ext cx="5577840" cy="109728"/>
+          </a:xfrm>
+          <a:prstGeom prst="rect">
+            <a:avLst/>
+          </a:prstGeom>
+          <a:solidFill>
+            <a:srgbClr val="0D6E6E"/>
+          </a:solidFill>
+          <a:ln>
+            <a:noFill/>
+          </a:ln>
+        </p:spPr>
+        <p:style>
+          <a:lnRef idx="1">
+            <a:schemeClr val="accent1"/>
+          </a:lnRef>
+          <a:fillRef idx="3">
+            <a:schemeClr val="accent1"/>
+          </a:fillRef>
+          <a:effectRef idx="2">
+            <a:schemeClr val="accent1"/>
+          </a:effectRef>
+          <a:fontRef idx="minor">
+            <a:schemeClr val="lt1"/>
+          </a:fontRef>
+        </p:style>
+        <p:txBody>
+          <a:bodyPr rtlCol="0" anchor="ctr"/>
+          <a:lstStyle/>
+          <a:p>
+            <a:pPr algn="ctr"/>
+          </a:p>
+        </p:txBody>
+      </p:sp>
+      <p:sp>
+        <p:nvSpPr>
+          <p:cNvPr id="20" name="TextBox 19"/>
+          <p:cNvSpPr txBox="1"/>
+          <p:nvPr/>
+        </p:nvSpPr>
+        <p:spPr>
+          <a:xfrm>
+            <a:off x="6446520" y="3977640"/>
+            <a:ext cx="5212080" cy="411480"/>
+          </a:xfrm>
+          <a:prstGeom prst="rect">
+            <a:avLst/>
+          </a:prstGeom>
+          <a:noFill/>
+        </p:spPr>
+        <p:txBody>
+          <a:bodyPr wrap="square">
+            <a:spAutoFit/>
+          </a:bodyPr>
+          <a:lstStyle/>
+          <a:p>
+            <a:pPr algn="l"/>
+            <a:r>
+              <a:rPr sz="1500" b="1" i="0">
+                <a:solidFill>
+                  <a:srgbClr val="0D6E6E"/>
+                </a:solidFill>
+                <a:latin typeface="Calibri"/>
+              </a:rPr>
+              <a:t>Policy &amp; advocacy</a:t>
+            </a:r>
+          </a:p>
+        </p:txBody>
+      </p:sp>
+      <p:sp>
+        <p:nvSpPr>
+          <p:cNvPr id="21" name="TextBox 20"/>
+          <p:cNvSpPr txBox="1"/>
+          <p:nvPr/>
+        </p:nvSpPr>
+        <p:spPr>
+          <a:xfrm>
+            <a:off x="6446520" y="4434840"/>
+            <a:ext cx="5212080" cy="1463040"/>
+          </a:xfrm>
+          <a:prstGeom prst="rect">
+            <a:avLst/>
+          </a:prstGeom>
+          <a:noFill/>
+        </p:spPr>
+        <p:txBody>
+          <a:bodyPr wrap="square">
+            <a:spAutoFit/>
+          </a:bodyPr>
+          <a:lstStyle/>
+          <a:p>
+            <a:pPr algn="l"/>
+            <a:r>
+              <a:rPr sz="1300" b="0" i="0">
+                <a:solidFill>
+                  <a:srgbClr val="3A4A54"/>
+                </a:solidFill>
+                <a:latin typeface="Calibri"/>
+              </a:rPr>
+              <a:t>Translating model outputs into action without stigmatising vulnerable groups.</a:t>
+            </a:r>
+          </a:p>
+        </p:txBody>
+      </p:sp>
+      <p:sp>
+        <p:nvSpPr>
+          <p:cNvPr id="22" name="Rectangle 21"/>
+          <p:cNvSpPr/>
+          <p:nvPr/>
+        </p:nvSpPr>
+        <p:spPr>
+          <a:xfrm>
+            <a:off x="0" y="6583680"/>
+            <a:ext cx="12191695" cy="274320"/>
           </a:xfrm>
           <a:prstGeom prst="rect">
             <a:avLst/>
@@ -4060,7 +4093,6 @@
           <a:ln>
             <a:noFill/>
           </a:ln>
-          <a:effectLst/>
         </p:spPr>
         <p:style>
           <a:lnRef idx="1">
@@ -4086,14 +4118,14 @@
       </p:sp>
       <p:sp>
         <p:nvSpPr>
-          <p:cNvPr id="11" name="TextBox 10"/>
+          <p:cNvPr id="23" name="TextBox 22"/>
           <p:cNvSpPr txBox="1"/>
           <p:nvPr/>
         </p:nvSpPr>
         <p:spPr>
           <a:xfrm>
-            <a:off x="365760" y="6574536"/>
-            <a:ext cx="9144000" cy="274320"/>
+            <a:off x="365760" y="6592824"/>
+            <a:ext cx="9144000" cy="256032"/>
           </a:xfrm>
           <a:prstGeom prst="rect">
             <a:avLst/>
@@ -4101,16 +4133,12 @@
           <a:noFill/>
         </p:spPr>
         <p:txBody>
-          <a:bodyPr wrap="square" anchor="ctr">
+          <a:bodyPr wrap="square">
             <a:spAutoFit/>
           </a:bodyPr>
           <a:lstStyle/>
           <a:p>
-            <a:pPr algn="l">
-              <a:spcAft>
-                <a:spcPts val="0"/>
-              </a:spcAft>
-            </a:pPr>
+            <a:pPr algn="l"/>
             <a:r>
               <a:rPr sz="900" b="0" i="0">
                 <a:solidFill>
@@ -4118,21 +4146,21 @@
                 </a:solidFill>
                 <a:latin typeface="Calibri"/>
               </a:rPr>
-              <a:t>FairBanks FCHIP  |  Young Feminist AI School 2026 (UN Women)  |  Your health, our mission.</a:t>
-            </a:r>
-          </a:p>
-        </p:txBody>
-      </p:sp>
-      <p:sp>
-        <p:nvSpPr>
-          <p:cNvPr id="12" name="TextBox 11"/>
+              <a:t>FairBanks FCHIP | Young Feminist AI School | Your health, our mission.</a:t>
+            </a:r>
+          </a:p>
+        </p:txBody>
+      </p:sp>
+      <p:sp>
+        <p:nvSpPr>
+          <p:cNvPr id="24" name="TextBox 23"/>
           <p:cNvSpPr txBox="1"/>
           <p:nvPr/>
         </p:nvSpPr>
         <p:spPr>
           <a:xfrm>
-            <a:off x="11094415" y="6574536"/>
-            <a:ext cx="731520" cy="274320"/>
+            <a:off x="11460175" y="6592824"/>
+            <a:ext cx="457200" cy="256032"/>
           </a:xfrm>
           <a:prstGeom prst="rect">
             <a:avLst/>
@@ -4140,16 +4168,12 @@
           <a:noFill/>
         </p:spPr>
         <p:txBody>
-          <a:bodyPr wrap="square" anchor="ctr">
+          <a:bodyPr wrap="square">
             <a:spAutoFit/>
           </a:bodyPr>
           <a:lstStyle/>
           <a:p>
-            <a:pPr algn="r">
-              <a:spcAft>
-                <a:spcPts val="0"/>
-              </a:spcAft>
-            </a:pPr>
+            <a:pPr algn="r"/>
             <a:r>
               <a:rPr sz="900" b="0" i="0">
                 <a:solidFill>
@@ -4189,7 +4213,7 @@
         <p:spPr>
           <a:xfrm>
             <a:off x="0" y="0"/>
-            <a:ext cx="12191695" cy="960120"/>
+            <a:ext cx="12191695" cy="914400"/>
           </a:xfrm>
           <a:prstGeom prst="rect">
             <a:avLst/>
@@ -4200,7 +4224,6 @@
           <a:ln>
             <a:noFill/>
           </a:ln>
-          <a:effectLst/>
         </p:spPr>
         <p:style>
           <a:lnRef idx="1">
@@ -4233,7 +4256,7 @@
         <p:spPr>
           <a:xfrm>
             <a:off x="0" y="0"/>
-            <a:ext cx="164592" cy="960120"/>
+            <a:ext cx="137160" cy="914400"/>
           </a:xfrm>
           <a:prstGeom prst="rect">
             <a:avLst/>
@@ -4244,7 +4267,6 @@
           <a:ln>
             <a:noFill/>
           </a:ln>
-          <a:effectLst/>
         </p:spPr>
         <p:style>
           <a:lnRef idx="1">
@@ -4276,8 +4298,8 @@
         </p:nvSpPr>
         <p:spPr>
           <a:xfrm>
-            <a:off x="457200" y="109728"/>
-            <a:ext cx="10972800" cy="256032"/>
+            <a:off x="411480" y="91440"/>
+            <a:ext cx="10972800" cy="274320"/>
           </a:xfrm>
           <a:prstGeom prst="rect">
             <a:avLst/>
@@ -4285,16 +4307,12 @@
           <a:noFill/>
         </p:spPr>
         <p:txBody>
-          <a:bodyPr wrap="square" anchor="t">
+          <a:bodyPr wrap="square">
             <a:spAutoFit/>
           </a:bodyPr>
           <a:lstStyle/>
           <a:p>
-            <a:pPr algn="l">
-              <a:spcAft>
-                <a:spcPts val="0"/>
-              </a:spcAft>
-            </a:pPr>
+            <a:pPr algn="l"/>
             <a:r>
               <a:rPr sz="1100" b="1" i="0">
                 <a:solidFill>
@@ -4302,7 +4320,7 @@
                 </a:solidFill>
                 <a:latin typeface="Calibri"/>
               </a:rPr>
-              <a:t>THE PROBLEM</a:t>
+              <a:t>PROBLEM</a:t>
             </a:r>
           </a:p>
         </p:txBody>
@@ -4315,8 +4333,8 @@
         </p:nvSpPr>
         <p:spPr>
           <a:xfrm>
-            <a:off x="457200" y="384048"/>
-            <a:ext cx="11247120" cy="475488"/>
+            <a:off x="411480" y="384048"/>
+            <a:ext cx="10972800" cy="457200"/>
           </a:xfrm>
           <a:prstGeom prst="rect">
             <a:avLst/>
@@ -4324,31 +4342,27 @@
           <a:noFill/>
         </p:spPr>
         <p:txBody>
-          <a:bodyPr wrap="square" anchor="t">
+          <a:bodyPr wrap="square">
             <a:spAutoFit/>
           </a:bodyPr>
           <a:lstStyle/>
           <a:p>
-            <a:pPr algn="l">
-              <a:spcAft>
-                <a:spcPts val="0"/>
-              </a:spcAft>
-            </a:pPr>
-            <a:r>
-              <a:rPr sz="2200" b="1" i="0">
+            <a:pPr algn="l"/>
+            <a:r>
+              <a:rPr sz="2400" b="1" i="0">
                 <a:solidFill>
                   <a:srgbClr val="0A1F2E"/>
                 </a:solidFill>
                 <a:latin typeface="Calibri"/>
               </a:rPr>
-              <a:t>Health systems react too late</a:t>
+              <a:t>Health AI often ignores women and girls</a:t>
             </a:r>
           </a:p>
         </p:txBody>
       </p:sp>
       <p:pic>
         <p:nvPicPr>
-          <p:cNvPr id="6" name="Picture 5" descr="reactive_clinic_opt.jpg"/>
+          <p:cNvPr id="6" name="Picture 5" descr="waiting_room_mothers_01_opt.jpg"/>
           <p:cNvPicPr>
             <a:picLocks noChangeAspect="1"/>
           </p:cNvPicPr>
@@ -4362,8 +4376,8 @@
         </p:blipFill>
         <p:spPr>
           <a:xfrm>
-            <a:off x="411480" y="2004691"/>
-            <a:ext cx="5303520" cy="3534417"/>
+            <a:off x="1143000" y="1051560"/>
+            <a:ext cx="3840480" cy="5120640"/>
           </a:xfrm>
           <a:prstGeom prst="rect">
             <a:avLst/>
@@ -4378,8 +4392,8 @@
         </p:nvSpPr>
         <p:spPr>
           <a:xfrm>
-            <a:off x="6035040" y="1234440"/>
-            <a:ext cx="5669280" cy="5074920"/>
+            <a:off x="5943600" y="1097280"/>
+            <a:ext cx="5760720" cy="5029200"/>
           </a:xfrm>
           <a:prstGeom prst="rect">
             <a:avLst/>
@@ -4392,83 +4406,17 @@
           </a:bodyPr>
           <a:lstStyle/>
           <a:p>
-            <a:pPr>
-              <a:spcAft>
-                <a:spcPts val="800"/>
-              </a:spcAft>
-            </a:pPr>
-            <a:r>
-              <a:rPr sz="1400">
+            <a:pPr algn="l"/>
+            <a:r>
+              <a:rPr sz="1700" b="0" i="0">
                 <a:solidFill>
                   <a:srgbClr val="1E2F38"/>
                 </a:solidFill>
                 <a:latin typeface="Calibri"/>
               </a:rPr>
-              <a:t>•  Care often starts only after people fall sick</a:t>
-            </a:r>
-          </a:p>
-          <a:p>
-            <a:pPr>
-              <a:spcAft>
-                <a:spcPts val="800"/>
-              </a:spcAft>
-            </a:pPr>
-            <a:r>
-              <a:rPr sz="1400">
-                <a:solidFill>
-                  <a:srgbClr val="1E2F38"/>
-                </a:solidFill>
-                <a:latin typeface="Calibri"/>
-              </a:rPr>
-              <a:t>•  Community health data sits in paper registers and silos</a:t>
-            </a:r>
-          </a:p>
-          <a:p>
-            <a:pPr>
-              <a:spcAft>
-                <a:spcPts val="800"/>
-              </a:spcAft>
-            </a:pPr>
-            <a:r>
-              <a:rPr sz="1400">
-                <a:solidFill>
-                  <a:srgbClr val="1E2F38"/>
-                </a:solidFill>
-                <a:latin typeface="Calibri"/>
-              </a:rPr>
-              <a:t>•  High-risk pregnancies and NCDs are found too late</a:t>
-            </a:r>
-          </a:p>
-          <a:p>
-            <a:pPr>
-              <a:spcAft>
-                <a:spcPts val="800"/>
-              </a:spcAft>
-            </a:pPr>
-            <a:r>
-              <a:rPr sz="1400">
-                <a:solidFill>
-                  <a:srgbClr val="1E2F38"/>
-                </a:solidFill>
-                <a:latin typeface="Calibri"/>
-              </a:rPr>
-              <a:t>•  Medicine stock-outs hit hard during disease surges</a:t>
-            </a:r>
-          </a:p>
-          <a:p>
-            <a:pPr>
-              <a:spcAft>
-                <a:spcPts val="800"/>
-              </a:spcAft>
-            </a:pPr>
-            <a:r>
-              <a:rPr sz="1400">
-                <a:solidFill>
-                  <a:srgbClr val="1E2F38"/>
-                </a:solidFill>
-                <a:latin typeface="Calibri"/>
-              </a:rPr>
-              <a:t>•  Health shocks push poor families deeper into hardship</a:t>
+              <a:t>Missing data → biased models → harmful or useless alerts
+Maternal &amp; adolescent programmes need participatory design
+FairBanks outreach is where ethics meets engineering</a:t>
             </a:r>
           </a:p>
         </p:txBody>
@@ -4481,8 +4429,8 @@
         </p:nvSpPr>
         <p:spPr>
           <a:xfrm>
-            <a:off x="0" y="6565392"/>
-            <a:ext cx="12191695" cy="292608"/>
+            <a:off x="0" y="6583680"/>
+            <a:ext cx="12191695" cy="274320"/>
           </a:xfrm>
           <a:prstGeom prst="rect">
             <a:avLst/>
@@ -4493,7 +4441,6 @@
           <a:ln>
             <a:noFill/>
           </a:ln>
-          <a:effectLst/>
         </p:spPr>
         <p:style>
           <a:lnRef idx="1">
@@ -4525,8 +4472,8 @@
         </p:nvSpPr>
         <p:spPr>
           <a:xfrm>
-            <a:off x="365760" y="6574536"/>
-            <a:ext cx="9144000" cy="274320"/>
+            <a:off x="365760" y="6592824"/>
+            <a:ext cx="9144000" cy="256032"/>
           </a:xfrm>
           <a:prstGeom prst="rect">
             <a:avLst/>
@@ -4534,16 +4481,12 @@
           <a:noFill/>
         </p:spPr>
         <p:txBody>
-          <a:bodyPr wrap="square" anchor="ctr">
+          <a:bodyPr wrap="square">
             <a:spAutoFit/>
           </a:bodyPr>
           <a:lstStyle/>
           <a:p>
-            <a:pPr algn="l">
-              <a:spcAft>
-                <a:spcPts val="0"/>
-              </a:spcAft>
-            </a:pPr>
+            <a:pPr algn="l"/>
             <a:r>
               <a:rPr sz="900" b="0" i="0">
                 <a:solidFill>
@@ -4551,7 +4494,7 @@
                 </a:solidFill>
                 <a:latin typeface="Calibri"/>
               </a:rPr>
-              <a:t>FairBanks FCHIP  |  Young Feminist AI School 2026 (UN Women)  |  Your health, our mission.</a:t>
+              <a:t>FairBanks FCHIP | Young Feminist AI School | Your health, our mission.</a:t>
             </a:r>
           </a:p>
         </p:txBody>
@@ -4564,8 +4507,8 @@
         </p:nvSpPr>
         <p:spPr>
           <a:xfrm>
-            <a:off x="11094415" y="6574536"/>
-            <a:ext cx="731520" cy="274320"/>
+            <a:off x="11460175" y="6592824"/>
+            <a:ext cx="457200" cy="256032"/>
           </a:xfrm>
           <a:prstGeom prst="rect">
             <a:avLst/>
@@ -4573,16 +4516,12 @@
           <a:noFill/>
         </p:spPr>
         <p:txBody>
-          <a:bodyPr wrap="square" anchor="ctr">
+          <a:bodyPr wrap="square">
             <a:spAutoFit/>
           </a:bodyPr>
           <a:lstStyle/>
           <a:p>
-            <a:pPr algn="r">
-              <a:spcAft>
-                <a:spcPts val="0"/>
-              </a:spcAft>
-            </a:pPr>
+            <a:pPr algn="r"/>
             <a:r>
               <a:rPr sz="900" b="0" i="0">
                 <a:solidFill>
@@ -4622,7 +4561,7 @@
         <p:spPr>
           <a:xfrm>
             <a:off x="0" y="0"/>
-            <a:ext cx="12191695" cy="960120"/>
+            <a:ext cx="12191695" cy="914400"/>
           </a:xfrm>
           <a:prstGeom prst="rect">
             <a:avLst/>
@@ -4633,7 +4572,6 @@
           <a:ln>
             <a:noFill/>
           </a:ln>
-          <a:effectLst/>
         </p:spPr>
         <p:style>
           <a:lnRef idx="1">
@@ -4666,7 +4604,7 @@
         <p:spPr>
           <a:xfrm>
             <a:off x="0" y="0"/>
-            <a:ext cx="164592" cy="960120"/>
+            <a:ext cx="137160" cy="914400"/>
           </a:xfrm>
           <a:prstGeom prst="rect">
             <a:avLst/>
@@ -4677,7 +4615,6 @@
           <a:ln>
             <a:noFill/>
           </a:ln>
-          <a:effectLst/>
         </p:spPr>
         <p:style>
           <a:lnRef idx="1">
@@ -4709,110 +4646,8 @@
         </p:nvSpPr>
         <p:spPr>
           <a:xfrm>
-            <a:off x="457200" y="109728"/>
-            <a:ext cx="10972800" cy="256032"/>
-          </a:xfrm>
-          <a:prstGeom prst="rect">
-            <a:avLst/>
-          </a:prstGeom>
-          <a:noFill/>
-        </p:spPr>
-        <p:txBody>
-          <a:bodyPr wrap="square" anchor="t">
-            <a:spAutoFit/>
-          </a:bodyPr>
-          <a:lstStyle/>
-          <a:p>
-            <a:pPr algn="l">
-              <a:spcAft>
-                <a:spcPts val="0"/>
-              </a:spcAft>
-            </a:pPr>
-            <a:r>
-              <a:rPr sz="1100" b="1" i="0">
-                <a:solidFill>
-                  <a:srgbClr val="C45C26"/>
-                </a:solidFill>
-                <a:latin typeface="Calibri"/>
-              </a:rPr>
-              <a:t>THE SOLUTION</a:t>
-            </a:r>
-          </a:p>
-        </p:txBody>
-      </p:sp>
-      <p:sp>
-        <p:nvSpPr>
-          <p:cNvPr id="5" name="TextBox 4"/>
-          <p:cNvSpPr txBox="1"/>
-          <p:nvPr/>
-        </p:nvSpPr>
-        <p:spPr>
-          <a:xfrm>
-            <a:off x="457200" y="384048"/>
-            <a:ext cx="11247120" cy="475488"/>
-          </a:xfrm>
-          <a:prstGeom prst="rect">
-            <a:avLst/>
-          </a:prstGeom>
-          <a:noFill/>
-        </p:spPr>
-        <p:txBody>
-          <a:bodyPr wrap="square" anchor="t">
-            <a:spAutoFit/>
-          </a:bodyPr>
-          <a:lstStyle/>
-          <a:p>
-            <a:pPr algn="l">
-              <a:spcAft>
-                <a:spcPts val="0"/>
-              </a:spcAft>
-            </a:pPr>
-            <a:r>
-              <a:rPr sz="2200" b="1" i="0">
-                <a:solidFill>
-                  <a:srgbClr val="0A1F2E"/>
-                </a:solidFill>
-                <a:latin typeface="Calibri"/>
-              </a:rPr>
-              <a:t>FCHIP — community health intelligence</a:t>
-            </a:r>
-          </a:p>
-        </p:txBody>
-      </p:sp>
-      <p:pic>
-        <p:nvPicPr>
-          <p:cNvPr id="6" name="Picture 5" descr="data_flow_iso_labeled_opt.jpg"/>
-          <p:cNvPicPr>
-            <a:picLocks noChangeAspect="1"/>
-          </p:cNvPicPr>
-          <p:nvPr/>
-        </p:nvPicPr>
-        <p:blipFill>
-          <a:blip r:embed="rId2"/>
-          <a:stretch>
-            <a:fillRect/>
-          </a:stretch>
-        </p:blipFill>
-        <p:spPr>
-          <a:xfrm>
-            <a:off x="365760" y="1639062"/>
-            <a:ext cx="6400800" cy="4265676"/>
-          </a:xfrm>
-          <a:prstGeom prst="rect">
-            <a:avLst/>
-          </a:prstGeom>
-        </p:spPr>
-      </p:pic>
-      <p:sp>
-        <p:nvSpPr>
-          <p:cNvPr id="7" name="TextBox 6"/>
-          <p:cNvSpPr txBox="1"/>
-          <p:nvPr/>
-        </p:nvSpPr>
-        <p:spPr>
-          <a:xfrm>
-            <a:off x="7040880" y="1234440"/>
-            <a:ext cx="4754880" cy="5074920"/>
+            <a:off x="411480" y="91440"/>
+            <a:ext cx="10972800" cy="274320"/>
           </a:xfrm>
           <a:prstGeom prst="rect">
             <a:avLst/>
@@ -4825,81 +4660,524 @@
           </a:bodyPr>
           <a:lstStyle/>
           <a:p>
-            <a:pPr>
-              <a:spcAft>
-                <a:spcPts val="800"/>
-              </a:spcAft>
-            </a:pPr>
-            <a:r>
-              <a:rPr sz="1400">
-                <a:solidFill>
-                  <a:srgbClr val="1E2F38"/>
+            <a:pPr algn="l"/>
+            <a:r>
+              <a:rPr sz="1100" b="1" i="0">
+                <a:solidFill>
+                  <a:srgbClr val="C45C26"/>
                 </a:solidFill>
                 <a:latin typeface="Calibri"/>
               </a:rPr>
-              <a:t>•  CHWs and VHTs capture structured data at household level</a:t>
-            </a:r>
-          </a:p>
-          <a:p>
-            <a:pPr>
-              <a:spcAft>
-                <a:spcPts val="800"/>
-              </a:spcAft>
-            </a:pPr>
-            <a:r>
-              <a:rPr sz="1400">
-                <a:solidFill>
-                  <a:srgbClr val="1E2F38"/>
+              <a:t>PROJECT</a:t>
+            </a:r>
+          </a:p>
+        </p:txBody>
+      </p:sp>
+      <p:sp>
+        <p:nvSpPr>
+          <p:cNvPr id="5" name="TextBox 4"/>
+          <p:cNvSpPr txBox="1"/>
+          <p:nvPr/>
+        </p:nvSpPr>
+        <p:spPr>
+          <a:xfrm>
+            <a:off x="411480" y="384048"/>
+            <a:ext cx="10972800" cy="457200"/>
+          </a:xfrm>
+          <a:prstGeom prst="rect">
+            <a:avLst/>
+          </a:prstGeom>
+          <a:noFill/>
+        </p:spPr>
+        <p:txBody>
+          <a:bodyPr wrap="square">
+            <a:spAutoFit/>
+          </a:bodyPr>
+          <a:lstStyle/>
+          <a:p>
+            <a:pPr algn="l"/>
+            <a:r>
+              <a:rPr sz="2400" b="1" i="0">
+                <a:solidFill>
+                  <a:srgbClr val="0A1F2E"/>
                 </a:solidFill>
                 <a:latin typeface="Calibri"/>
               </a:rPr>
-              <a:t>•  FCHIP applies AI, ML, and GIS to predict risk early</a:t>
-            </a:r>
-          </a:p>
-          <a:p>
-            <a:pPr>
-              <a:spcAft>
-                <a:spcPts val="800"/>
-              </a:spcAft>
-            </a:pPr>
-            <a:r>
-              <a:rPr sz="1400">
-                <a:solidFill>
-                  <a:srgbClr val="1E2F38"/>
+              <a:t>Safe Signals — maternal &amp; adolescent support flags</a:t>
+            </a:r>
+          </a:p>
+        </p:txBody>
+      </p:sp>
+      <p:sp>
+        <p:nvSpPr>
+          <p:cNvPr id="6" name="Rectangle 5"/>
+          <p:cNvSpPr/>
+          <p:nvPr/>
+        </p:nvSpPr>
+        <p:spPr>
+          <a:xfrm>
+            <a:off x="457200" y="1143000"/>
+            <a:ext cx="11155680" cy="914400"/>
+          </a:xfrm>
+          <a:prstGeom prst="rect">
+            <a:avLst/>
+          </a:prstGeom>
+          <a:solidFill>
+            <a:srgbClr val="FFFFFF"/>
+          </a:solidFill>
+          <a:ln>
+            <a:solidFill>
+              <a:srgbClr val="D0DCDC"/>
+            </a:solidFill>
+          </a:ln>
+        </p:spPr>
+        <p:style>
+          <a:lnRef idx="1">
+            <a:schemeClr val="accent1"/>
+          </a:lnRef>
+          <a:fillRef idx="3">
+            <a:schemeClr val="accent1"/>
+          </a:fillRef>
+          <a:effectRef idx="2">
+            <a:schemeClr val="accent1"/>
+          </a:effectRef>
+          <a:fontRef idx="minor">
+            <a:schemeClr val="lt1"/>
+          </a:fontRef>
+        </p:style>
+        <p:txBody>
+          <a:bodyPr rtlCol="0" anchor="ctr"/>
+          <a:lstStyle/>
+          <a:p>
+            <a:pPr algn="ctr"/>
+          </a:p>
+        </p:txBody>
+      </p:sp>
+      <p:sp>
+        <p:nvSpPr>
+          <p:cNvPr id="7" name="TextBox 6"/>
+          <p:cNvSpPr txBox="1"/>
+          <p:nvPr/>
+        </p:nvSpPr>
+        <p:spPr>
+          <a:xfrm>
+            <a:off x="640080" y="1252728"/>
+            <a:ext cx="1828800" cy="685800"/>
+          </a:xfrm>
+          <a:prstGeom prst="rect">
+            <a:avLst/>
+          </a:prstGeom>
+          <a:noFill/>
+        </p:spPr>
+        <p:txBody>
+          <a:bodyPr wrap="square">
+            <a:spAutoFit/>
+          </a:bodyPr>
+          <a:lstStyle/>
+          <a:p>
+            <a:pPr algn="l"/>
+            <a:r>
+              <a:rPr sz="1400" b="1" i="0">
+                <a:solidFill>
+                  <a:srgbClr val="C45C26"/>
                 </a:solidFill>
                 <a:latin typeface="Calibri"/>
               </a:rPr>
-              <a:t>•  Alerts reach clinics, districts, and partners in time to act</a:t>
-            </a:r>
-          </a:p>
-          <a:p>
-            <a:pPr>
-              <a:spcAft>
-                <a:spcPts val="800"/>
-              </a:spcAft>
-            </a:pPr>
-            <a:r>
-              <a:rPr sz="1400">
+              <a:t>Discover</a:t>
+            </a:r>
+          </a:p>
+        </p:txBody>
+      </p:sp>
+      <p:sp>
+        <p:nvSpPr>
+          <p:cNvPr id="8" name="TextBox 7"/>
+          <p:cNvSpPr txBox="1"/>
+          <p:nvPr/>
+        </p:nvSpPr>
+        <p:spPr>
+          <a:xfrm>
+            <a:off x="2560320" y="1252728"/>
+            <a:ext cx="8686800" cy="685800"/>
+          </a:xfrm>
+          <a:prstGeom prst="rect">
+            <a:avLst/>
+          </a:prstGeom>
+          <a:noFill/>
+        </p:spPr>
+        <p:txBody>
+          <a:bodyPr wrap="square">
+            <a:spAutoFit/>
+          </a:bodyPr>
+          <a:lstStyle/>
+          <a:p>
+            <a:pPr algn="l"/>
+            <a:r>
+              <a:rPr sz="1400" b="0" i="0">
                 <a:solidFill>
                   <a:srgbClr val="1E2F38"/>
                 </a:solidFill>
                 <a:latin typeface="Calibri"/>
               </a:rPr>
-              <a:t>•  Built on a live medical centre and community programmes</a:t>
-            </a:r>
-          </a:p>
-        </p:txBody>
-      </p:sp>
-      <p:sp>
-        <p:nvSpPr>
-          <p:cNvPr id="8" name="Rectangle 7"/>
+              <a:t>Co-design with adolescent girls and mothers in FairBanks outreach — what questions are safe and useful?</a:t>
+            </a:r>
+          </a:p>
+        </p:txBody>
+      </p:sp>
+      <p:sp>
+        <p:nvSpPr>
+          <p:cNvPr id="9" name="Rectangle 8"/>
           <p:cNvSpPr/>
           <p:nvPr/>
         </p:nvSpPr>
         <p:spPr>
           <a:xfrm>
-            <a:off x="0" y="6565392"/>
-            <a:ext cx="12191695" cy="292608"/>
+            <a:off x="457200" y="2194560"/>
+            <a:ext cx="11155680" cy="914400"/>
+          </a:xfrm>
+          <a:prstGeom prst="rect">
+            <a:avLst/>
+          </a:prstGeom>
+          <a:solidFill>
+            <a:srgbClr val="FFFFFF"/>
+          </a:solidFill>
+          <a:ln>
+            <a:solidFill>
+              <a:srgbClr val="D0DCDC"/>
+            </a:solidFill>
+          </a:ln>
+        </p:spPr>
+        <p:style>
+          <a:lnRef idx="1">
+            <a:schemeClr val="accent1"/>
+          </a:lnRef>
+          <a:fillRef idx="3">
+            <a:schemeClr val="accent1"/>
+          </a:fillRef>
+          <a:effectRef idx="2">
+            <a:schemeClr val="accent1"/>
+          </a:effectRef>
+          <a:fontRef idx="minor">
+            <a:schemeClr val="lt1"/>
+          </a:fontRef>
+        </p:style>
+        <p:txBody>
+          <a:bodyPr rtlCol="0" anchor="ctr"/>
+          <a:lstStyle/>
+          <a:p>
+            <a:pPr algn="ctr"/>
+          </a:p>
+        </p:txBody>
+      </p:sp>
+      <p:sp>
+        <p:nvSpPr>
+          <p:cNvPr id="10" name="TextBox 9"/>
+          <p:cNvSpPr txBox="1"/>
+          <p:nvPr/>
+        </p:nvSpPr>
+        <p:spPr>
+          <a:xfrm>
+            <a:off x="640080" y="2304288"/>
+            <a:ext cx="1828800" cy="685800"/>
+          </a:xfrm>
+          <a:prstGeom prst="rect">
+            <a:avLst/>
+          </a:prstGeom>
+          <a:noFill/>
+        </p:spPr>
+        <p:txBody>
+          <a:bodyPr wrap="square">
+            <a:spAutoFit/>
+          </a:bodyPr>
+          <a:lstStyle/>
+          <a:p>
+            <a:pPr algn="l"/>
+            <a:r>
+              <a:rPr sz="1400" b="1" i="0">
+                <a:solidFill>
+                  <a:srgbClr val="C45C26"/>
+                </a:solidFill>
+                <a:latin typeface="Calibri"/>
+              </a:rPr>
+              <a:t>Prototype</a:t>
+            </a:r>
+          </a:p>
+        </p:txBody>
+      </p:sp>
+      <p:sp>
+        <p:nvSpPr>
+          <p:cNvPr id="11" name="TextBox 10"/>
+          <p:cNvSpPr txBox="1"/>
+          <p:nvPr/>
+        </p:nvSpPr>
+        <p:spPr>
+          <a:xfrm>
+            <a:off x="2560320" y="2304288"/>
+            <a:ext cx="8686800" cy="685800"/>
+          </a:xfrm>
+          <a:prstGeom prst="rect">
+            <a:avLst/>
+          </a:prstGeom>
+          <a:noFill/>
+        </p:spPr>
+        <p:txBody>
+          <a:bodyPr wrap="square">
+            <a:spAutoFit/>
+          </a:bodyPr>
+          <a:lstStyle/>
+          <a:p>
+            <a:pPr algn="l"/>
+            <a:r>
+              <a:rPr sz="1400" b="0" i="0">
+                <a:solidFill>
+                  <a:srgbClr val="1E2F38"/>
+                </a:solidFill>
+                <a:latin typeface="Calibri"/>
+              </a:rPr>
+              <a:t>Lightweight risk flags for missed ANC and adolescent SRH education gaps using anonymised community signals.</a:t>
+            </a:r>
+          </a:p>
+        </p:txBody>
+      </p:sp>
+      <p:sp>
+        <p:nvSpPr>
+          <p:cNvPr id="12" name="Rectangle 11"/>
+          <p:cNvSpPr/>
+          <p:nvPr/>
+        </p:nvSpPr>
+        <p:spPr>
+          <a:xfrm>
+            <a:off x="457200" y="3246120"/>
+            <a:ext cx="11155680" cy="914400"/>
+          </a:xfrm>
+          <a:prstGeom prst="rect">
+            <a:avLst/>
+          </a:prstGeom>
+          <a:solidFill>
+            <a:srgbClr val="FFFFFF"/>
+          </a:solidFill>
+          <a:ln>
+            <a:solidFill>
+              <a:srgbClr val="D0DCDC"/>
+            </a:solidFill>
+          </a:ln>
+        </p:spPr>
+        <p:style>
+          <a:lnRef idx="1">
+            <a:schemeClr val="accent1"/>
+          </a:lnRef>
+          <a:fillRef idx="3">
+            <a:schemeClr val="accent1"/>
+          </a:fillRef>
+          <a:effectRef idx="2">
+            <a:schemeClr val="accent1"/>
+          </a:effectRef>
+          <a:fontRef idx="minor">
+            <a:schemeClr val="lt1"/>
+          </a:fontRef>
+        </p:style>
+        <p:txBody>
+          <a:bodyPr rtlCol="0" anchor="ctr"/>
+          <a:lstStyle/>
+          <a:p>
+            <a:pPr algn="ctr"/>
+          </a:p>
+        </p:txBody>
+      </p:sp>
+      <p:sp>
+        <p:nvSpPr>
+          <p:cNvPr id="13" name="TextBox 12"/>
+          <p:cNvSpPr txBox="1"/>
+          <p:nvPr/>
+        </p:nvSpPr>
+        <p:spPr>
+          <a:xfrm>
+            <a:off x="640080" y="3355848"/>
+            <a:ext cx="1828800" cy="685800"/>
+          </a:xfrm>
+          <a:prstGeom prst="rect">
+            <a:avLst/>
+          </a:prstGeom>
+          <a:noFill/>
+        </p:spPr>
+        <p:txBody>
+          <a:bodyPr wrap="square">
+            <a:spAutoFit/>
+          </a:bodyPr>
+          <a:lstStyle/>
+          <a:p>
+            <a:pPr algn="l"/>
+            <a:r>
+              <a:rPr sz="1400" b="1" i="0">
+                <a:solidFill>
+                  <a:srgbClr val="C45C26"/>
+                </a:solidFill>
+                <a:latin typeface="Calibri"/>
+              </a:rPr>
+              <a:t>Validate</a:t>
+            </a:r>
+          </a:p>
+        </p:txBody>
+      </p:sp>
+      <p:sp>
+        <p:nvSpPr>
+          <p:cNvPr id="14" name="TextBox 13"/>
+          <p:cNvSpPr txBox="1"/>
+          <p:nvPr/>
+        </p:nvSpPr>
+        <p:spPr>
+          <a:xfrm>
+            <a:off x="2560320" y="3355848"/>
+            <a:ext cx="8686800" cy="685800"/>
+          </a:xfrm>
+          <a:prstGeom prst="rect">
+            <a:avLst/>
+          </a:prstGeom>
+          <a:noFill/>
+        </p:spPr>
+        <p:txBody>
+          <a:bodyPr wrap="square">
+            <a:spAutoFit/>
+          </a:bodyPr>
+          <a:lstStyle/>
+          <a:p>
+            <a:pPr algn="l"/>
+            <a:r>
+              <a:rPr sz="1400" b="0" i="0">
+                <a:solidFill>
+                  <a:srgbClr val="1E2F38"/>
+                </a:solidFill>
+                <a:latin typeface="Calibri"/>
+              </a:rPr>
+              <a:t>Compare alerts against clinical outcomes and CHW feedback; document bias checks and corrections.</a:t>
+            </a:r>
+          </a:p>
+        </p:txBody>
+      </p:sp>
+      <p:sp>
+        <p:nvSpPr>
+          <p:cNvPr id="15" name="Rectangle 14"/>
+          <p:cNvSpPr/>
+          <p:nvPr/>
+        </p:nvSpPr>
+        <p:spPr>
+          <a:xfrm>
+            <a:off x="457200" y="4297680"/>
+            <a:ext cx="11155680" cy="914400"/>
+          </a:xfrm>
+          <a:prstGeom prst="rect">
+            <a:avLst/>
+          </a:prstGeom>
+          <a:solidFill>
+            <a:srgbClr val="FFFFFF"/>
+          </a:solidFill>
+          <a:ln>
+            <a:solidFill>
+              <a:srgbClr val="D0DCDC"/>
+            </a:solidFill>
+          </a:ln>
+        </p:spPr>
+        <p:style>
+          <a:lnRef idx="1">
+            <a:schemeClr val="accent1"/>
+          </a:lnRef>
+          <a:fillRef idx="3">
+            <a:schemeClr val="accent1"/>
+          </a:fillRef>
+          <a:effectRef idx="2">
+            <a:schemeClr val="accent1"/>
+          </a:effectRef>
+          <a:fontRef idx="minor">
+            <a:schemeClr val="lt1"/>
+          </a:fontRef>
+        </p:style>
+        <p:txBody>
+          <a:bodyPr rtlCol="0" anchor="ctr"/>
+          <a:lstStyle/>
+          <a:p>
+            <a:pPr algn="ctr"/>
+          </a:p>
+        </p:txBody>
+      </p:sp>
+      <p:sp>
+        <p:nvSpPr>
+          <p:cNvPr id="16" name="TextBox 15"/>
+          <p:cNvSpPr txBox="1"/>
+          <p:nvPr/>
+        </p:nvSpPr>
+        <p:spPr>
+          <a:xfrm>
+            <a:off x="640080" y="4407408"/>
+            <a:ext cx="1828800" cy="685800"/>
+          </a:xfrm>
+          <a:prstGeom prst="rect">
+            <a:avLst/>
+          </a:prstGeom>
+          <a:noFill/>
+        </p:spPr>
+        <p:txBody>
+          <a:bodyPr wrap="square">
+            <a:spAutoFit/>
+          </a:bodyPr>
+          <a:lstStyle/>
+          <a:p>
+            <a:pPr algn="l"/>
+            <a:r>
+              <a:rPr sz="1400" b="1" i="0">
+                <a:solidFill>
+                  <a:srgbClr val="C45C26"/>
+                </a:solidFill>
+                <a:latin typeface="Calibri"/>
+              </a:rPr>
+              <a:t>Share back</a:t>
+            </a:r>
+          </a:p>
+        </p:txBody>
+      </p:sp>
+      <p:sp>
+        <p:nvSpPr>
+          <p:cNvPr id="17" name="TextBox 16"/>
+          <p:cNvSpPr txBox="1"/>
+          <p:nvPr/>
+        </p:nvSpPr>
+        <p:spPr>
+          <a:xfrm>
+            <a:off x="2560320" y="4407408"/>
+            <a:ext cx="8686800" cy="685800"/>
+          </a:xfrm>
+          <a:prstGeom prst="rect">
+            <a:avLst/>
+          </a:prstGeom>
+          <a:noFill/>
+        </p:spPr>
+        <p:txBody>
+          <a:bodyPr wrap="square">
+            <a:spAutoFit/>
+          </a:bodyPr>
+          <a:lstStyle/>
+          <a:p>
+            <a:pPr algn="l"/>
+            <a:r>
+              <a:rPr sz="1400" b="0" i="0">
+                <a:solidFill>
+                  <a:srgbClr val="1E2F38"/>
+                </a:solidFill>
+                <a:latin typeface="Calibri"/>
+              </a:rPr>
+              <a:t>Open learning brief for UN Women cohort — methods, failures, and ethical guardrails.</a:t>
+            </a:r>
+          </a:p>
+        </p:txBody>
+      </p:sp>
+      <p:sp>
+        <p:nvSpPr>
+          <p:cNvPr id="18" name="Rectangle 17"/>
+          <p:cNvSpPr/>
+          <p:nvPr/>
+        </p:nvSpPr>
+        <p:spPr>
+          <a:xfrm>
+            <a:off x="0" y="6583680"/>
+            <a:ext cx="12191695" cy="274320"/>
           </a:xfrm>
           <a:prstGeom prst="rect">
             <a:avLst/>
@@ -4910,7 +5188,6 @@
           <a:ln>
             <a:noFill/>
           </a:ln>
-          <a:effectLst/>
         </p:spPr>
         <p:style>
           <a:lnRef idx="1">
@@ -4936,14 +5213,14 @@
       </p:sp>
       <p:sp>
         <p:nvSpPr>
-          <p:cNvPr id="9" name="TextBox 8"/>
+          <p:cNvPr id="19" name="TextBox 18"/>
           <p:cNvSpPr txBox="1"/>
           <p:nvPr/>
         </p:nvSpPr>
         <p:spPr>
           <a:xfrm>
-            <a:off x="365760" y="6574536"/>
-            <a:ext cx="9144000" cy="274320"/>
+            <a:off x="365760" y="6592824"/>
+            <a:ext cx="9144000" cy="256032"/>
           </a:xfrm>
           <a:prstGeom prst="rect">
             <a:avLst/>
@@ -4951,16 +5228,12 @@
           <a:noFill/>
         </p:spPr>
         <p:txBody>
-          <a:bodyPr wrap="square" anchor="ctr">
+          <a:bodyPr wrap="square">
             <a:spAutoFit/>
           </a:bodyPr>
           <a:lstStyle/>
           <a:p>
-            <a:pPr algn="l">
-              <a:spcAft>
-                <a:spcPts val="0"/>
-              </a:spcAft>
-            </a:pPr>
+            <a:pPr algn="l"/>
             <a:r>
               <a:rPr sz="900" b="0" i="0">
                 <a:solidFill>
@@ -4968,21 +5241,21 @@
                 </a:solidFill>
                 <a:latin typeface="Calibri"/>
               </a:rPr>
-              <a:t>FairBanks FCHIP  |  Young Feminist AI School 2026 (UN Women)  |  Your health, our mission.</a:t>
-            </a:r>
-          </a:p>
-        </p:txBody>
-      </p:sp>
-      <p:sp>
-        <p:nvSpPr>
-          <p:cNvPr id="10" name="TextBox 9"/>
+              <a:t>FairBanks FCHIP | Young Feminist AI School | Your health, our mission.</a:t>
+            </a:r>
+          </a:p>
+        </p:txBody>
+      </p:sp>
+      <p:sp>
+        <p:nvSpPr>
+          <p:cNvPr id="20" name="TextBox 19"/>
           <p:cNvSpPr txBox="1"/>
           <p:nvPr/>
         </p:nvSpPr>
         <p:spPr>
           <a:xfrm>
-            <a:off x="11094415" y="6574536"/>
-            <a:ext cx="731520" cy="274320"/>
+            <a:off x="11460175" y="6592824"/>
+            <a:ext cx="457200" cy="256032"/>
           </a:xfrm>
           <a:prstGeom prst="rect">
             <a:avLst/>
@@ -4990,16 +5263,12 @@
           <a:noFill/>
         </p:spPr>
         <p:txBody>
-          <a:bodyPr wrap="square" anchor="ctr">
+          <a:bodyPr wrap="square">
             <a:spAutoFit/>
           </a:bodyPr>
           <a:lstStyle/>
           <a:p>
-            <a:pPr algn="r">
-              <a:spcAft>
-                <a:spcPts val="0"/>
-              </a:spcAft>
-            </a:pPr>
+            <a:pPr algn="r"/>
             <a:r>
               <a:rPr sz="900" b="0" i="0">
                 <a:solidFill>
@@ -5039,7 +5308,7 @@
         <p:spPr>
           <a:xfrm>
             <a:off x="0" y="0"/>
-            <a:ext cx="12191695" cy="960120"/>
+            <a:ext cx="12191695" cy="914400"/>
           </a:xfrm>
           <a:prstGeom prst="rect">
             <a:avLst/>
@@ -5050,7 +5319,6 @@
           <a:ln>
             <a:noFill/>
           </a:ln>
-          <a:effectLst/>
         </p:spPr>
         <p:style>
           <a:lnRef idx="1">
@@ -5083,7 +5351,7 @@
         <p:spPr>
           <a:xfrm>
             <a:off x="0" y="0"/>
-            <a:ext cx="164592" cy="960120"/>
+            <a:ext cx="137160" cy="914400"/>
           </a:xfrm>
           <a:prstGeom prst="rect">
             <a:avLst/>
@@ -5094,7 +5362,6 @@
           <a:ln>
             <a:noFill/>
           </a:ln>
-          <a:effectLst/>
         </p:spPr>
         <p:style>
           <a:lnRef idx="1">
@@ -5126,8 +5393,8 @@
         </p:nvSpPr>
         <p:spPr>
           <a:xfrm>
-            <a:off x="457200" y="109728"/>
-            <a:ext cx="10972800" cy="256032"/>
+            <a:off x="411480" y="91440"/>
+            <a:ext cx="10972800" cy="274320"/>
           </a:xfrm>
           <a:prstGeom prst="rect">
             <a:avLst/>
@@ -5135,16 +5402,12 @@
           <a:noFill/>
         </p:spPr>
         <p:txBody>
-          <a:bodyPr wrap="square" anchor="t">
+          <a:bodyPr wrap="square">
             <a:spAutoFit/>
           </a:bodyPr>
           <a:lstStyle/>
           <a:p>
-            <a:pPr algn="l">
-              <a:spcAft>
-                <a:spcPts val="0"/>
-              </a:spcAft>
-            </a:pPr>
+            <a:pPr algn="l"/>
             <a:r>
               <a:rPr sz="1100" b="1" i="0">
                 <a:solidFill>
@@ -5152,7 +5415,7 @@
                 </a:solidFill>
                 <a:latin typeface="Calibri"/>
               </a:rPr>
-              <a:t>PROGRAMME FIT</a:t>
+              <a:t>FIELD LAB</a:t>
             </a:r>
           </a:p>
         </p:txBody>
@@ -5165,8 +5428,8 @@
         </p:nvSpPr>
         <p:spPr>
           <a:xfrm>
-            <a:off x="457200" y="384048"/>
-            <a:ext cx="11247120" cy="475488"/>
+            <a:off x="411480" y="384048"/>
+            <a:ext cx="10972800" cy="457200"/>
           </a:xfrm>
           <a:prstGeom prst="rect">
             <a:avLst/>
@@ -5174,74 +5437,48 @@
           <a:noFill/>
         </p:spPr>
         <p:txBody>
-          <a:bodyPr wrap="square" anchor="t">
+          <a:bodyPr wrap="square">
             <a:spAutoFit/>
           </a:bodyPr>
           <a:lstStyle/>
           <a:p>
-            <a:pPr algn="l">
-              <a:spcAft>
-                <a:spcPts val="0"/>
-              </a:spcAft>
-            </a:pPr>
-            <a:r>
-              <a:rPr sz="2200" b="1" i="0">
+            <a:pPr algn="l"/>
+            <a:r>
+              <a:rPr sz="2400" b="1" i="0">
                 <a:solidFill>
                   <a:srgbClr val="0A1F2E"/>
                 </a:solidFill>
                 <a:latin typeface="Calibri"/>
               </a:rPr>
-              <a:t>Why this call matches FCHIP</a:t>
-            </a:r>
-          </a:p>
-        </p:txBody>
-      </p:sp>
-      <p:sp>
-        <p:nvSpPr>
-          <p:cNvPr id="6" name="Rectangle 5"/>
-          <p:cNvSpPr/>
-          <p:nvPr/>
-        </p:nvSpPr>
-        <p:spPr>
-          <a:xfrm>
-            <a:off x="411480" y="1188720"/>
-            <a:ext cx="11338560" cy="1223010"/>
-          </a:xfrm>
-          <a:prstGeom prst="rect">
-            <a:avLst/>
-          </a:prstGeom>
-          <a:solidFill>
-            <a:srgbClr val="FFFFFF"/>
-          </a:solidFill>
-          <a:ln w="9525">
-            <a:solidFill>
-              <a:srgbClr val="D0DCDC"/>
-            </a:solidFill>
-          </a:ln>
-          <a:effectLst/>
-        </p:spPr>
-        <p:style>
-          <a:lnRef idx="1">
-            <a:schemeClr val="accent1"/>
-          </a:lnRef>
-          <a:fillRef idx="3">
-            <a:schemeClr val="accent1"/>
-          </a:fillRef>
-          <a:effectRef idx="2">
-            <a:schemeClr val="accent1"/>
-          </a:effectRef>
-          <a:fontRef idx="minor">
-            <a:schemeClr val="lt1"/>
-          </a:fontRef>
-        </p:style>
-        <p:txBody>
-          <a:bodyPr rtlCol="0" anchor="ctr"/>
-          <a:lstStyle/>
-          <a:p>
-            <a:pPr algn="ctr"/>
-          </a:p>
-        </p:txBody>
-      </p:sp>
+              <a:t>FCHIP — community data with feminist guardrails</a:t>
+            </a:r>
+          </a:p>
+        </p:txBody>
+      </p:sp>
+      <p:pic>
+        <p:nvPicPr>
+          <p:cNvPr id="6" name="Picture 5" descr="data_flow_iso_labeled_opt.jpg"/>
+          <p:cNvPicPr>
+            <a:picLocks noChangeAspect="1"/>
+          </p:cNvPicPr>
+          <p:nvPr/>
+        </p:nvPicPr>
+        <p:blipFill>
+          <a:blip r:embed="rId2"/>
+          <a:stretch>
+            <a:fillRect/>
+          </a:stretch>
+        </p:blipFill>
+        <p:spPr>
+          <a:xfrm>
+            <a:off x="365760" y="1479042"/>
+            <a:ext cx="6400800" cy="4265676"/>
+          </a:xfrm>
+          <a:prstGeom prst="rect">
+            <a:avLst/>
+          </a:prstGeom>
+        </p:spPr>
+      </p:pic>
       <p:sp>
         <p:nvSpPr>
           <p:cNvPr id="7" name="TextBox 6"/>
@@ -5250,8 +5487,8 @@
         </p:nvSpPr>
         <p:spPr>
           <a:xfrm>
-            <a:off x="594360" y="1252728"/>
-            <a:ext cx="2926080" cy="1085850"/>
+            <a:off x="6949440" y="1097280"/>
+            <a:ext cx="4846320" cy="5029200"/>
           </a:xfrm>
           <a:prstGeom prst="rect">
             <a:avLst/>
@@ -5259,449 +5496,37 @@
           <a:noFill/>
         </p:spPr>
         <p:txBody>
-          <a:bodyPr wrap="square" anchor="ctr">
+          <a:bodyPr wrap="square">
             <a:spAutoFit/>
           </a:bodyPr>
           <a:lstStyle/>
           <a:p>
-            <a:pPr algn="l">
-              <a:spcAft>
-                <a:spcPts val="0"/>
-              </a:spcAft>
-            </a:pPr>
-            <a:r>
-              <a:rPr sz="1300" b="1" i="0">
-                <a:solidFill>
-                  <a:srgbClr val="0D6E6E"/>
+            <a:pPr algn="l"/>
+            <a:r>
+              <a:rPr sz="1700" b="0" i="0">
+                <a:solidFill>
+                  <a:srgbClr val="3A4A54"/>
                 </a:solidFill>
                 <a:latin typeface="Calibri"/>
               </a:rPr>
-              <a:t>Ages 18–30 worldwide</a:t>
-            </a:r>
-          </a:p>
-        </p:txBody>
-      </p:sp>
-      <p:sp>
-        <p:nvSpPr>
-          <p:cNvPr id="8" name="TextBox 7"/>
-          <p:cNvSpPr txBox="1"/>
-          <p:nvPr/>
-        </p:nvSpPr>
-        <p:spPr>
-          <a:xfrm>
-            <a:off x="3657600" y="1252728"/>
-            <a:ext cx="7772400" cy="1085850"/>
-          </a:xfrm>
-          <a:prstGeom prst="rect">
-            <a:avLst/>
-          </a:prstGeom>
-          <a:noFill/>
-        </p:spPr>
-        <p:txBody>
-          <a:bodyPr wrap="square" anchor="ctr">
-            <a:spAutoFit/>
-          </a:bodyPr>
-          <a:lstStyle/>
-          <a:p>
-            <a:pPr algn="l">
-              <a:spcAft>
-                <a:spcPts val="0"/>
-              </a:spcAft>
-            </a:pPr>
-            <a:r>
-              <a:rPr sz="1200" b="0" i="0">
-                <a:solidFill>
-                  <a:srgbClr val="3A4A54"/>
-                </a:solidFill>
-                <a:latin typeface="Calibri"/>
-              </a:rPr>
-              <a:t>Ugandan team members in range; women prioritised</a:t>
-            </a:r>
-          </a:p>
-        </p:txBody>
-      </p:sp>
-      <p:sp>
-        <p:nvSpPr>
-          <p:cNvPr id="9" name="Rectangle 8"/>
+              <a:t>CHW-led follow-up
+Consent &amp; anonymisation
+Auditable dashboards
+No stigma by design</a:t>
+            </a:r>
+          </a:p>
+        </p:txBody>
+      </p:sp>
+      <p:sp>
+        <p:nvSpPr>
+          <p:cNvPr id="8" name="Rectangle 7"/>
           <p:cNvSpPr/>
           <p:nvPr/>
         </p:nvSpPr>
         <p:spPr>
           <a:xfrm>
-            <a:off x="411480" y="2503170"/>
-            <a:ext cx="11338560" cy="1223010"/>
-          </a:xfrm>
-          <a:prstGeom prst="rect">
-            <a:avLst/>
-          </a:prstGeom>
-          <a:solidFill>
-            <a:srgbClr val="FFFFFF"/>
-          </a:solidFill>
-          <a:ln w="9525">
-            <a:solidFill>
-              <a:srgbClr val="D0DCDC"/>
-            </a:solidFill>
-          </a:ln>
-          <a:effectLst/>
-        </p:spPr>
-        <p:style>
-          <a:lnRef idx="1">
-            <a:schemeClr val="accent1"/>
-          </a:lnRef>
-          <a:fillRef idx="3">
-            <a:schemeClr val="accent1"/>
-          </a:fillRef>
-          <a:effectRef idx="2">
-            <a:schemeClr val="accent1"/>
-          </a:effectRef>
-          <a:fontRef idx="minor">
-            <a:schemeClr val="lt1"/>
-          </a:fontRef>
-        </p:style>
-        <p:txBody>
-          <a:bodyPr rtlCol="0" anchor="ctr"/>
-          <a:lstStyle/>
-          <a:p>
-            <a:pPr algn="ctr"/>
-          </a:p>
-        </p:txBody>
-      </p:sp>
-      <p:sp>
-        <p:nvSpPr>
-          <p:cNvPr id="10" name="TextBox 9"/>
-          <p:cNvSpPr txBox="1"/>
-          <p:nvPr/>
-        </p:nvSpPr>
-        <p:spPr>
-          <a:xfrm>
-            <a:off x="594360" y="2567178"/>
-            <a:ext cx="2926080" cy="1085850"/>
-          </a:xfrm>
-          <a:prstGeom prst="rect">
-            <a:avLst/>
-          </a:prstGeom>
-          <a:noFill/>
-        </p:spPr>
-        <p:txBody>
-          <a:bodyPr wrap="square" anchor="ctr">
-            <a:spAutoFit/>
-          </a:bodyPr>
-          <a:lstStyle/>
-          <a:p>
-            <a:pPr algn="l">
-              <a:spcAft>
-                <a:spcPts val="0"/>
-              </a:spcAft>
-            </a:pPr>
-            <a:r>
-              <a:rPr sz="1300" b="1" i="0">
-                <a:solidFill>
-                  <a:srgbClr val="0D6E6E"/>
-                </a:solidFill>
-                <a:latin typeface="Calibri"/>
-              </a:rPr>
-              <a:t>No-code practical AI</a:t>
-            </a:r>
-          </a:p>
-        </p:txBody>
-      </p:sp>
-      <p:sp>
-        <p:nvSpPr>
-          <p:cNvPr id="11" name="TextBox 10"/>
-          <p:cNvSpPr txBox="1"/>
-          <p:nvPr/>
-        </p:nvSpPr>
-        <p:spPr>
-          <a:xfrm>
-            <a:off x="3657600" y="2567178"/>
-            <a:ext cx="7772400" cy="1085850"/>
-          </a:xfrm>
-          <a:prstGeom prst="rect">
-            <a:avLst/>
-          </a:prstGeom>
-          <a:noFill/>
-        </p:spPr>
-        <p:txBody>
-          <a:bodyPr wrap="square" anchor="ctr">
-            <a:spAutoFit/>
-          </a:bodyPr>
-          <a:lstStyle/>
-          <a:p>
-            <a:pPr algn="l">
-              <a:spcAft>
-                <a:spcPts val="0"/>
-              </a:spcAft>
-            </a:pPr>
-            <a:r>
-              <a:rPr sz="1200" b="0" i="0">
-                <a:solidFill>
-                  <a:srgbClr val="3A4A54"/>
-                </a:solidFill>
-                <a:latin typeface="Calibri"/>
-              </a:rPr>
-              <a:t>We will ship a usable project for community health</a:t>
-            </a:r>
-          </a:p>
-        </p:txBody>
-      </p:sp>
-      <p:sp>
-        <p:nvSpPr>
-          <p:cNvPr id="12" name="Rectangle 11"/>
-          <p:cNvSpPr/>
-          <p:nvPr/>
-        </p:nvSpPr>
-        <p:spPr>
-          <a:xfrm>
-            <a:off x="411480" y="3817620"/>
-            <a:ext cx="11338560" cy="1223010"/>
-          </a:xfrm>
-          <a:prstGeom prst="rect">
-            <a:avLst/>
-          </a:prstGeom>
-          <a:solidFill>
-            <a:srgbClr val="FFFFFF"/>
-          </a:solidFill>
-          <a:ln w="9525">
-            <a:solidFill>
-              <a:srgbClr val="D0DCDC"/>
-            </a:solidFill>
-          </a:ln>
-          <a:effectLst/>
-        </p:spPr>
-        <p:style>
-          <a:lnRef idx="1">
-            <a:schemeClr val="accent1"/>
-          </a:lnRef>
-          <a:fillRef idx="3">
-            <a:schemeClr val="accent1"/>
-          </a:fillRef>
-          <a:effectRef idx="2">
-            <a:schemeClr val="accent1"/>
-          </a:effectRef>
-          <a:fontRef idx="minor">
-            <a:schemeClr val="lt1"/>
-          </a:fontRef>
-        </p:style>
-        <p:txBody>
-          <a:bodyPr rtlCol="0" anchor="ctr"/>
-          <a:lstStyle/>
-          <a:p>
-            <a:pPr algn="ctr"/>
-          </a:p>
-        </p:txBody>
-      </p:sp>
-      <p:sp>
-        <p:nvSpPr>
-          <p:cNvPr id="13" name="TextBox 12"/>
-          <p:cNvSpPr txBox="1"/>
-          <p:nvPr/>
-        </p:nvSpPr>
-        <p:spPr>
-          <a:xfrm>
-            <a:off x="594360" y="3881628"/>
-            <a:ext cx="2926080" cy="1085850"/>
-          </a:xfrm>
-          <a:prstGeom prst="rect">
-            <a:avLst/>
-          </a:prstGeom>
-          <a:noFill/>
-        </p:spPr>
-        <p:txBody>
-          <a:bodyPr wrap="square" anchor="ctr">
-            <a:spAutoFit/>
-          </a:bodyPr>
-          <a:lstStyle/>
-          <a:p>
-            <a:pPr algn="l">
-              <a:spcAft>
-                <a:spcPts val="0"/>
-              </a:spcAft>
-            </a:pPr>
-            <a:r>
-              <a:rPr sz="1300" b="1" i="0">
-                <a:solidFill>
-                  <a:srgbClr val="0D6E6E"/>
-                </a:solidFill>
-                <a:latin typeface="Calibri"/>
-              </a:rPr>
-              <a:t>Advocacy / civic / responsible AI</a:t>
-            </a:r>
-          </a:p>
-        </p:txBody>
-      </p:sp>
-      <p:sp>
-        <p:nvSpPr>
-          <p:cNvPr id="14" name="TextBox 13"/>
-          <p:cNvSpPr txBox="1"/>
-          <p:nvPr/>
-        </p:nvSpPr>
-        <p:spPr>
-          <a:xfrm>
-            <a:off x="3657600" y="3881628"/>
-            <a:ext cx="7772400" cy="1085850"/>
-          </a:xfrm>
-          <a:prstGeom prst="rect">
-            <a:avLst/>
-          </a:prstGeom>
-          <a:noFill/>
-        </p:spPr>
-        <p:txBody>
-          <a:bodyPr wrap="square" anchor="ctr">
-            <a:spAutoFit/>
-          </a:bodyPr>
-          <a:lstStyle/>
-          <a:p>
-            <a:pPr algn="l">
-              <a:spcAft>
-                <a:spcPts val="0"/>
-              </a:spcAft>
-            </a:pPr>
-            <a:r>
-              <a:rPr sz="1200" b="0" i="0">
-                <a:solidFill>
-                  <a:srgbClr val="3A4A54"/>
-                </a:solidFill>
-                <a:latin typeface="Calibri"/>
-              </a:rPr>
-              <a:t>Health equity and gender-responsive product design</a:t>
-            </a:r>
-          </a:p>
-        </p:txBody>
-      </p:sp>
-      <p:sp>
-        <p:nvSpPr>
-          <p:cNvPr id="15" name="Rectangle 14"/>
-          <p:cNvSpPr/>
-          <p:nvPr/>
-        </p:nvSpPr>
-        <p:spPr>
-          <a:xfrm>
-            <a:off x="411480" y="5132070"/>
-            <a:ext cx="11338560" cy="1223010"/>
-          </a:xfrm>
-          <a:prstGeom prst="rect">
-            <a:avLst/>
-          </a:prstGeom>
-          <a:solidFill>
-            <a:srgbClr val="FFFFFF"/>
-          </a:solidFill>
-          <a:ln w="9525">
-            <a:solidFill>
-              <a:srgbClr val="D0DCDC"/>
-            </a:solidFill>
-          </a:ln>
-          <a:effectLst/>
-        </p:spPr>
-        <p:style>
-          <a:lnRef idx="1">
-            <a:schemeClr val="accent1"/>
-          </a:lnRef>
-          <a:fillRef idx="3">
-            <a:schemeClr val="accent1"/>
-          </a:fillRef>
-          <a:effectRef idx="2">
-            <a:schemeClr val="accent1"/>
-          </a:effectRef>
-          <a:fontRef idx="minor">
-            <a:schemeClr val="lt1"/>
-          </a:fontRef>
-        </p:style>
-        <p:txBody>
-          <a:bodyPr rtlCol="0" anchor="ctr"/>
-          <a:lstStyle/>
-          <a:p>
-            <a:pPr algn="ctr"/>
-          </a:p>
-        </p:txBody>
-      </p:sp>
-      <p:sp>
-        <p:nvSpPr>
-          <p:cNvPr id="16" name="TextBox 15"/>
-          <p:cNvSpPr txBox="1"/>
-          <p:nvPr/>
-        </p:nvSpPr>
-        <p:spPr>
-          <a:xfrm>
-            <a:off x="594360" y="5196078"/>
-            <a:ext cx="2926080" cy="1085850"/>
-          </a:xfrm>
-          <a:prstGeom prst="rect">
-            <a:avLst/>
-          </a:prstGeom>
-          <a:noFill/>
-        </p:spPr>
-        <p:txBody>
-          <a:bodyPr wrap="square" anchor="ctr">
-            <a:spAutoFit/>
-          </a:bodyPr>
-          <a:lstStyle/>
-          <a:p>
-            <a:pPr algn="l">
-              <a:spcAft>
-                <a:spcPts val="0"/>
-              </a:spcAft>
-            </a:pPr>
-            <a:r>
-              <a:rPr sz="1300" b="1" i="0">
-                <a:solidFill>
-                  <a:srgbClr val="0D6E6E"/>
-                </a:solidFill>
-                <a:latin typeface="Calibri"/>
-              </a:rPr>
-              <a:t>~4 hours weekly</a:t>
-            </a:r>
-          </a:p>
-        </p:txBody>
-      </p:sp>
-      <p:sp>
-        <p:nvSpPr>
-          <p:cNvPr id="17" name="TextBox 16"/>
-          <p:cNvSpPr txBox="1"/>
-          <p:nvPr/>
-        </p:nvSpPr>
-        <p:spPr>
-          <a:xfrm>
-            <a:off x="3657600" y="5196078"/>
-            <a:ext cx="7772400" cy="1085850"/>
-          </a:xfrm>
-          <a:prstGeom prst="rect">
-            <a:avLst/>
-          </a:prstGeom>
-          <a:noFill/>
-        </p:spPr>
-        <p:txBody>
-          <a:bodyPr wrap="square" anchor="ctr">
-            <a:spAutoFit/>
-          </a:bodyPr>
-          <a:lstStyle/>
-          <a:p>
-            <a:pPr algn="l">
-              <a:spcAft>
-                <a:spcPts val="0"/>
-              </a:spcAft>
-            </a:pPr>
-            <a:r>
-              <a:rPr sz="1200" b="0" i="0">
-                <a:solidFill>
-                  <a:srgbClr val="3A4A54"/>
-                </a:solidFill>
-                <a:latin typeface="Calibri"/>
-              </a:rPr>
-              <a:t>Team can commit alongside FairBanks outreach duties</a:t>
-            </a:r>
-          </a:p>
-        </p:txBody>
-      </p:sp>
-      <p:sp>
-        <p:nvSpPr>
-          <p:cNvPr id="18" name="Rectangle 17"/>
-          <p:cNvSpPr/>
-          <p:nvPr/>
-        </p:nvSpPr>
-        <p:spPr>
-          <a:xfrm>
-            <a:off x="0" y="6565392"/>
-            <a:ext cx="12191695" cy="292608"/>
+            <a:off x="0" y="6583680"/>
+            <a:ext cx="12191695" cy="274320"/>
           </a:xfrm>
           <a:prstGeom prst="rect">
             <a:avLst/>
@@ -5712,7 +5537,6 @@
           <a:ln>
             <a:noFill/>
           </a:ln>
-          <a:effectLst/>
         </p:spPr>
         <p:style>
           <a:lnRef idx="1">
@@ -5738,14 +5562,14 @@
       </p:sp>
       <p:sp>
         <p:nvSpPr>
-          <p:cNvPr id="19" name="TextBox 18"/>
+          <p:cNvPr id="9" name="TextBox 8"/>
           <p:cNvSpPr txBox="1"/>
           <p:nvPr/>
         </p:nvSpPr>
         <p:spPr>
           <a:xfrm>
-            <a:off x="365760" y="6574536"/>
-            <a:ext cx="9144000" cy="274320"/>
+            <a:off x="365760" y="6592824"/>
+            <a:ext cx="9144000" cy="256032"/>
           </a:xfrm>
           <a:prstGeom prst="rect">
             <a:avLst/>
@@ -5753,16 +5577,12 @@
           <a:noFill/>
         </p:spPr>
         <p:txBody>
-          <a:bodyPr wrap="square" anchor="ctr">
+          <a:bodyPr wrap="square">
             <a:spAutoFit/>
           </a:bodyPr>
           <a:lstStyle/>
           <a:p>
-            <a:pPr algn="l">
-              <a:spcAft>
-                <a:spcPts val="0"/>
-              </a:spcAft>
-            </a:pPr>
+            <a:pPr algn="l"/>
             <a:r>
               <a:rPr sz="900" b="0" i="0">
                 <a:solidFill>
@@ -5770,21 +5590,21 @@
                 </a:solidFill>
                 <a:latin typeface="Calibri"/>
               </a:rPr>
-              <a:t>FairBanks FCHIP  |  Young Feminist AI School 2026 (UN Women)  |  Your health, our mission.</a:t>
-            </a:r>
-          </a:p>
-        </p:txBody>
-      </p:sp>
-      <p:sp>
-        <p:nvSpPr>
-          <p:cNvPr id="20" name="TextBox 19"/>
+              <a:t>FairBanks FCHIP | Young Feminist AI School | Your health, our mission.</a:t>
+            </a:r>
+          </a:p>
+        </p:txBody>
+      </p:sp>
+      <p:sp>
+        <p:nvSpPr>
+          <p:cNvPr id="10" name="TextBox 9"/>
           <p:cNvSpPr txBox="1"/>
           <p:nvPr/>
         </p:nvSpPr>
         <p:spPr>
           <a:xfrm>
-            <a:off x="11094415" y="6574536"/>
-            <a:ext cx="731520" cy="274320"/>
+            <a:off x="11460175" y="6592824"/>
+            <a:ext cx="457200" cy="256032"/>
           </a:xfrm>
           <a:prstGeom prst="rect">
             <a:avLst/>
@@ -5792,16 +5612,12 @@
           <a:noFill/>
         </p:spPr>
         <p:txBody>
-          <a:bodyPr wrap="square" anchor="ctr">
+          <a:bodyPr wrap="square">
             <a:spAutoFit/>
           </a:bodyPr>
           <a:lstStyle/>
           <a:p>
-            <a:pPr algn="r">
-              <a:spcAft>
-                <a:spcPts val="0"/>
-              </a:spcAft>
-            </a:pPr>
+            <a:pPr algn="r"/>
             <a:r>
               <a:rPr sz="900" b="0" i="0">
                 <a:solidFill>
@@ -5841,7 +5657,7 @@
         <p:spPr>
           <a:xfrm>
             <a:off x="0" y="0"/>
-            <a:ext cx="12191695" cy="960120"/>
+            <a:ext cx="12191695" cy="914400"/>
           </a:xfrm>
           <a:prstGeom prst="rect">
             <a:avLst/>
@@ -5852,7 +5668,6 @@
           <a:ln>
             <a:noFill/>
           </a:ln>
-          <a:effectLst/>
         </p:spPr>
         <p:style>
           <a:lnRef idx="1">
@@ -5885,7 +5700,7 @@
         <p:spPr>
           <a:xfrm>
             <a:off x="0" y="0"/>
-            <a:ext cx="164592" cy="960120"/>
+            <a:ext cx="137160" cy="914400"/>
           </a:xfrm>
           <a:prstGeom prst="rect">
             <a:avLst/>
@@ -5896,7 +5711,6 @@
           <a:ln>
             <a:noFill/>
           </a:ln>
-          <a:effectLst/>
         </p:spPr>
         <p:style>
           <a:lnRef idx="1">
@@ -5928,110 +5742,8 @@
         </p:nvSpPr>
         <p:spPr>
           <a:xfrm>
-            <a:off x="457200" y="109728"/>
-            <a:ext cx="10972800" cy="256032"/>
-          </a:xfrm>
-          <a:prstGeom prst="rect">
-            <a:avLst/>
-          </a:prstGeom>
-          <a:noFill/>
-        </p:spPr>
-        <p:txBody>
-          <a:bodyPr wrap="square" anchor="t">
-            <a:spAutoFit/>
-          </a:bodyPr>
-          <a:lstStyle/>
-          <a:p>
-            <a:pPr algn="l">
-              <a:spcAft>
-                <a:spcPts val="0"/>
-              </a:spcAft>
-            </a:pPr>
-            <a:r>
-              <a:rPr sz="1100" b="1" i="0">
-                <a:solidFill>
-                  <a:srgbClr val="C45C26"/>
-                </a:solidFill>
-                <a:latin typeface="Calibri"/>
-              </a:rPr>
-              <a:t>WHY FAIRBANKS</a:t>
-            </a:r>
-          </a:p>
-        </p:txBody>
-      </p:sp>
-      <p:sp>
-        <p:nvSpPr>
-          <p:cNvPr id="5" name="TextBox 4"/>
-          <p:cNvSpPr txBox="1"/>
-          <p:nvPr/>
-        </p:nvSpPr>
-        <p:spPr>
-          <a:xfrm>
-            <a:off x="457200" y="384048"/>
-            <a:ext cx="11247120" cy="475488"/>
-          </a:xfrm>
-          <a:prstGeom prst="rect">
-            <a:avLst/>
-          </a:prstGeom>
-          <a:noFill/>
-        </p:spPr>
-        <p:txBody>
-          <a:bodyPr wrap="square" anchor="t">
-            <a:spAutoFit/>
-          </a:bodyPr>
-          <a:lstStyle/>
-          <a:p>
-            <a:pPr algn="l">
-              <a:spcAft>
-                <a:spcPts val="0"/>
-              </a:spcAft>
-            </a:pPr>
-            <a:r>
-              <a:rPr sz="2200" b="1" i="0">
-                <a:solidFill>
-                  <a:srgbClr val="0A1F2E"/>
-                </a:solidFill>
-                <a:latin typeface="Calibri"/>
-              </a:rPr>
-              <a:t>A live community health ecosystem</a:t>
-            </a:r>
-          </a:p>
-        </p:txBody>
-      </p:sp>
-      <p:pic>
-        <p:nvPicPr>
-          <p:cNvPr id="6" name="Picture 5" descr="outreach_facilitator_canopy_01_opt.jpg"/>
-          <p:cNvPicPr>
-            <a:picLocks noChangeAspect="1"/>
-          </p:cNvPicPr>
-          <p:nvPr/>
-        </p:nvPicPr>
-        <p:blipFill>
-          <a:blip r:embed="rId2"/>
-          <a:stretch>
-            <a:fillRect/>
-          </a:stretch>
-        </p:blipFill>
-        <p:spPr>
-          <a:xfrm>
-            <a:off x="411480" y="1943753"/>
-            <a:ext cx="5486400" cy="3656293"/>
-          </a:xfrm>
-          <a:prstGeom prst="rect">
-            <a:avLst/>
-          </a:prstGeom>
-        </p:spPr>
-      </p:pic>
-      <p:sp>
-        <p:nvSpPr>
-          <p:cNvPr id="7" name="TextBox 6"/>
-          <p:cNvSpPr txBox="1"/>
-          <p:nvPr/>
-        </p:nvSpPr>
-        <p:spPr>
-          <a:xfrm>
-            <a:off x="6217920" y="1234440"/>
-            <a:ext cx="5486400" cy="5074920"/>
+            <a:off x="411480" y="91440"/>
+            <a:ext cx="10972800" cy="274320"/>
           </a:xfrm>
           <a:prstGeom prst="rect">
             <a:avLst/>
@@ -6044,113 +5756,298 @@
           </a:bodyPr>
           <a:lstStyle/>
           <a:p>
-            <a:pPr>
-              <a:spcAft>
-                <a:spcPts val="800"/>
-              </a:spcAft>
-            </a:pPr>
-            <a:r>
-              <a:rPr sz="1400">
-                <a:solidFill>
-                  <a:srgbClr val="1E2F38"/>
+            <a:pPr algn="l"/>
+            <a:r>
+              <a:rPr sz="1100" b="1" i="0">
+                <a:solidFill>
+                  <a:srgbClr val="C45C26"/>
                 </a:solidFill>
                 <a:latin typeface="Calibri"/>
               </a:rPr>
-              <a:t>•  Functioning FairBanks Medical Centre with clinic, pharmacy, and diagnostics</a:t>
-            </a:r>
-          </a:p>
-          <a:p>
-            <a:pPr>
-              <a:spcAft>
-                <a:spcPts val="800"/>
-              </a:spcAft>
-            </a:pPr>
-            <a:r>
-              <a:rPr sz="1400">
-                <a:solidFill>
-                  <a:srgbClr val="1E2F38"/>
+              <a:t>EXCHANGE</a:t>
+            </a:r>
+          </a:p>
+        </p:txBody>
+      </p:sp>
+      <p:sp>
+        <p:nvSpPr>
+          <p:cNvPr id="5" name="TextBox 4"/>
+          <p:cNvSpPr txBox="1"/>
+          <p:nvPr/>
+        </p:nvSpPr>
+        <p:spPr>
+          <a:xfrm>
+            <a:off x="411480" y="384048"/>
+            <a:ext cx="10972800" cy="457200"/>
+          </a:xfrm>
+          <a:prstGeom prst="rect">
+            <a:avLst/>
+          </a:prstGeom>
+          <a:noFill/>
+        </p:spPr>
+        <p:txBody>
+          <a:bodyPr wrap="square">
+            <a:spAutoFit/>
+          </a:bodyPr>
+          <a:lstStyle/>
+          <a:p>
+            <a:pPr algn="l"/>
+            <a:r>
+              <a:rPr sz="2400" b="1" i="0">
+                <a:solidFill>
+                  <a:srgbClr val="0A1F2E"/>
                 </a:solidFill>
                 <a:latin typeface="Calibri"/>
               </a:rPr>
-              <a:t>•  Active Community Reach outreach in Bukoto, Kyebando, Kisaasi, Kamwokya, Kikaaya</a:t>
-            </a:r>
-          </a:p>
-          <a:p>
-            <a:pPr>
-              <a:spcAft>
-                <a:spcPts val="800"/>
-              </a:spcAft>
-            </a:pPr>
-            <a:r>
-              <a:rPr sz="1400">
-                <a:solidFill>
-                  <a:srgbClr val="1E2F38"/>
+              <a:t>School ↔ FairBanks — mutual learning</a:t>
+            </a:r>
+          </a:p>
+        </p:txBody>
+      </p:sp>
+      <p:sp>
+        <p:nvSpPr>
+          <p:cNvPr id="6" name="Rectangle 5"/>
+          <p:cNvSpPr/>
+          <p:nvPr/>
+        </p:nvSpPr>
+        <p:spPr>
+          <a:xfrm>
+            <a:off x="457200" y="1188720"/>
+            <a:ext cx="5394960" cy="4572000"/>
+          </a:xfrm>
+          <a:prstGeom prst="rect">
+            <a:avLst/>
+          </a:prstGeom>
+          <a:solidFill>
+            <a:srgbClr val="F7F5F0"/>
+          </a:solidFill>
+          <a:ln>
+            <a:solidFill>
+              <a:srgbClr val="D0DCDC"/>
+            </a:solidFill>
+          </a:ln>
+        </p:spPr>
+        <p:style>
+          <a:lnRef idx="1">
+            <a:schemeClr val="accent1"/>
+          </a:lnRef>
+          <a:fillRef idx="3">
+            <a:schemeClr val="accent1"/>
+          </a:fillRef>
+          <a:effectRef idx="2">
+            <a:schemeClr val="accent1"/>
+          </a:effectRef>
+          <a:fontRef idx="minor">
+            <a:schemeClr val="lt1"/>
+          </a:fontRef>
+        </p:style>
+        <p:txBody>
+          <a:bodyPr rtlCol="0" anchor="ctr"/>
+          <a:lstStyle/>
+          <a:p>
+            <a:pPr algn="ctr"/>
+          </a:p>
+        </p:txBody>
+      </p:sp>
+      <p:sp>
+        <p:nvSpPr>
+          <p:cNvPr id="7" name="TextBox 6"/>
+          <p:cNvSpPr txBox="1"/>
+          <p:nvPr/>
+        </p:nvSpPr>
+        <p:spPr>
+          <a:xfrm>
+            <a:off x="640080" y="1371600"/>
+            <a:ext cx="5029200" cy="365760"/>
+          </a:xfrm>
+          <a:prstGeom prst="rect">
+            <a:avLst/>
+          </a:prstGeom>
+          <a:noFill/>
+        </p:spPr>
+        <p:txBody>
+          <a:bodyPr wrap="square">
+            <a:spAutoFit/>
+          </a:bodyPr>
+          <a:lstStyle/>
+          <a:p>
+            <a:pPr algn="l"/>
+            <a:r>
+              <a:rPr sz="1600" b="1" i="0">
+                <a:solidFill>
+                  <a:srgbClr val="0D6E6E"/>
                 </a:solidFill>
                 <a:latin typeface="Calibri"/>
               </a:rPr>
-              <a:t>•  Trusted CHW and VHT relationships for household visits and referrals</a:t>
-            </a:r>
-          </a:p>
-          <a:p>
-            <a:pPr>
-              <a:spcAft>
-                <a:spcPts val="800"/>
-              </a:spcAft>
-            </a:pPr>
-            <a:r>
-              <a:rPr sz="1400">
+              <a:t>Cohort &amp; faculty receive</a:t>
+            </a:r>
+          </a:p>
+        </p:txBody>
+      </p:sp>
+      <p:sp>
+        <p:nvSpPr>
+          <p:cNvPr id="8" name="TextBox 7"/>
+          <p:cNvSpPr txBox="1"/>
+          <p:nvPr/>
+        </p:nvSpPr>
+        <p:spPr>
+          <a:xfrm>
+            <a:off x="640080" y="1828800"/>
+            <a:ext cx="5029200" cy="3474720"/>
+          </a:xfrm>
+          <a:prstGeom prst="rect">
+            <a:avLst/>
+          </a:prstGeom>
+          <a:noFill/>
+        </p:spPr>
+        <p:txBody>
+          <a:bodyPr wrap="square">
+            <a:spAutoFit/>
+          </a:bodyPr>
+          <a:lstStyle/>
+          <a:p>
+            <a:pPr algn="l"/>
+            <a:r>
+              <a:rPr sz="1400" b="0" i="0">
                 <a:solidFill>
                   <a:srgbClr val="1E2F38"/>
                 </a:solidFill>
                 <a:latin typeface="Calibri"/>
               </a:rPr>
-              <a:t>•  Live programmes: maternal &amp; child health, Gericare, chronic-disease screening</a:t>
-            </a:r>
-          </a:p>
-          <a:p>
-            <a:pPr>
-              <a:spcAft>
-                <a:spcPts val="800"/>
-              </a:spcAft>
-            </a:pPr>
-            <a:r>
-              <a:rPr sz="1400">
-                <a:solidFill>
-                  <a:srgbClr val="1E2F38"/>
+              <a:t>• A real HealthTech field site with maternal and adolescent programmes
+• Documented gender-responsive AI design process from Uganda
+• Case material linking feminist AI principles to community health</a:t>
+            </a:r>
+          </a:p>
+        </p:txBody>
+      </p:sp>
+      <p:sp>
+        <p:nvSpPr>
+          <p:cNvPr id="9" name="Rectangle 8"/>
+          <p:cNvSpPr/>
+          <p:nvPr/>
+        </p:nvSpPr>
+        <p:spPr>
+          <a:xfrm>
+            <a:off x="6217920" y="1188720"/>
+            <a:ext cx="5394960" cy="4572000"/>
+          </a:xfrm>
+          <a:prstGeom prst="rect">
+            <a:avLst/>
+          </a:prstGeom>
+          <a:solidFill>
+            <a:srgbClr val="F7F5F0"/>
+          </a:solidFill>
+          <a:ln>
+            <a:solidFill>
+              <a:srgbClr val="D0DCDC"/>
+            </a:solidFill>
+          </a:ln>
+        </p:spPr>
+        <p:style>
+          <a:lnRef idx="1">
+            <a:schemeClr val="accent1"/>
+          </a:lnRef>
+          <a:fillRef idx="3">
+            <a:schemeClr val="accent1"/>
+          </a:fillRef>
+          <a:effectRef idx="2">
+            <a:schemeClr val="accent1"/>
+          </a:effectRef>
+          <a:fontRef idx="minor">
+            <a:schemeClr val="lt1"/>
+          </a:fontRef>
+        </p:style>
+        <p:txBody>
+          <a:bodyPr rtlCol="0" anchor="ctr"/>
+          <a:lstStyle/>
+          <a:p>
+            <a:pPr algn="ctr"/>
+          </a:p>
+        </p:txBody>
+      </p:sp>
+      <p:sp>
+        <p:nvSpPr>
+          <p:cNvPr id="10" name="TextBox 9"/>
+          <p:cNvSpPr txBox="1"/>
+          <p:nvPr/>
+        </p:nvSpPr>
+        <p:spPr>
+          <a:xfrm>
+            <a:off x="6400800" y="1371600"/>
+            <a:ext cx="5029200" cy="365760"/>
+          </a:xfrm>
+          <a:prstGeom prst="rect">
+            <a:avLst/>
+          </a:prstGeom>
+          <a:noFill/>
+        </p:spPr>
+        <p:txBody>
+          <a:bodyPr wrap="square">
+            <a:spAutoFit/>
+          </a:bodyPr>
+          <a:lstStyle/>
+          <a:p>
+            <a:pPr algn="l"/>
+            <a:r>
+              <a:rPr sz="1600" b="1" i="0">
+                <a:solidFill>
+                  <a:srgbClr val="0D6E6E"/>
                 </a:solidFill>
                 <a:latin typeface="Calibri"/>
               </a:rPr>
-              <a:t>•  Digital health records and outreach data ready to feed FCHIP</a:t>
-            </a:r>
-          </a:p>
-          <a:p>
-            <a:pPr>
-              <a:spcAft>
-                <a:spcPts val="800"/>
-              </a:spcAft>
-            </a:pPr>
-            <a:r>
-              <a:rPr sz="1400">
+              <a:t>I receive</a:t>
+            </a:r>
+          </a:p>
+        </p:txBody>
+      </p:sp>
+      <p:sp>
+        <p:nvSpPr>
+          <p:cNvPr id="11" name="TextBox 10"/>
+          <p:cNvSpPr txBox="1"/>
+          <p:nvPr/>
+        </p:nvSpPr>
+        <p:spPr>
+          <a:xfrm>
+            <a:off x="6400800" y="1828800"/>
+            <a:ext cx="5029200" cy="3474720"/>
+          </a:xfrm>
+          <a:prstGeom prst="rect">
+            <a:avLst/>
+          </a:prstGeom>
+          <a:noFill/>
+        </p:spPr>
+        <p:txBody>
+          <a:bodyPr wrap="square">
+            <a:spAutoFit/>
+          </a:bodyPr>
+          <a:lstStyle/>
+          <a:p>
+            <a:pPr algn="l"/>
+            <a:r>
+              <a:rPr sz="1400" b="0" i="0">
                 <a:solidFill>
                   <a:srgbClr val="1E2F38"/>
                 </a:solidFill>
                 <a:latin typeface="Calibri"/>
               </a:rPr>
-              <a:t>•  Research and partnership mindset for ethical, evidence-based scale</a:t>
-            </a:r>
-          </a:p>
-        </p:txBody>
-      </p:sp>
-      <p:sp>
-        <p:nvSpPr>
-          <p:cNvPr id="8" name="Rectangle 7"/>
+              <a:t>• Structured feminist AI curriculum and peer changemakers
+• Mentorship on bias, safety, and inclusive model design
+• Continental network to stress-test FCHIP ethics and narrative</a:t>
+            </a:r>
+          </a:p>
+        </p:txBody>
+      </p:sp>
+      <p:sp>
+        <p:nvSpPr>
+          <p:cNvPr id="12" name="Rectangle 11"/>
           <p:cNvSpPr/>
           <p:nvPr/>
         </p:nvSpPr>
         <p:spPr>
           <a:xfrm>
-            <a:off x="0" y="6565392"/>
-            <a:ext cx="12191695" cy="292608"/>
+            <a:off x="0" y="6583680"/>
+            <a:ext cx="12191695" cy="274320"/>
           </a:xfrm>
           <a:prstGeom prst="rect">
             <a:avLst/>
@@ -6161,7 +6058,6 @@
           <a:ln>
             <a:noFill/>
           </a:ln>
-          <a:effectLst/>
         </p:spPr>
         <p:style>
           <a:lnRef idx="1">
@@ -6187,14 +6083,14 @@
       </p:sp>
       <p:sp>
         <p:nvSpPr>
-          <p:cNvPr id="9" name="TextBox 8"/>
+          <p:cNvPr id="13" name="TextBox 12"/>
           <p:cNvSpPr txBox="1"/>
           <p:nvPr/>
         </p:nvSpPr>
         <p:spPr>
           <a:xfrm>
-            <a:off x="365760" y="6574536"/>
-            <a:ext cx="9144000" cy="274320"/>
+            <a:off x="365760" y="6592824"/>
+            <a:ext cx="9144000" cy="256032"/>
           </a:xfrm>
           <a:prstGeom prst="rect">
             <a:avLst/>
@@ -6202,16 +6098,12 @@
           <a:noFill/>
         </p:spPr>
         <p:txBody>
-          <a:bodyPr wrap="square" anchor="ctr">
+          <a:bodyPr wrap="square">
             <a:spAutoFit/>
           </a:bodyPr>
           <a:lstStyle/>
           <a:p>
-            <a:pPr algn="l">
-              <a:spcAft>
-                <a:spcPts val="0"/>
-              </a:spcAft>
-            </a:pPr>
+            <a:pPr algn="l"/>
             <a:r>
               <a:rPr sz="900" b="0" i="0">
                 <a:solidFill>
@@ -6219,21 +6111,21 @@
                 </a:solidFill>
                 <a:latin typeface="Calibri"/>
               </a:rPr>
-              <a:t>FairBanks FCHIP  |  Young Feminist AI School 2026 (UN Women)  |  Your health, our mission.</a:t>
-            </a:r>
-          </a:p>
-        </p:txBody>
-      </p:sp>
-      <p:sp>
-        <p:nvSpPr>
-          <p:cNvPr id="10" name="TextBox 9"/>
+              <a:t>FairBanks FCHIP | Young Feminist AI School | Your health, our mission.</a:t>
+            </a:r>
+          </a:p>
+        </p:txBody>
+      </p:sp>
+      <p:sp>
+        <p:nvSpPr>
+          <p:cNvPr id="14" name="TextBox 13"/>
           <p:cNvSpPr txBox="1"/>
           <p:nvPr/>
         </p:nvSpPr>
         <p:spPr>
           <a:xfrm>
-            <a:off x="11094415" y="6574536"/>
-            <a:ext cx="731520" cy="274320"/>
+            <a:off x="11460175" y="6592824"/>
+            <a:ext cx="457200" cy="256032"/>
           </a:xfrm>
           <a:prstGeom prst="rect">
             <a:avLst/>
@@ -6241,16 +6133,12 @@
           <a:noFill/>
         </p:spPr>
         <p:txBody>
-          <a:bodyPr wrap="square" anchor="ctr">
+          <a:bodyPr wrap="square">
             <a:spAutoFit/>
           </a:bodyPr>
           <a:lstStyle/>
           <a:p>
-            <a:pPr algn="r">
-              <a:spcAft>
-                <a:spcPts val="0"/>
-              </a:spcAft>
-            </a:pPr>
+            <a:pPr algn="r"/>
             <a:r>
               <a:rPr sz="900" b="0" i="0">
                 <a:solidFill>
@@ -6290,7 +6178,7 @@
         <p:spPr>
           <a:xfrm>
             <a:off x="0" y="0"/>
-            <a:ext cx="12191695" cy="960120"/>
+            <a:ext cx="12191695" cy="914400"/>
           </a:xfrm>
           <a:prstGeom prst="rect">
             <a:avLst/>
@@ -6301,7 +6189,6 @@
           <a:ln>
             <a:noFill/>
           </a:ln>
-          <a:effectLst/>
         </p:spPr>
         <p:style>
           <a:lnRef idx="1">
@@ -6334,7 +6221,7 @@
         <p:spPr>
           <a:xfrm>
             <a:off x="0" y="0"/>
-            <a:ext cx="164592" cy="960120"/>
+            <a:ext cx="137160" cy="914400"/>
           </a:xfrm>
           <a:prstGeom prst="rect">
             <a:avLst/>
@@ -6345,7 +6232,6 @@
           <a:ln>
             <a:noFill/>
           </a:ln>
-          <a:effectLst/>
         </p:spPr>
         <p:style>
           <a:lnRef idx="1">
@@ -6377,86 +6263,8 @@
         </p:nvSpPr>
         <p:spPr>
           <a:xfrm>
-            <a:off x="457200" y="109728"/>
-            <a:ext cx="10972800" cy="256032"/>
-          </a:xfrm>
-          <a:prstGeom prst="rect">
-            <a:avLst/>
-          </a:prstGeom>
-          <a:noFill/>
-        </p:spPr>
-        <p:txBody>
-          <a:bodyPr wrap="square" anchor="t">
-            <a:spAutoFit/>
-          </a:bodyPr>
-          <a:lstStyle/>
-          <a:p>
-            <a:pPr algn="l">
-              <a:spcAft>
-                <a:spcPts val="0"/>
-              </a:spcAft>
-            </a:pPr>
-            <a:r>
-              <a:rPr sz="1100" b="1" i="0">
-                <a:solidFill>
-                  <a:srgbClr val="C45C26"/>
-                </a:solidFill>
-                <a:latin typeface="Calibri"/>
-              </a:rPr>
-              <a:t>THE PLAN</a:t>
-            </a:r>
-          </a:p>
-        </p:txBody>
-      </p:sp>
-      <p:sp>
-        <p:nvSpPr>
-          <p:cNvPr id="5" name="TextBox 4"/>
-          <p:cNvSpPr txBox="1"/>
-          <p:nvPr/>
-        </p:nvSpPr>
-        <p:spPr>
-          <a:xfrm>
-            <a:off x="457200" y="384048"/>
-            <a:ext cx="11247120" cy="475488"/>
-          </a:xfrm>
-          <a:prstGeom prst="rect">
-            <a:avLst/>
-          </a:prstGeom>
-          <a:noFill/>
-        </p:spPr>
-        <p:txBody>
-          <a:bodyPr wrap="square" anchor="t">
-            <a:spAutoFit/>
-          </a:bodyPr>
-          <a:lstStyle/>
-          <a:p>
-            <a:pPr algn="l">
-              <a:spcAft>
-                <a:spcPts val="0"/>
-              </a:spcAft>
-            </a:pPr>
-            <a:r>
-              <a:rPr sz="2200" b="1" i="0">
-                <a:solidFill>
-                  <a:srgbClr val="0A1F2E"/>
-                </a:solidFill>
-                <a:latin typeface="Calibri"/>
-              </a:rPr>
-              <a:t>12-week learning and project plan</a:t>
-            </a:r>
-          </a:p>
-        </p:txBody>
-      </p:sp>
-      <p:sp>
-        <p:nvSpPr>
-          <p:cNvPr id="6" name="TextBox 5"/>
-          <p:cNvSpPr txBox="1"/>
-          <p:nvPr/>
-        </p:nvSpPr>
-        <p:spPr>
-          <a:xfrm>
-            <a:off x="502920" y="1234440"/>
-            <a:ext cx="5760720" cy="5074920"/>
+            <a:off x="411480" y="91440"/>
+            <a:ext cx="10972800" cy="274320"/>
           </a:xfrm>
           <a:prstGeom prst="rect">
             <a:avLst/>
@@ -6469,74 +6277,57 @@
           </a:bodyPr>
           <a:lstStyle/>
           <a:p>
-            <a:pPr>
-              <a:spcAft>
-                <a:spcPts val="800"/>
-              </a:spcAft>
-            </a:pPr>
-            <a:r>
-              <a:rPr sz="1500">
-                <a:solidFill>
-                  <a:srgbClr val="1E2F38"/>
+            <a:pPr algn="l"/>
+            <a:r>
+              <a:rPr sz="1100" b="1" i="0">
+                <a:solidFill>
+                  <a:srgbClr val="C45C26"/>
                 </a:solidFill>
                 <a:latin typeface="Calibri"/>
               </a:rPr>
-              <a:t>•  Complete all 12 weeks (Aug–Oct 2026) with full attendance</a:t>
-            </a:r>
-          </a:p>
-          <a:p>
-            <a:pPr>
-              <a:spcAft>
-                <a:spcPts val="800"/>
-              </a:spcAft>
-            </a:pPr>
-            <a:r>
-              <a:rPr sz="1500">
-                <a:solidFill>
-                  <a:srgbClr val="1E2F38"/>
+              <a:t>TIMELINE</a:t>
+            </a:r>
+          </a:p>
+        </p:txBody>
+      </p:sp>
+      <p:sp>
+        <p:nvSpPr>
+          <p:cNvPr id="5" name="TextBox 4"/>
+          <p:cNvSpPr txBox="1"/>
+          <p:nvPr/>
+        </p:nvSpPr>
+        <p:spPr>
+          <a:xfrm>
+            <a:off x="411480" y="384048"/>
+            <a:ext cx="10972800" cy="457200"/>
+          </a:xfrm>
+          <a:prstGeom prst="rect">
+            <a:avLst/>
+          </a:prstGeom>
+          <a:noFill/>
+        </p:spPr>
+        <p:txBody>
+          <a:bodyPr wrap="square">
+            <a:spAutoFit/>
+          </a:bodyPr>
+          <a:lstStyle/>
+          <a:p>
+            <a:pPr algn="l"/>
+            <a:r>
+              <a:rPr sz="2400" b="1" i="0">
+                <a:solidFill>
+                  <a:srgbClr val="0A1F2E"/>
                 </a:solidFill>
                 <a:latin typeface="Calibri"/>
               </a:rPr>
-              <a:t>•  Build a gender-responsive AI project tied to maternal / adolescent use cases</a:t>
-            </a:r>
-          </a:p>
-          <a:p>
-            <a:pPr>
-              <a:spcAft>
-                <a:spcPts val="800"/>
-              </a:spcAft>
-            </a:pPr>
-            <a:r>
-              <a:rPr sz="1500">
-                <a:solidFill>
-                  <a:srgbClr val="1E2F38"/>
-                </a:solidFill>
-                <a:latin typeface="Calibri"/>
-              </a:rPr>
-              <a:t>•  Present findings to FairBanks clinical and CHW leads for adoption</a:t>
-            </a:r>
-          </a:p>
-          <a:p>
-            <a:pPr>
-              <a:spcAft>
-                <a:spcPts val="800"/>
-              </a:spcAft>
-            </a:pPr>
-            <a:r>
-              <a:rPr sz="1500">
-                <a:solidFill>
-                  <a:srgbClr val="1E2F38"/>
-                </a:solidFill>
-                <a:latin typeface="Calibri"/>
-              </a:rPr>
-              <a:t>•  Share learnings back with UN Women alumni channels where useful</a:t>
+              <a:t>From classroom to community pilot</a:t>
             </a:r>
           </a:p>
         </p:txBody>
       </p:sp>
       <p:pic>
         <p:nvPicPr>
-          <p:cNvPr id="7" name="Picture 6" descr="indoor_training_staff_presenting_01_opt.jpg"/>
+          <p:cNvPr id="6" name="Picture 5" descr="outreach_mobile_phone_demo_01_opt.jpg"/>
           <p:cNvPicPr>
             <a:picLocks noChangeAspect="1"/>
           </p:cNvPicPr>
@@ -6550,14 +6341,51 @@
         </p:blipFill>
         <p:spPr>
           <a:xfrm>
-            <a:off x="6492240" y="2035160"/>
-            <a:ext cx="5212080" cy="3473479"/>
+            <a:off x="411480" y="1935480"/>
+            <a:ext cx="5029200" cy="3352800"/>
           </a:xfrm>
           <a:prstGeom prst="rect">
             <a:avLst/>
           </a:prstGeom>
         </p:spPr>
       </p:pic>
+      <p:sp>
+        <p:nvSpPr>
+          <p:cNvPr id="7" name="TextBox 6"/>
+          <p:cNvSpPr txBox="1"/>
+          <p:nvPr/>
+        </p:nvSpPr>
+        <p:spPr>
+          <a:xfrm>
+            <a:off x="5669280" y="1097280"/>
+            <a:ext cx="5943600" cy="5029200"/>
+          </a:xfrm>
+          <a:prstGeom prst="rect">
+            <a:avLst/>
+          </a:prstGeom>
+          <a:noFill/>
+        </p:spPr>
+        <p:txBody>
+          <a:bodyPr wrap="square">
+            <a:spAutoFit/>
+          </a:bodyPr>
+          <a:lstStyle/>
+          <a:p>
+            <a:pPr algn="l"/>
+            <a:r>
+              <a:rPr sz="1600" b="0" i="0">
+                <a:solidFill>
+                  <a:srgbClr val="1E2F38"/>
+                </a:solidFill>
+                <a:latin typeface="Calibri"/>
+              </a:rPr>
+              <a:t>Weeks 1–4: Feminist AI foundations + dataset audit
+Weeks 5–8: Prototype Safe Signals with CHWs
+Weeks 9–12: Validate, document bias checks, share open brief</a:t>
+            </a:r>
+          </a:p>
+        </p:txBody>
+      </p:sp>
       <p:sp>
         <p:nvSpPr>
           <p:cNvPr id="8" name="Rectangle 7"/>
@@ -6566,8 +6394,8 @@
         </p:nvSpPr>
         <p:spPr>
           <a:xfrm>
-            <a:off x="0" y="6565392"/>
-            <a:ext cx="12191695" cy="292608"/>
+            <a:off x="0" y="6583680"/>
+            <a:ext cx="12191695" cy="274320"/>
           </a:xfrm>
           <a:prstGeom prst="rect">
             <a:avLst/>
@@ -6578,7 +6406,6 @@
           <a:ln>
             <a:noFill/>
           </a:ln>
-          <a:effectLst/>
         </p:spPr>
         <p:style>
           <a:lnRef idx="1">
@@ -6610,8 +6437,8 @@
         </p:nvSpPr>
         <p:spPr>
           <a:xfrm>
-            <a:off x="365760" y="6574536"/>
-            <a:ext cx="9144000" cy="274320"/>
+            <a:off x="365760" y="6592824"/>
+            <a:ext cx="9144000" cy="256032"/>
           </a:xfrm>
           <a:prstGeom prst="rect">
             <a:avLst/>
@@ -6619,16 +6446,12 @@
           <a:noFill/>
         </p:spPr>
         <p:txBody>
-          <a:bodyPr wrap="square" anchor="ctr">
+          <a:bodyPr wrap="square">
             <a:spAutoFit/>
           </a:bodyPr>
           <a:lstStyle/>
           <a:p>
-            <a:pPr algn="l">
-              <a:spcAft>
-                <a:spcPts val="0"/>
-              </a:spcAft>
-            </a:pPr>
+            <a:pPr algn="l"/>
             <a:r>
               <a:rPr sz="900" b="0" i="0">
                 <a:solidFill>
@@ -6636,7 +6459,7 @@
                 </a:solidFill>
                 <a:latin typeface="Calibri"/>
               </a:rPr>
-              <a:t>FairBanks FCHIP  |  Young Feminist AI School 2026 (UN Women)  |  Your health, our mission.</a:t>
+              <a:t>FairBanks FCHIP | Young Feminist AI School | Your health, our mission.</a:t>
             </a:r>
           </a:p>
         </p:txBody>
@@ -6649,8 +6472,8 @@
         </p:nvSpPr>
         <p:spPr>
           <a:xfrm>
-            <a:off x="11094415" y="6574536"/>
-            <a:ext cx="731520" cy="274320"/>
+            <a:off x="11460175" y="6592824"/>
+            <a:ext cx="457200" cy="256032"/>
           </a:xfrm>
           <a:prstGeom prst="rect">
             <a:avLst/>
@@ -6658,16 +6481,12 @@
           <a:noFill/>
         </p:spPr>
         <p:txBody>
-          <a:bodyPr wrap="square" anchor="ctr">
+          <a:bodyPr wrap="square">
             <a:spAutoFit/>
           </a:bodyPr>
           <a:lstStyle/>
           <a:p>
-            <a:pPr algn="r">
-              <a:spcAft>
-                <a:spcPts val="0"/>
-              </a:spcAft>
-            </a:pPr>
+            <a:pPr algn="r"/>
             <a:r>
               <a:rPr sz="900" b="0" i="0">
                 <a:solidFill>
@@ -6698,175 +6517,9 @@
         <p:nvPr/>
       </p:nvGrpSpPr>
       <p:grpSpPr/>
-      <p:sp>
-        <p:nvSpPr>
-          <p:cNvPr id="2" name="Rectangle 1"/>
-          <p:cNvSpPr/>
-          <p:nvPr/>
-        </p:nvSpPr>
-        <p:spPr>
-          <a:xfrm>
-            <a:off x="0" y="0"/>
-            <a:ext cx="12191695" cy="960120"/>
-          </a:xfrm>
-          <a:prstGeom prst="rect">
-            <a:avLst/>
-          </a:prstGeom>
-          <a:solidFill>
-            <a:srgbClr val="F7F5F0"/>
-          </a:solidFill>
-          <a:ln>
-            <a:noFill/>
-          </a:ln>
-          <a:effectLst/>
-        </p:spPr>
-        <p:style>
-          <a:lnRef idx="1">
-            <a:schemeClr val="accent1"/>
-          </a:lnRef>
-          <a:fillRef idx="3">
-            <a:schemeClr val="accent1"/>
-          </a:fillRef>
-          <a:effectRef idx="2">
-            <a:schemeClr val="accent1"/>
-          </a:effectRef>
-          <a:fontRef idx="minor">
-            <a:schemeClr val="lt1"/>
-          </a:fontRef>
-        </p:style>
-        <p:txBody>
-          <a:bodyPr rtlCol="0" anchor="ctr"/>
-          <a:lstStyle/>
-          <a:p>
-            <a:pPr algn="ctr"/>
-          </a:p>
-        </p:txBody>
-      </p:sp>
-      <p:sp>
-        <p:nvSpPr>
-          <p:cNvPr id="3" name="Rectangle 2"/>
-          <p:cNvSpPr/>
-          <p:nvPr/>
-        </p:nvSpPr>
-        <p:spPr>
-          <a:xfrm>
-            <a:off x="0" y="0"/>
-            <a:ext cx="164592" cy="960120"/>
-          </a:xfrm>
-          <a:prstGeom prst="rect">
-            <a:avLst/>
-          </a:prstGeom>
-          <a:solidFill>
-            <a:srgbClr val="0D6E6E"/>
-          </a:solidFill>
-          <a:ln>
-            <a:noFill/>
-          </a:ln>
-          <a:effectLst/>
-        </p:spPr>
-        <p:style>
-          <a:lnRef idx="1">
-            <a:schemeClr val="accent1"/>
-          </a:lnRef>
-          <a:fillRef idx="3">
-            <a:schemeClr val="accent1"/>
-          </a:fillRef>
-          <a:effectRef idx="2">
-            <a:schemeClr val="accent1"/>
-          </a:effectRef>
-          <a:fontRef idx="minor">
-            <a:schemeClr val="lt1"/>
-          </a:fontRef>
-        </p:style>
-        <p:txBody>
-          <a:bodyPr rtlCol="0" anchor="ctr"/>
-          <a:lstStyle/>
-          <a:p>
-            <a:pPr algn="ctr"/>
-          </a:p>
-        </p:txBody>
-      </p:sp>
-      <p:sp>
-        <p:nvSpPr>
-          <p:cNvPr id="4" name="TextBox 3"/>
-          <p:cNvSpPr txBox="1"/>
-          <p:nvPr/>
-        </p:nvSpPr>
-        <p:spPr>
-          <a:xfrm>
-            <a:off x="457200" y="109728"/>
-            <a:ext cx="10972800" cy="256032"/>
-          </a:xfrm>
-          <a:prstGeom prst="rect">
-            <a:avLst/>
-          </a:prstGeom>
-          <a:noFill/>
-        </p:spPr>
-        <p:txBody>
-          <a:bodyPr wrap="square" anchor="t">
-            <a:spAutoFit/>
-          </a:bodyPr>
-          <a:lstStyle/>
-          <a:p>
-            <a:pPr algn="l">
-              <a:spcAft>
-                <a:spcPts val="0"/>
-              </a:spcAft>
-            </a:pPr>
-            <a:r>
-              <a:rPr sz="1100" b="1" i="0">
-                <a:solidFill>
-                  <a:srgbClr val="C45C26"/>
-                </a:solidFill>
-                <a:latin typeface="Calibri"/>
-              </a:rPr>
-              <a:t>DEEP TECHNOLOGY</a:t>
-            </a:r>
-          </a:p>
-        </p:txBody>
-      </p:sp>
-      <p:sp>
-        <p:nvSpPr>
-          <p:cNvPr id="5" name="TextBox 4"/>
-          <p:cNvSpPr txBox="1"/>
-          <p:nvPr/>
-        </p:nvSpPr>
-        <p:spPr>
-          <a:xfrm>
-            <a:off x="457200" y="384048"/>
-            <a:ext cx="11247120" cy="475488"/>
-          </a:xfrm>
-          <a:prstGeom prst="rect">
-            <a:avLst/>
-          </a:prstGeom>
-          <a:noFill/>
-        </p:spPr>
-        <p:txBody>
-          <a:bodyPr wrap="square" anchor="t">
-            <a:spAutoFit/>
-          </a:bodyPr>
-          <a:lstStyle/>
-          <a:p>
-            <a:pPr algn="l">
-              <a:spcAft>
-                <a:spcPts val="0"/>
-              </a:spcAft>
-            </a:pPr>
-            <a:r>
-              <a:rPr sz="2200" b="1" i="0">
-                <a:solidFill>
-                  <a:srgbClr val="0A1F2E"/>
-                </a:solidFill>
-                <a:latin typeface="Calibri"/>
-              </a:rPr>
-              <a:t>Intelligence rooted in African community care</a:t>
-            </a:r>
-          </a:p>
-        </p:txBody>
-      </p:sp>
       <p:pic>
         <p:nvPicPr>
-          <p:cNvPr id="6" name="Picture 5" descr="deep_tech_collage_opt.jpg"/>
+          <p:cNvPr id="2" name="Picture 1" descr="outreach_hands_raised_01_opt.jpg"/>
           <p:cNvPicPr>
             <a:picLocks noChangeAspect="1"/>
           </p:cNvPicPr>
@@ -6880,8 +6533,8 @@
         </p:blipFill>
         <p:spPr>
           <a:xfrm>
-            <a:off x="411480" y="2065630"/>
-            <a:ext cx="5120640" cy="3412540"/>
+            <a:off x="0" y="0"/>
+            <a:ext cx="12191695" cy="6858000"/>
           </a:xfrm>
           <a:prstGeom prst="rect">
             <a:avLst/>
@@ -6890,758 +6543,14 @@
       </p:pic>
       <p:sp>
         <p:nvSpPr>
-          <p:cNvPr id="7" name="Rectangle 6"/>
+          <p:cNvPr id="3" name="Rectangle 2"/>
           <p:cNvSpPr/>
           <p:nvPr/>
         </p:nvSpPr>
         <p:spPr>
           <a:xfrm>
-            <a:off x="5852160" y="1197864"/>
-            <a:ext cx="5852160" cy="766572"/>
-          </a:xfrm>
-          <a:prstGeom prst="rect">
-            <a:avLst/>
-          </a:prstGeom>
-          <a:solidFill>
-            <a:srgbClr val="FFFFFF"/>
-          </a:solidFill>
-          <a:ln w="9525">
-            <a:solidFill>
-              <a:srgbClr val="D0DCDC"/>
-            </a:solidFill>
-          </a:ln>
-          <a:effectLst/>
-        </p:spPr>
-        <p:style>
-          <a:lnRef idx="1">
-            <a:schemeClr val="accent1"/>
-          </a:lnRef>
-          <a:fillRef idx="3">
-            <a:schemeClr val="accent1"/>
-          </a:fillRef>
-          <a:effectRef idx="2">
-            <a:schemeClr val="accent1"/>
-          </a:effectRef>
-          <a:fontRef idx="minor">
-            <a:schemeClr val="lt1"/>
-          </a:fontRef>
-        </p:style>
-        <p:txBody>
-          <a:bodyPr rtlCol="0" anchor="ctr"/>
-          <a:lstStyle/>
-          <a:p>
-            <a:pPr algn="ctr"/>
-          </a:p>
-        </p:txBody>
-      </p:sp>
-      <p:sp>
-        <p:nvSpPr>
-          <p:cNvPr id="8" name="TextBox 7"/>
-          <p:cNvSpPr txBox="1"/>
-          <p:nvPr/>
-        </p:nvSpPr>
-        <p:spPr>
-          <a:xfrm>
-            <a:off x="6035040" y="1252728"/>
-            <a:ext cx="5486400" cy="274320"/>
-          </a:xfrm>
-          <a:prstGeom prst="rect">
-            <a:avLst/>
-          </a:prstGeom>
-          <a:noFill/>
-        </p:spPr>
-        <p:txBody>
-          <a:bodyPr wrap="square" anchor="t">
-            <a:spAutoFit/>
-          </a:bodyPr>
-          <a:lstStyle/>
-          <a:p>
-            <a:pPr algn="l">
-              <a:spcAft>
-                <a:spcPts val="0"/>
-              </a:spcAft>
-            </a:pPr>
-            <a:r>
-              <a:rPr sz="1400" b="1" i="0">
-                <a:solidFill>
-                  <a:srgbClr val="0D6E6E"/>
-                </a:solidFill>
-                <a:latin typeface="Calibri"/>
-              </a:rPr>
-              <a:t>Artificial Intelligence</a:t>
-            </a:r>
-          </a:p>
-        </p:txBody>
-      </p:sp>
-      <p:sp>
-        <p:nvSpPr>
-          <p:cNvPr id="9" name="TextBox 8"/>
-          <p:cNvSpPr txBox="1"/>
-          <p:nvPr/>
-        </p:nvSpPr>
-        <p:spPr>
-          <a:xfrm>
-            <a:off x="6035040" y="1527048"/>
-            <a:ext cx="5486400" cy="365760"/>
-          </a:xfrm>
-          <a:prstGeom prst="rect">
-            <a:avLst/>
-          </a:prstGeom>
-          <a:noFill/>
-        </p:spPr>
-        <p:txBody>
-          <a:bodyPr wrap="square" anchor="t">
-            <a:spAutoFit/>
-          </a:bodyPr>
-          <a:lstStyle/>
-          <a:p>
-            <a:pPr algn="l">
-              <a:spcAft>
-                <a:spcPts val="0"/>
-              </a:spcAft>
-            </a:pPr>
-            <a:r>
-              <a:rPr sz="1200" b="0" i="0">
-                <a:solidFill>
-                  <a:srgbClr val="3A4A54"/>
-                </a:solidFill>
-                <a:latin typeface="Calibri"/>
-              </a:rPr>
-              <a:t>Outbreak early warning; maternal and NCD risk scoring</a:t>
-            </a:r>
-          </a:p>
-        </p:txBody>
-      </p:sp>
-      <p:sp>
-        <p:nvSpPr>
-          <p:cNvPr id="10" name="Rectangle 9"/>
-          <p:cNvSpPr/>
-          <p:nvPr/>
-        </p:nvSpPr>
-        <p:spPr>
-          <a:xfrm>
-            <a:off x="5852160" y="2074164"/>
-            <a:ext cx="5852160" cy="766572"/>
-          </a:xfrm>
-          <a:prstGeom prst="rect">
-            <a:avLst/>
-          </a:prstGeom>
-          <a:solidFill>
-            <a:srgbClr val="FFFFFF"/>
-          </a:solidFill>
-          <a:ln w="9525">
-            <a:solidFill>
-              <a:srgbClr val="D0DCDC"/>
-            </a:solidFill>
-          </a:ln>
-          <a:effectLst/>
-        </p:spPr>
-        <p:style>
-          <a:lnRef idx="1">
-            <a:schemeClr val="accent1"/>
-          </a:lnRef>
-          <a:fillRef idx="3">
-            <a:schemeClr val="accent1"/>
-          </a:fillRef>
-          <a:effectRef idx="2">
-            <a:schemeClr val="accent1"/>
-          </a:effectRef>
-          <a:fontRef idx="minor">
-            <a:schemeClr val="lt1"/>
-          </a:fontRef>
-        </p:style>
-        <p:txBody>
-          <a:bodyPr rtlCol="0" anchor="ctr"/>
-          <a:lstStyle/>
-          <a:p>
-            <a:pPr algn="ctr"/>
-          </a:p>
-        </p:txBody>
-      </p:sp>
-      <p:sp>
-        <p:nvSpPr>
-          <p:cNvPr id="11" name="TextBox 10"/>
-          <p:cNvSpPr txBox="1"/>
-          <p:nvPr/>
-        </p:nvSpPr>
-        <p:spPr>
-          <a:xfrm>
-            <a:off x="6035040" y="2129028"/>
-            <a:ext cx="5486400" cy="274320"/>
-          </a:xfrm>
-          <a:prstGeom prst="rect">
-            <a:avLst/>
-          </a:prstGeom>
-          <a:noFill/>
-        </p:spPr>
-        <p:txBody>
-          <a:bodyPr wrap="square" anchor="t">
-            <a:spAutoFit/>
-          </a:bodyPr>
-          <a:lstStyle/>
-          <a:p>
-            <a:pPr algn="l">
-              <a:spcAft>
-                <a:spcPts val="0"/>
-              </a:spcAft>
-            </a:pPr>
-            <a:r>
-              <a:rPr sz="1400" b="1" i="0">
-                <a:solidFill>
-                  <a:srgbClr val="0D6E6E"/>
-                </a:solidFill>
-                <a:latin typeface="Calibri"/>
-              </a:rPr>
-              <a:t>Machine Learning</a:t>
-            </a:r>
-          </a:p>
-        </p:txBody>
-      </p:sp>
-      <p:sp>
-        <p:nvSpPr>
-          <p:cNvPr id="12" name="TextBox 11"/>
-          <p:cNvSpPr txBox="1"/>
-          <p:nvPr/>
-        </p:nvSpPr>
-        <p:spPr>
-          <a:xfrm>
-            <a:off x="6035040" y="2403348"/>
-            <a:ext cx="5486400" cy="365760"/>
-          </a:xfrm>
-          <a:prstGeom prst="rect">
-            <a:avLst/>
-          </a:prstGeom>
-          <a:noFill/>
-        </p:spPr>
-        <p:txBody>
-          <a:bodyPr wrap="square" anchor="t">
-            <a:spAutoFit/>
-          </a:bodyPr>
-          <a:lstStyle/>
-          <a:p>
-            <a:pPr algn="l">
-              <a:spcAft>
-                <a:spcPts val="0"/>
-              </a:spcAft>
-            </a:pPr>
-            <a:r>
-              <a:rPr sz="1200" b="0" i="0">
-                <a:solidFill>
-                  <a:srgbClr val="3A4A54"/>
-                </a:solidFill>
-                <a:latin typeface="Calibri"/>
-              </a:rPr>
-              <a:t>Learn from community patterns, seasons, and outreach outcomes</a:t>
-            </a:r>
-          </a:p>
-        </p:txBody>
-      </p:sp>
-      <p:sp>
-        <p:nvSpPr>
-          <p:cNvPr id="13" name="Rectangle 12"/>
-          <p:cNvSpPr/>
-          <p:nvPr/>
-        </p:nvSpPr>
-        <p:spPr>
-          <a:xfrm>
-            <a:off x="5852160" y="2950464"/>
-            <a:ext cx="5852160" cy="766572"/>
-          </a:xfrm>
-          <a:prstGeom prst="rect">
-            <a:avLst/>
-          </a:prstGeom>
-          <a:solidFill>
-            <a:srgbClr val="FFFFFF"/>
-          </a:solidFill>
-          <a:ln w="9525">
-            <a:solidFill>
-              <a:srgbClr val="D0DCDC"/>
-            </a:solidFill>
-          </a:ln>
-          <a:effectLst/>
-        </p:spPr>
-        <p:style>
-          <a:lnRef idx="1">
-            <a:schemeClr val="accent1"/>
-          </a:lnRef>
-          <a:fillRef idx="3">
-            <a:schemeClr val="accent1"/>
-          </a:fillRef>
-          <a:effectRef idx="2">
-            <a:schemeClr val="accent1"/>
-          </a:effectRef>
-          <a:fontRef idx="minor">
-            <a:schemeClr val="lt1"/>
-          </a:fontRef>
-        </p:style>
-        <p:txBody>
-          <a:bodyPr rtlCol="0" anchor="ctr"/>
-          <a:lstStyle/>
-          <a:p>
-            <a:pPr algn="ctr"/>
-          </a:p>
-        </p:txBody>
-      </p:sp>
-      <p:sp>
-        <p:nvSpPr>
-          <p:cNvPr id="14" name="TextBox 13"/>
-          <p:cNvSpPr txBox="1"/>
-          <p:nvPr/>
-        </p:nvSpPr>
-        <p:spPr>
-          <a:xfrm>
-            <a:off x="6035040" y="3005328"/>
-            <a:ext cx="5486400" cy="274320"/>
-          </a:xfrm>
-          <a:prstGeom prst="rect">
-            <a:avLst/>
-          </a:prstGeom>
-          <a:noFill/>
-        </p:spPr>
-        <p:txBody>
-          <a:bodyPr wrap="square" anchor="t">
-            <a:spAutoFit/>
-          </a:bodyPr>
-          <a:lstStyle/>
-          <a:p>
-            <a:pPr algn="l">
-              <a:spcAft>
-                <a:spcPts val="0"/>
-              </a:spcAft>
-            </a:pPr>
-            <a:r>
-              <a:rPr sz="1400" b="1" i="0">
-                <a:solidFill>
-                  <a:srgbClr val="0D6E6E"/>
-                </a:solidFill>
-                <a:latin typeface="Calibri"/>
-              </a:rPr>
-              <a:t>GIS Mapping</a:t>
-            </a:r>
-          </a:p>
-        </p:txBody>
-      </p:sp>
-      <p:sp>
-        <p:nvSpPr>
-          <p:cNvPr id="15" name="TextBox 14"/>
-          <p:cNvSpPr txBox="1"/>
-          <p:nvPr/>
-        </p:nvSpPr>
-        <p:spPr>
-          <a:xfrm>
-            <a:off x="6035040" y="3279648"/>
-            <a:ext cx="5486400" cy="365760"/>
-          </a:xfrm>
-          <a:prstGeom prst="rect">
-            <a:avLst/>
-          </a:prstGeom>
-          <a:noFill/>
-        </p:spPr>
-        <p:txBody>
-          <a:bodyPr wrap="square" anchor="t">
-            <a:spAutoFit/>
-          </a:bodyPr>
-          <a:lstStyle/>
-          <a:p>
-            <a:pPr algn="l">
-              <a:spcAft>
-                <a:spcPts val="0"/>
-              </a:spcAft>
-            </a:pPr>
-            <a:r>
-              <a:rPr sz="1200" b="0" i="0">
-                <a:solidFill>
-                  <a:srgbClr val="3A4A54"/>
-                </a:solidFill>
-                <a:latin typeface="Calibri"/>
-              </a:rPr>
-              <a:t>Disease distribution, hotspots, and resource gaps</a:t>
-            </a:r>
-          </a:p>
-        </p:txBody>
-      </p:sp>
-      <p:sp>
-        <p:nvSpPr>
-          <p:cNvPr id="16" name="Rectangle 15"/>
-          <p:cNvSpPr/>
-          <p:nvPr/>
-        </p:nvSpPr>
-        <p:spPr>
-          <a:xfrm>
-            <a:off x="5852160" y="3826764"/>
-            <a:ext cx="5852160" cy="766572"/>
-          </a:xfrm>
-          <a:prstGeom prst="rect">
-            <a:avLst/>
-          </a:prstGeom>
-          <a:solidFill>
-            <a:srgbClr val="FFFFFF"/>
-          </a:solidFill>
-          <a:ln w="9525">
-            <a:solidFill>
-              <a:srgbClr val="D0DCDC"/>
-            </a:solidFill>
-          </a:ln>
-          <a:effectLst/>
-        </p:spPr>
-        <p:style>
-          <a:lnRef idx="1">
-            <a:schemeClr val="accent1"/>
-          </a:lnRef>
-          <a:fillRef idx="3">
-            <a:schemeClr val="accent1"/>
-          </a:fillRef>
-          <a:effectRef idx="2">
-            <a:schemeClr val="accent1"/>
-          </a:effectRef>
-          <a:fontRef idx="minor">
-            <a:schemeClr val="lt1"/>
-          </a:fontRef>
-        </p:style>
-        <p:txBody>
-          <a:bodyPr rtlCol="0" anchor="ctr"/>
-          <a:lstStyle/>
-          <a:p>
-            <a:pPr algn="ctr"/>
-          </a:p>
-        </p:txBody>
-      </p:sp>
-      <p:sp>
-        <p:nvSpPr>
-          <p:cNvPr id="17" name="TextBox 16"/>
-          <p:cNvSpPr txBox="1"/>
-          <p:nvPr/>
-        </p:nvSpPr>
-        <p:spPr>
-          <a:xfrm>
-            <a:off x="6035040" y="3881628"/>
-            <a:ext cx="5486400" cy="274320"/>
-          </a:xfrm>
-          <a:prstGeom prst="rect">
-            <a:avLst/>
-          </a:prstGeom>
-          <a:noFill/>
-        </p:spPr>
-        <p:txBody>
-          <a:bodyPr wrap="square" anchor="t">
-            <a:spAutoFit/>
-          </a:bodyPr>
-          <a:lstStyle/>
-          <a:p>
-            <a:pPr algn="l">
-              <a:spcAft>
-                <a:spcPts val="0"/>
-              </a:spcAft>
-            </a:pPr>
-            <a:r>
-              <a:rPr sz="1400" b="1" i="0">
-                <a:solidFill>
-                  <a:srgbClr val="0D6E6E"/>
-                </a:solidFill>
-                <a:latin typeface="Calibri"/>
-              </a:rPr>
-              <a:t>Mobile Data Collection</a:t>
-            </a:r>
-          </a:p>
-        </p:txBody>
-      </p:sp>
-      <p:sp>
-        <p:nvSpPr>
-          <p:cNvPr id="18" name="TextBox 17"/>
-          <p:cNvSpPr txBox="1"/>
-          <p:nvPr/>
-        </p:nvSpPr>
-        <p:spPr>
-          <a:xfrm>
-            <a:off x="6035040" y="4155948"/>
-            <a:ext cx="5486400" cy="365760"/>
-          </a:xfrm>
-          <a:prstGeom prst="rect">
-            <a:avLst/>
-          </a:prstGeom>
-          <a:noFill/>
-        </p:spPr>
-        <p:txBody>
-          <a:bodyPr wrap="square" anchor="t">
-            <a:spAutoFit/>
-          </a:bodyPr>
-          <a:lstStyle/>
-          <a:p>
-            <a:pPr algn="l">
-              <a:spcAft>
-                <a:spcPts val="0"/>
-              </a:spcAft>
-            </a:pPr>
-            <a:r>
-              <a:rPr sz="1200" b="0" i="0">
-                <a:solidFill>
-                  <a:srgbClr val="3A4A54"/>
-                </a:solidFill>
-                <a:latin typeface="Calibri"/>
-              </a:rPr>
-              <a:t>Offline-capable CHW/VHT capture at household level</a:t>
-            </a:r>
-          </a:p>
-        </p:txBody>
-      </p:sp>
-      <p:sp>
-        <p:nvSpPr>
-          <p:cNvPr id="19" name="Rectangle 18"/>
-          <p:cNvSpPr/>
-          <p:nvPr/>
-        </p:nvSpPr>
-        <p:spPr>
-          <a:xfrm>
-            <a:off x="5852160" y="4703064"/>
-            <a:ext cx="5852160" cy="766572"/>
-          </a:xfrm>
-          <a:prstGeom prst="rect">
-            <a:avLst/>
-          </a:prstGeom>
-          <a:solidFill>
-            <a:srgbClr val="FFFFFF"/>
-          </a:solidFill>
-          <a:ln w="9525">
-            <a:solidFill>
-              <a:srgbClr val="D0DCDC"/>
-            </a:solidFill>
-          </a:ln>
-          <a:effectLst/>
-        </p:spPr>
-        <p:style>
-          <a:lnRef idx="1">
-            <a:schemeClr val="accent1"/>
-          </a:lnRef>
-          <a:fillRef idx="3">
-            <a:schemeClr val="accent1"/>
-          </a:fillRef>
-          <a:effectRef idx="2">
-            <a:schemeClr val="accent1"/>
-          </a:effectRef>
-          <a:fontRef idx="minor">
-            <a:schemeClr val="lt1"/>
-          </a:fontRef>
-        </p:style>
-        <p:txBody>
-          <a:bodyPr rtlCol="0" anchor="ctr"/>
-          <a:lstStyle/>
-          <a:p>
-            <a:pPr algn="ctr"/>
-          </a:p>
-        </p:txBody>
-      </p:sp>
-      <p:sp>
-        <p:nvSpPr>
-          <p:cNvPr id="20" name="TextBox 19"/>
-          <p:cNvSpPr txBox="1"/>
-          <p:nvPr/>
-        </p:nvSpPr>
-        <p:spPr>
-          <a:xfrm>
-            <a:off x="6035040" y="4757928"/>
-            <a:ext cx="5486400" cy="274320"/>
-          </a:xfrm>
-          <a:prstGeom prst="rect">
-            <a:avLst/>
-          </a:prstGeom>
-          <a:noFill/>
-        </p:spPr>
-        <p:txBody>
-          <a:bodyPr wrap="square" anchor="t">
-            <a:spAutoFit/>
-          </a:bodyPr>
-          <a:lstStyle/>
-          <a:p>
-            <a:pPr algn="l">
-              <a:spcAft>
-                <a:spcPts val="0"/>
-              </a:spcAft>
-            </a:pPr>
-            <a:r>
-              <a:rPr sz="1400" b="1" i="0">
-                <a:solidFill>
-                  <a:srgbClr val="0D6E6E"/>
-                </a:solidFill>
-                <a:latin typeface="Calibri"/>
-              </a:rPr>
-              <a:t>Cloud Computing</a:t>
-            </a:r>
-          </a:p>
-        </p:txBody>
-      </p:sp>
-      <p:sp>
-        <p:nvSpPr>
-          <p:cNvPr id="21" name="TextBox 20"/>
-          <p:cNvSpPr txBox="1"/>
-          <p:nvPr/>
-        </p:nvSpPr>
-        <p:spPr>
-          <a:xfrm>
-            <a:off x="6035040" y="5032248"/>
-            <a:ext cx="5486400" cy="365760"/>
-          </a:xfrm>
-          <a:prstGeom prst="rect">
-            <a:avLst/>
-          </a:prstGeom>
-          <a:noFill/>
-        </p:spPr>
-        <p:txBody>
-          <a:bodyPr wrap="square" anchor="t">
-            <a:spAutoFit/>
-          </a:bodyPr>
-          <a:lstStyle/>
-          <a:p>
-            <a:pPr algn="l">
-              <a:spcAft>
-                <a:spcPts val="0"/>
-              </a:spcAft>
-            </a:pPr>
-            <a:r>
-              <a:rPr sz="1200" b="0" i="0">
-                <a:solidFill>
-                  <a:srgbClr val="3A4A54"/>
-                </a:solidFill>
-                <a:latin typeface="Calibri"/>
-              </a:rPr>
-              <a:t>Secure sync across facilities and partners</a:t>
-            </a:r>
-          </a:p>
-        </p:txBody>
-      </p:sp>
-      <p:sp>
-        <p:nvSpPr>
-          <p:cNvPr id="22" name="Rectangle 21"/>
-          <p:cNvSpPr/>
-          <p:nvPr/>
-        </p:nvSpPr>
-        <p:spPr>
-          <a:xfrm>
-            <a:off x="5852160" y="5579364"/>
-            <a:ext cx="5852160" cy="766572"/>
-          </a:xfrm>
-          <a:prstGeom prst="rect">
-            <a:avLst/>
-          </a:prstGeom>
-          <a:solidFill>
-            <a:srgbClr val="FFFFFF"/>
-          </a:solidFill>
-          <a:ln w="9525">
-            <a:solidFill>
-              <a:srgbClr val="D0DCDC"/>
-            </a:solidFill>
-          </a:ln>
-          <a:effectLst/>
-        </p:spPr>
-        <p:style>
-          <a:lnRef idx="1">
-            <a:schemeClr val="accent1"/>
-          </a:lnRef>
-          <a:fillRef idx="3">
-            <a:schemeClr val="accent1"/>
-          </a:fillRef>
-          <a:effectRef idx="2">
-            <a:schemeClr val="accent1"/>
-          </a:effectRef>
-          <a:fontRef idx="minor">
-            <a:schemeClr val="lt1"/>
-          </a:fontRef>
-        </p:style>
-        <p:txBody>
-          <a:bodyPr rtlCol="0" anchor="ctr"/>
-          <a:lstStyle/>
-          <a:p>
-            <a:pPr algn="ctr"/>
-          </a:p>
-        </p:txBody>
-      </p:sp>
-      <p:sp>
-        <p:nvSpPr>
-          <p:cNvPr id="23" name="TextBox 22"/>
-          <p:cNvSpPr txBox="1"/>
-          <p:nvPr/>
-        </p:nvSpPr>
-        <p:spPr>
-          <a:xfrm>
-            <a:off x="6035040" y="5634228"/>
-            <a:ext cx="5486400" cy="274320"/>
-          </a:xfrm>
-          <a:prstGeom prst="rect">
-            <a:avLst/>
-          </a:prstGeom>
-          <a:noFill/>
-        </p:spPr>
-        <p:txBody>
-          <a:bodyPr wrap="square" anchor="t">
-            <a:spAutoFit/>
-          </a:bodyPr>
-          <a:lstStyle/>
-          <a:p>
-            <a:pPr algn="l">
-              <a:spcAft>
-                <a:spcPts val="0"/>
-              </a:spcAft>
-            </a:pPr>
-            <a:r>
-              <a:rPr sz="1400" b="1" i="0">
-                <a:solidFill>
-                  <a:srgbClr val="0D6E6E"/>
-                </a:solidFill>
-                <a:latin typeface="Calibri"/>
-              </a:rPr>
-              <a:t>Analytics Dashboards</a:t>
-            </a:r>
-          </a:p>
-        </p:txBody>
-      </p:sp>
-      <p:sp>
-        <p:nvSpPr>
-          <p:cNvPr id="24" name="TextBox 23"/>
-          <p:cNvSpPr txBox="1"/>
-          <p:nvPr/>
-        </p:nvSpPr>
-        <p:spPr>
-          <a:xfrm>
-            <a:off x="6035040" y="5908548"/>
-            <a:ext cx="5486400" cy="365760"/>
-          </a:xfrm>
-          <a:prstGeom prst="rect">
-            <a:avLst/>
-          </a:prstGeom>
-          <a:noFill/>
-        </p:spPr>
-        <p:txBody>
-          <a:bodyPr wrap="square" anchor="t">
-            <a:spAutoFit/>
-          </a:bodyPr>
-          <a:lstStyle/>
-          <a:p>
-            <a:pPr algn="l">
-              <a:spcAft>
-                <a:spcPts val="0"/>
-              </a:spcAft>
-            </a:pPr>
-            <a:r>
-              <a:rPr sz="1200" b="0" i="0">
-                <a:solidFill>
-                  <a:srgbClr val="3A4A54"/>
-                </a:solidFill>
-                <a:latin typeface="Calibri"/>
-              </a:rPr>
-              <a:t>Real-time views for clinics, districts, and NGOs</a:t>
-            </a:r>
-          </a:p>
-        </p:txBody>
-      </p:sp>
-      <p:sp>
-        <p:nvSpPr>
-          <p:cNvPr id="25" name="Rectangle 24"/>
-          <p:cNvSpPr/>
-          <p:nvPr/>
-        </p:nvSpPr>
-        <p:spPr>
-          <a:xfrm>
-            <a:off x="0" y="6565392"/>
-            <a:ext cx="12191695" cy="292608"/>
+            <a:off x="0" y="4572000"/>
+            <a:ext cx="12191695" cy="2286000"/>
           </a:xfrm>
           <a:prstGeom prst="rect">
             <a:avLst/>
@@ -7652,7 +6561,6 @@
           <a:ln>
             <a:noFill/>
           </a:ln>
-          <a:effectLst/>
         </p:spPr>
         <p:style>
           <a:lnRef idx="1">
@@ -7678,276 +6586,14 @@
       </p:sp>
       <p:sp>
         <p:nvSpPr>
-          <p:cNvPr id="26" name="TextBox 25"/>
-          <p:cNvSpPr txBox="1"/>
-          <p:nvPr/>
-        </p:nvSpPr>
-        <p:spPr>
-          <a:xfrm>
-            <a:off x="365760" y="6574536"/>
-            <a:ext cx="9144000" cy="274320"/>
-          </a:xfrm>
-          <a:prstGeom prst="rect">
-            <a:avLst/>
-          </a:prstGeom>
-          <a:noFill/>
-        </p:spPr>
-        <p:txBody>
-          <a:bodyPr wrap="square" anchor="ctr">
-            <a:spAutoFit/>
-          </a:bodyPr>
-          <a:lstStyle/>
-          <a:p>
-            <a:pPr algn="l">
-              <a:spcAft>
-                <a:spcPts val="0"/>
-              </a:spcAft>
-            </a:pPr>
-            <a:r>
-              <a:rPr sz="900" b="0" i="0">
-                <a:solidFill>
-                  <a:srgbClr val="FFFFFF"/>
-                </a:solidFill>
-                <a:latin typeface="Calibri"/>
-              </a:rPr>
-              <a:t>FairBanks FCHIP  |  Young Feminist AI School 2026 (UN Women)  |  Your health, our mission.</a:t>
-            </a:r>
-          </a:p>
-        </p:txBody>
-      </p:sp>
-      <p:sp>
-        <p:nvSpPr>
-          <p:cNvPr id="27" name="TextBox 26"/>
-          <p:cNvSpPr txBox="1"/>
-          <p:nvPr/>
-        </p:nvSpPr>
-        <p:spPr>
-          <a:xfrm>
-            <a:off x="11094415" y="6574536"/>
-            <a:ext cx="731520" cy="274320"/>
-          </a:xfrm>
-          <a:prstGeom prst="rect">
-            <a:avLst/>
-          </a:prstGeom>
-          <a:noFill/>
-        </p:spPr>
-        <p:txBody>
-          <a:bodyPr wrap="square" anchor="ctr">
-            <a:spAutoFit/>
-          </a:bodyPr>
-          <a:lstStyle/>
-          <a:p>
-            <a:pPr algn="r">
-              <a:spcAft>
-                <a:spcPts val="0"/>
-              </a:spcAft>
-            </a:pPr>
-            <a:r>
-              <a:rPr sz="900" b="0" i="0">
-                <a:solidFill>
-                  <a:srgbClr val="FFFFFF"/>
-                </a:solidFill>
-                <a:latin typeface="Calibri"/>
-              </a:rPr>
-              <a:t>8</a:t>
-            </a:r>
-          </a:p>
-        </p:txBody>
-      </p:sp>
-    </p:spTree>
-  </p:cSld>
-  <p:clrMapOvr>
-    <a:masterClrMapping/>
-  </p:clrMapOvr>
-</p:sld>
-</file>
-
-<file path=ppt/slides/slide9.xml><?xml version="1.0" encoding="utf-8"?>
-<p:sld xmlns:a="http://schemas.openxmlformats.org/drawingml/2006/main" xmlns:p="http://schemas.openxmlformats.org/presentationml/2006/main" xmlns:r="http://schemas.openxmlformats.org/officeDocument/2006/relationships">
-  <p:cSld>
-    <p:spTree>
-      <p:nvGrpSpPr>
-        <p:cNvPr id="1" name=""/>
-        <p:cNvGrpSpPr/>
-        <p:nvPr/>
-      </p:nvGrpSpPr>
-      <p:grpSpPr/>
-      <p:sp>
-        <p:nvSpPr>
-          <p:cNvPr id="2" name="Rectangle 1"/>
-          <p:cNvSpPr/>
-          <p:nvPr/>
-        </p:nvSpPr>
-        <p:spPr>
-          <a:xfrm>
-            <a:off x="0" y="0"/>
-            <a:ext cx="12191695" cy="960120"/>
-          </a:xfrm>
-          <a:prstGeom prst="rect">
-            <a:avLst/>
-          </a:prstGeom>
-          <a:solidFill>
-            <a:srgbClr val="F7F5F0"/>
-          </a:solidFill>
-          <a:ln>
-            <a:noFill/>
-          </a:ln>
-          <a:effectLst/>
-        </p:spPr>
-        <p:style>
-          <a:lnRef idx="1">
-            <a:schemeClr val="accent1"/>
-          </a:lnRef>
-          <a:fillRef idx="3">
-            <a:schemeClr val="accent1"/>
-          </a:fillRef>
-          <a:effectRef idx="2">
-            <a:schemeClr val="accent1"/>
-          </a:effectRef>
-          <a:fontRef idx="minor">
-            <a:schemeClr val="lt1"/>
-          </a:fontRef>
-        </p:style>
-        <p:txBody>
-          <a:bodyPr rtlCol="0" anchor="ctr"/>
-          <a:lstStyle/>
-          <a:p>
-            <a:pPr algn="ctr"/>
-          </a:p>
-        </p:txBody>
-      </p:sp>
-      <p:sp>
-        <p:nvSpPr>
-          <p:cNvPr id="3" name="Rectangle 2"/>
-          <p:cNvSpPr/>
-          <p:nvPr/>
-        </p:nvSpPr>
-        <p:spPr>
-          <a:xfrm>
-            <a:off x="0" y="0"/>
-            <a:ext cx="164592" cy="960120"/>
-          </a:xfrm>
-          <a:prstGeom prst="rect">
-            <a:avLst/>
-          </a:prstGeom>
-          <a:solidFill>
-            <a:srgbClr val="0D6E6E"/>
-          </a:solidFill>
-          <a:ln>
-            <a:noFill/>
-          </a:ln>
-          <a:effectLst/>
-        </p:spPr>
-        <p:style>
-          <a:lnRef idx="1">
-            <a:schemeClr val="accent1"/>
-          </a:lnRef>
-          <a:fillRef idx="3">
-            <a:schemeClr val="accent1"/>
-          </a:fillRef>
-          <a:effectRef idx="2">
-            <a:schemeClr val="accent1"/>
-          </a:effectRef>
-          <a:fontRef idx="minor">
-            <a:schemeClr val="lt1"/>
-          </a:fontRef>
-        </p:style>
-        <p:txBody>
-          <a:bodyPr rtlCol="0" anchor="ctr"/>
-          <a:lstStyle/>
-          <a:p>
-            <a:pPr algn="ctr"/>
-          </a:p>
-        </p:txBody>
-      </p:sp>
-      <p:sp>
-        <p:nvSpPr>
           <p:cNvPr id="4" name="TextBox 3"/>
           <p:cNvSpPr txBox="1"/>
           <p:nvPr/>
         </p:nvSpPr>
         <p:spPr>
           <a:xfrm>
-            <a:off x="457200" y="109728"/>
-            <a:ext cx="10972800" cy="256032"/>
-          </a:xfrm>
-          <a:prstGeom prst="rect">
-            <a:avLst/>
-          </a:prstGeom>
-          <a:noFill/>
-        </p:spPr>
-        <p:txBody>
-          <a:bodyPr wrap="square" anchor="t">
-            <a:spAutoFit/>
-          </a:bodyPr>
-          <a:lstStyle/>
-          <a:p>
-            <a:pPr algn="l">
-              <a:spcAft>
-                <a:spcPts val="0"/>
-              </a:spcAft>
-            </a:pPr>
-            <a:r>
-              <a:rPr sz="1100" b="1" i="0">
-                <a:solidFill>
-                  <a:srgbClr val="C45C26"/>
-                </a:solidFill>
-                <a:latin typeface="Calibri"/>
-              </a:rPr>
-              <a:t>OUR MODEL</a:t>
-            </a:r>
-          </a:p>
-        </p:txBody>
-      </p:sp>
-      <p:sp>
-        <p:nvSpPr>
-          <p:cNvPr id="5" name="TextBox 4"/>
-          <p:cNvSpPr txBox="1"/>
-          <p:nvPr/>
-        </p:nvSpPr>
-        <p:spPr>
-          <a:xfrm>
-            <a:off x="457200" y="384048"/>
-            <a:ext cx="11247120" cy="475488"/>
-          </a:xfrm>
-          <a:prstGeom prst="rect">
-            <a:avLst/>
-          </a:prstGeom>
-          <a:noFill/>
-        </p:spPr>
-        <p:txBody>
-          <a:bodyPr wrap="square" anchor="t">
-            <a:spAutoFit/>
-          </a:bodyPr>
-          <a:lstStyle/>
-          <a:p>
-            <a:pPr algn="l">
-              <a:spcAft>
-                <a:spcPts val="0"/>
-              </a:spcAft>
-            </a:pPr>
-            <a:r>
-              <a:rPr sz="2200" b="1" i="0">
-                <a:solidFill>
-                  <a:srgbClr val="0A1F2E"/>
-                </a:solidFill>
-                <a:latin typeface="Calibri"/>
-              </a:rPr>
-              <a:t>Communities first — intelligence that serves care</a:t>
-            </a:r>
-          </a:p>
-        </p:txBody>
-      </p:sp>
-      <p:sp>
-        <p:nvSpPr>
-          <p:cNvPr id="6" name="TextBox 5"/>
-          <p:cNvSpPr txBox="1"/>
-          <p:nvPr/>
-        </p:nvSpPr>
-        <p:spPr>
-          <a:xfrm>
-            <a:off x="502920" y="1234440"/>
-            <a:ext cx="5760720" cy="5074920"/>
+            <a:off x="548640" y="4937760"/>
+            <a:ext cx="10972800" cy="502920"/>
           </a:xfrm>
           <a:prstGeom prst="rect">
             <a:avLst/>
@@ -7960,245 +6606,50 @@
           </a:bodyPr>
           <a:lstStyle/>
           <a:p>
-            <a:pPr>
-              <a:spcAft>
-                <a:spcPts val="800"/>
-              </a:spcAft>
-            </a:pPr>
-            <a:r>
-              <a:rPr sz="1400">
-                <a:solidFill>
-                  <a:srgbClr val="1E2F38"/>
+            <a:pPr algn="l"/>
+            <a:r>
+              <a:rPr sz="2200" b="1" i="0">
+                <a:solidFill>
+                  <a:srgbClr val="FFFFFF"/>
                 </a:solidFill>
                 <a:latin typeface="Calibri"/>
               </a:rPr>
-              <a:t>•  Community members identify needs and own solutions</a:t>
-            </a:r>
-          </a:p>
-          <a:p>
-            <a:pPr>
-              <a:spcAft>
-                <a:spcPts val="800"/>
-              </a:spcAft>
-            </a:pPr>
-            <a:r>
-              <a:rPr sz="1400">
-                <a:solidFill>
-                  <a:srgbClr val="1E2F38"/>
+              <a:t>Gender-responsive AI — learned with UN Women, tested with communities.</a:t>
+            </a:r>
+          </a:p>
+        </p:txBody>
+      </p:sp>
+      <p:sp>
+        <p:nvSpPr>
+          <p:cNvPr id="5" name="TextBox 4"/>
+          <p:cNvSpPr txBox="1"/>
+          <p:nvPr/>
+        </p:nvSpPr>
+        <p:spPr>
+          <a:xfrm>
+            <a:off x="548640" y="5760720"/>
+            <a:ext cx="10972800" cy="320040"/>
+          </a:xfrm>
+          <a:prstGeom prst="rect">
+            <a:avLst/>
+          </a:prstGeom>
+          <a:noFill/>
+        </p:spPr>
+        <p:txBody>
+          <a:bodyPr wrap="square">
+            <a:spAutoFit/>
+          </a:bodyPr>
+          <a:lstStyle/>
+          <a:p>
+            <a:pPr algn="l"/>
+            <a:r>
+              <a:rPr sz="1400" b="1" i="0">
+                <a:solidFill>
+                  <a:srgbClr val="FFFFFF"/>
                 </a:solidFill>
                 <a:latin typeface="Calibri"/>
               </a:rPr>
-              <a:t>•  CHWs / VHTs bridge homes to clinics</a:t>
-            </a:r>
-          </a:p>
-          <a:p>
-            <a:pPr>
-              <a:spcAft>
-                <a:spcPts val="800"/>
-              </a:spcAft>
-            </a:pPr>
-            <a:r>
-              <a:rPr sz="1400">
-                <a:solidFill>
-                  <a:srgbClr val="1E2F38"/>
-                </a:solidFill>
-                <a:latin typeface="Calibri"/>
-              </a:rPr>
-              <a:t>•  FairBanks Community Reach programmes deliver outreach</a:t>
-            </a:r>
-          </a:p>
-          <a:p>
-            <a:pPr>
-              <a:spcAft>
-                <a:spcPts val="800"/>
-              </a:spcAft>
-            </a:pPr>
-            <a:r>
-              <a:rPr sz="1400">
-                <a:solidFill>
-                  <a:srgbClr val="1E2F38"/>
-                </a:solidFill>
-                <a:latin typeface="Calibri"/>
-              </a:rPr>
-              <a:t>•  FairBanks Medical Centre provides clinical care</a:t>
-            </a:r>
-          </a:p>
-          <a:p>
-            <a:pPr>
-              <a:spcAft>
-                <a:spcPts val="800"/>
-              </a:spcAft>
-            </a:pPr>
-            <a:r>
-              <a:rPr sz="1400">
-                <a:solidFill>
-                  <a:srgbClr val="1E2F38"/>
-                </a:solidFill>
-                <a:latin typeface="Calibri"/>
-              </a:rPr>
-              <a:t>•  Research, partnerships, and skills strengthen the system</a:t>
-            </a:r>
-          </a:p>
-          <a:p>
-            <a:pPr>
-              <a:spcAft>
-                <a:spcPts val="800"/>
-              </a:spcAft>
-            </a:pPr>
-            <a:r>
-              <a:rPr sz="1400">
-                <a:solidFill>
-                  <a:srgbClr val="1E2F38"/>
-                </a:solidFill>
-                <a:latin typeface="Calibri"/>
-              </a:rPr>
-              <a:t>•  Livelihoods and empowerment make health gains last</a:t>
-            </a:r>
-          </a:p>
-        </p:txBody>
-      </p:sp>
-      <p:pic>
-        <p:nvPicPr>
-          <p:cNvPr id="7" name="Picture 6" descr="gis_hotspots_opt.jpg"/>
-          <p:cNvPicPr>
-            <a:picLocks noChangeAspect="1"/>
-          </p:cNvPicPr>
-          <p:nvPr/>
-        </p:nvPicPr>
-        <p:blipFill>
-          <a:blip r:embed="rId2"/>
-          <a:stretch>
-            <a:fillRect/>
-          </a:stretch>
-        </p:blipFill>
-        <p:spPr>
-          <a:xfrm>
-            <a:off x="6492240" y="2035160"/>
-            <a:ext cx="5212080" cy="3473479"/>
-          </a:xfrm>
-          <a:prstGeom prst="rect">
-            <a:avLst/>
-          </a:prstGeom>
-        </p:spPr>
-      </p:pic>
-      <p:sp>
-        <p:nvSpPr>
-          <p:cNvPr id="8" name="Rectangle 7"/>
-          <p:cNvSpPr/>
-          <p:nvPr/>
-        </p:nvSpPr>
-        <p:spPr>
-          <a:xfrm>
-            <a:off x="0" y="6565392"/>
-            <a:ext cx="12191695" cy="292608"/>
-          </a:xfrm>
-          <a:prstGeom prst="rect">
-            <a:avLst/>
-          </a:prstGeom>
-          <a:solidFill>
-            <a:srgbClr val="0A1F2E"/>
-          </a:solidFill>
-          <a:ln>
-            <a:noFill/>
-          </a:ln>
-          <a:effectLst/>
-        </p:spPr>
-        <p:style>
-          <a:lnRef idx="1">
-            <a:schemeClr val="accent1"/>
-          </a:lnRef>
-          <a:fillRef idx="3">
-            <a:schemeClr val="accent1"/>
-          </a:fillRef>
-          <a:effectRef idx="2">
-            <a:schemeClr val="accent1"/>
-          </a:effectRef>
-          <a:fontRef idx="minor">
-            <a:schemeClr val="lt1"/>
-          </a:fontRef>
-        </p:style>
-        <p:txBody>
-          <a:bodyPr rtlCol="0" anchor="ctr"/>
-          <a:lstStyle/>
-          <a:p>
-            <a:pPr algn="ctr"/>
-          </a:p>
-        </p:txBody>
-      </p:sp>
-      <p:sp>
-        <p:nvSpPr>
-          <p:cNvPr id="9" name="TextBox 8"/>
-          <p:cNvSpPr txBox="1"/>
-          <p:nvPr/>
-        </p:nvSpPr>
-        <p:spPr>
-          <a:xfrm>
-            <a:off x="365760" y="6574536"/>
-            <a:ext cx="9144000" cy="274320"/>
-          </a:xfrm>
-          <a:prstGeom prst="rect">
-            <a:avLst/>
-          </a:prstGeom>
-          <a:noFill/>
-        </p:spPr>
-        <p:txBody>
-          <a:bodyPr wrap="square" anchor="ctr">
-            <a:spAutoFit/>
-          </a:bodyPr>
-          <a:lstStyle/>
-          <a:p>
-            <a:pPr algn="l">
-              <a:spcAft>
-                <a:spcPts val="0"/>
-              </a:spcAft>
-            </a:pPr>
-            <a:r>
-              <a:rPr sz="900" b="0" i="0">
-                <a:solidFill>
-                  <a:srgbClr val="FFFFFF"/>
-                </a:solidFill>
-                <a:latin typeface="Calibri"/>
-              </a:rPr>
-              <a:t>FairBanks FCHIP  |  Young Feminist AI School 2026 (UN Women)  |  Your health, our mission.</a:t>
-            </a:r>
-          </a:p>
-        </p:txBody>
-      </p:sp>
-      <p:sp>
-        <p:nvSpPr>
-          <p:cNvPr id="10" name="TextBox 9"/>
-          <p:cNvSpPr txBox="1"/>
-          <p:nvPr/>
-        </p:nvSpPr>
-        <p:spPr>
-          <a:xfrm>
-            <a:off x="11094415" y="6574536"/>
-            <a:ext cx="731520" cy="274320"/>
-          </a:xfrm>
-          <a:prstGeom prst="rect">
-            <a:avLst/>
-          </a:prstGeom>
-          <a:noFill/>
-        </p:spPr>
-        <p:txBody>
-          <a:bodyPr wrap="square" anchor="ctr">
-            <a:spAutoFit/>
-          </a:bodyPr>
-          <a:lstStyle/>
-          <a:p>
-            <a:pPr algn="r">
-              <a:spcAft>
-                <a:spcPts val="0"/>
-              </a:spcAft>
-            </a:pPr>
-            <a:r>
-              <a:rPr sz="900" b="0" i="0">
-                <a:solidFill>
-                  <a:srgbClr val="FFFFFF"/>
-                </a:solidFill>
-                <a:latin typeface="Calibri"/>
-              </a:rPr>
-              <a:t>9</a:t>
+              <a:t>Your health, our mission.</a:t>
             </a:r>
           </a:p>
         </p:txBody>

--- a/applications/feminist-ai/documents/feminist-ai_ppt.pptx
+++ b/applications/feminist-ai/documents/feminist-ai_ppt.pptx
@@ -3206,7 +3206,7 @@
         <p:spPr>
           <a:xfrm>
             <a:off x="548640" y="4663440"/>
-            <a:ext cx="10972800" cy="548640"/>
+            <a:ext cx="10972800" cy="457200"/>
           </a:xfrm>
           <a:prstGeom prst="rect">
             <a:avLst/>
@@ -3221,7 +3221,7 @@
           <a:p>
             <a:pPr algn="l"/>
             <a:r>
-              <a:rPr sz="2600" b="1" i="0">
+              <a:rPr sz="2400" b="1" i="0">
                 <a:solidFill>
                   <a:srgbClr val="FFFFFF"/>
                 </a:solidFill>
@@ -3240,7 +3240,42 @@
         </p:nvSpPr>
         <p:spPr>
           <a:xfrm>
-            <a:off x="548640" y="5440680"/>
+            <a:off x="548640" y="5120640"/>
+            <a:ext cx="10972800" cy="274320"/>
+          </a:xfrm>
+          <a:prstGeom prst="rect">
+            <a:avLst/>
+          </a:prstGeom>
+          <a:noFill/>
+        </p:spPr>
+        <p:txBody>
+          <a:bodyPr wrap="square">
+            <a:spAutoFit/>
+          </a:bodyPr>
+          <a:lstStyle/>
+          <a:p>
+            <a:pPr algn="l"/>
+            <a:r>
+              <a:rPr sz="1300" b="1" i="1">
+                <a:solidFill>
+                  <a:srgbClr val="F2C79B"/>
+                </a:solidFill>
+                <a:latin typeface="Calibri"/>
+              </a:rPr>
+              <a:t>FairBanks Community Health Intelligence Platform (FCHIP)</a:t>
+            </a:r>
+          </a:p>
+        </p:txBody>
+      </p:sp>
+      <p:sp>
+        <p:nvSpPr>
+          <p:cNvPr id="7" name="TextBox 6"/>
+          <p:cNvSpPr txBox="1"/>
+          <p:nvPr/>
+        </p:nvSpPr>
+        <p:spPr>
+          <a:xfrm>
+            <a:off x="548640" y="5532120"/>
             <a:ext cx="10972800" cy="320040"/>
           </a:xfrm>
           <a:prstGeom prst="rect">

--- a/applications/feminist-ai/documents/feminist-ai_ppt.pptx
+++ b/applications/feminist-ai/documents/feminist-ai_ppt.pptx
@@ -3184,7 +3184,17 @@
           </a:bodyPr>
           <a:lstStyle/>
           <a:p>
-            <a:pPr algn="l"/>
+            <a:pPr algn="l">
+              <a:lnSpc>
+                <a:spcPct val="115000"/>
+              </a:lnSpc>
+              <a:spcBef>
+                <a:spcPts val="0"/>
+              </a:spcBef>
+              <a:spcAft>
+                <a:spcPts val="200"/>
+              </a:spcAft>
+            </a:pPr>
             <a:r>
               <a:rPr sz="1300" b="1" i="0">
                 <a:solidFill>
@@ -3219,7 +3229,17 @@
           </a:bodyPr>
           <a:lstStyle/>
           <a:p>
-            <a:pPr algn="l"/>
+            <a:pPr algn="l">
+              <a:lnSpc>
+                <a:spcPct val="115000"/>
+              </a:lnSpc>
+              <a:spcBef>
+                <a:spcPts val="0"/>
+              </a:spcBef>
+              <a:spcAft>
+                <a:spcPts val="200"/>
+              </a:spcAft>
+            </a:pPr>
             <a:r>
               <a:rPr sz="2400" b="1" i="0">
                 <a:solidFill>
@@ -3254,7 +3274,17 @@
           </a:bodyPr>
           <a:lstStyle/>
           <a:p>
-            <a:pPr algn="l"/>
+            <a:pPr algn="l">
+              <a:lnSpc>
+                <a:spcPct val="115000"/>
+              </a:lnSpc>
+              <a:spcBef>
+                <a:spcPts val="0"/>
+              </a:spcBef>
+              <a:spcAft>
+                <a:spcPts val="200"/>
+              </a:spcAft>
+            </a:pPr>
             <a:r>
               <a:rPr sz="1300" b="1" i="1">
                 <a:solidFill>
@@ -3289,7 +3319,17 @@
           </a:bodyPr>
           <a:lstStyle/>
           <a:p>
-            <a:pPr algn="l"/>
+            <a:pPr algn="l">
+              <a:lnSpc>
+                <a:spcPct val="115000"/>
+              </a:lnSpc>
+              <a:spcBef>
+                <a:spcPts val="0"/>
+              </a:spcBef>
+              <a:spcAft>
+                <a:spcPts val="200"/>
+              </a:spcAft>
+            </a:pPr>
             <a:r>
               <a:rPr sz="1400" b="1" i="0">
                 <a:solidFill>
@@ -3428,7 +3468,17 @@
           </a:bodyPr>
           <a:lstStyle/>
           <a:p>
-            <a:pPr algn="l"/>
+            <a:pPr algn="l">
+              <a:lnSpc>
+                <a:spcPct val="115000"/>
+              </a:lnSpc>
+              <a:spcBef>
+                <a:spcPts val="0"/>
+              </a:spcBef>
+              <a:spcAft>
+                <a:spcPts val="200"/>
+              </a:spcAft>
+            </a:pPr>
             <a:r>
               <a:rPr sz="1100" b="1" i="0">
                 <a:solidFill>
@@ -3463,7 +3513,17 @@
           </a:bodyPr>
           <a:lstStyle/>
           <a:p>
-            <a:pPr algn="l"/>
+            <a:pPr algn="l">
+              <a:lnSpc>
+                <a:spcPct val="115000"/>
+              </a:lnSpc>
+              <a:spcBef>
+                <a:spcPts val="0"/>
+              </a:spcBef>
+              <a:spcAft>
+                <a:spcPts val="200"/>
+              </a:spcAft>
+            </a:pPr>
             <a:r>
               <a:rPr sz="2400" b="1" i="0">
                 <a:solidFill>
@@ -3586,7 +3646,17 @@
           </a:bodyPr>
           <a:lstStyle/>
           <a:p>
-            <a:pPr algn="l"/>
+            <a:pPr algn="l">
+              <a:lnSpc>
+                <a:spcPct val="115000"/>
+              </a:lnSpc>
+              <a:spcBef>
+                <a:spcPts val="0"/>
+              </a:spcBef>
+              <a:spcAft>
+                <a:spcPts val="200"/>
+              </a:spcAft>
+            </a:pPr>
             <a:r>
               <a:rPr sz="1500" b="1" i="0">
                 <a:solidFill>
@@ -3621,7 +3691,17 @@
           </a:bodyPr>
           <a:lstStyle/>
           <a:p>
-            <a:pPr algn="l"/>
+            <a:pPr algn="l">
+              <a:lnSpc>
+                <a:spcPct val="115000"/>
+              </a:lnSpc>
+              <a:spcBef>
+                <a:spcPts val="0"/>
+              </a:spcBef>
+              <a:spcAft>
+                <a:spcPts val="200"/>
+              </a:spcAft>
+            </a:pPr>
             <a:r>
               <a:rPr sz="1300" b="0" i="0">
                 <a:solidFill>
@@ -3744,7 +3824,17 @@
           </a:bodyPr>
           <a:lstStyle/>
           <a:p>
-            <a:pPr algn="l"/>
+            <a:pPr algn="l">
+              <a:lnSpc>
+                <a:spcPct val="115000"/>
+              </a:lnSpc>
+              <a:spcBef>
+                <a:spcPts val="0"/>
+              </a:spcBef>
+              <a:spcAft>
+                <a:spcPts val="200"/>
+              </a:spcAft>
+            </a:pPr>
             <a:r>
               <a:rPr sz="1500" b="1" i="0">
                 <a:solidFill>
@@ -3779,7 +3869,17 @@
           </a:bodyPr>
           <a:lstStyle/>
           <a:p>
-            <a:pPr algn="l"/>
+            <a:pPr algn="l">
+              <a:lnSpc>
+                <a:spcPct val="115000"/>
+              </a:lnSpc>
+              <a:spcBef>
+                <a:spcPts val="0"/>
+              </a:spcBef>
+              <a:spcAft>
+                <a:spcPts val="200"/>
+              </a:spcAft>
+            </a:pPr>
             <a:r>
               <a:rPr sz="1300" b="0" i="0">
                 <a:solidFill>
@@ -3902,7 +4002,17 @@
           </a:bodyPr>
           <a:lstStyle/>
           <a:p>
-            <a:pPr algn="l"/>
+            <a:pPr algn="l">
+              <a:lnSpc>
+                <a:spcPct val="115000"/>
+              </a:lnSpc>
+              <a:spcBef>
+                <a:spcPts val="0"/>
+              </a:spcBef>
+              <a:spcAft>
+                <a:spcPts val="200"/>
+              </a:spcAft>
+            </a:pPr>
             <a:r>
               <a:rPr sz="1500" b="1" i="0">
                 <a:solidFill>
@@ -3937,7 +4047,17 @@
           </a:bodyPr>
           <a:lstStyle/>
           <a:p>
-            <a:pPr algn="l"/>
+            <a:pPr algn="l">
+              <a:lnSpc>
+                <a:spcPct val="115000"/>
+              </a:lnSpc>
+              <a:spcBef>
+                <a:spcPts val="0"/>
+              </a:spcBef>
+              <a:spcAft>
+                <a:spcPts val="200"/>
+              </a:spcAft>
+            </a:pPr>
             <a:r>
               <a:rPr sz="1300" b="0" i="0">
                 <a:solidFill>
@@ -4060,7 +4180,17 @@
           </a:bodyPr>
           <a:lstStyle/>
           <a:p>
-            <a:pPr algn="l"/>
+            <a:pPr algn="l">
+              <a:lnSpc>
+                <a:spcPct val="115000"/>
+              </a:lnSpc>
+              <a:spcBef>
+                <a:spcPts val="0"/>
+              </a:spcBef>
+              <a:spcAft>
+                <a:spcPts val="200"/>
+              </a:spcAft>
+            </a:pPr>
             <a:r>
               <a:rPr sz="1500" b="1" i="0">
                 <a:solidFill>
@@ -4095,7 +4225,17 @@
           </a:bodyPr>
           <a:lstStyle/>
           <a:p>
-            <a:pPr algn="l"/>
+            <a:pPr algn="l">
+              <a:lnSpc>
+                <a:spcPct val="115000"/>
+              </a:lnSpc>
+              <a:spcBef>
+                <a:spcPts val="0"/>
+              </a:spcBef>
+              <a:spcAft>
+                <a:spcPts val="200"/>
+              </a:spcAft>
+            </a:pPr>
             <a:r>
               <a:rPr sz="1300" b="0" i="0">
                 <a:solidFill>
@@ -4173,7 +4313,17 @@
           </a:bodyPr>
           <a:lstStyle/>
           <a:p>
-            <a:pPr algn="l"/>
+            <a:pPr algn="l">
+              <a:lnSpc>
+                <a:spcPct val="115000"/>
+              </a:lnSpc>
+              <a:spcBef>
+                <a:spcPts val="0"/>
+              </a:spcBef>
+              <a:spcAft>
+                <a:spcPts val="200"/>
+              </a:spcAft>
+            </a:pPr>
             <a:r>
               <a:rPr sz="900" b="0" i="0">
                 <a:solidFill>
@@ -4208,7 +4358,17 @@
           </a:bodyPr>
           <a:lstStyle/>
           <a:p>
-            <a:pPr algn="r"/>
+            <a:pPr algn="r">
+              <a:lnSpc>
+                <a:spcPct val="115000"/>
+              </a:lnSpc>
+              <a:spcBef>
+                <a:spcPts val="0"/>
+              </a:spcBef>
+              <a:spcAft>
+                <a:spcPts val="200"/>
+              </a:spcAft>
+            </a:pPr>
             <a:r>
               <a:rPr sz="900" b="0" i="0">
                 <a:solidFill>
@@ -4347,7 +4507,17 @@
           </a:bodyPr>
           <a:lstStyle/>
           <a:p>
-            <a:pPr algn="l"/>
+            <a:pPr algn="l">
+              <a:lnSpc>
+                <a:spcPct val="115000"/>
+              </a:lnSpc>
+              <a:spcBef>
+                <a:spcPts val="0"/>
+              </a:spcBef>
+              <a:spcAft>
+                <a:spcPts val="200"/>
+              </a:spcAft>
+            </a:pPr>
             <a:r>
               <a:rPr sz="1100" b="1" i="0">
                 <a:solidFill>
@@ -4382,7 +4552,17 @@
           </a:bodyPr>
           <a:lstStyle/>
           <a:p>
-            <a:pPr algn="l"/>
+            <a:pPr algn="l">
+              <a:lnSpc>
+                <a:spcPct val="115000"/>
+              </a:lnSpc>
+              <a:spcBef>
+                <a:spcPts val="0"/>
+              </a:spcBef>
+              <a:spcAft>
+                <a:spcPts val="200"/>
+              </a:spcAft>
+            </a:pPr>
             <a:r>
               <a:rPr sz="2400" b="1" i="0">
                 <a:solidFill>
@@ -4441,17 +4621,69 @@
           </a:bodyPr>
           <a:lstStyle/>
           <a:p>
-            <a:pPr algn="l"/>
-            <a:r>
-              <a:rPr sz="1700" b="0" i="0">
+            <a:pPr algn="l">
+              <a:lnSpc>
+                <a:spcPct val="128000"/>
+              </a:lnSpc>
+              <a:spcBef>
+                <a:spcPts val="0"/>
+              </a:spcBef>
+              <a:spcAft>
+                <a:spcPts val="1400"/>
+              </a:spcAft>
+            </a:pPr>
+            <a:r>
+              <a:rPr sz="2600" b="0" i="0">
                 <a:solidFill>
                   <a:srgbClr val="1E2F38"/>
                 </a:solidFill>
                 <a:latin typeface="Calibri"/>
               </a:rPr>
-              <a:t>Missing data → biased models → harmful or useless alerts
-Maternal &amp; adolescent programmes need participatory design
-FairBanks outreach is where ethics meets engineering</a:t>
+              <a:t>Missing data → biased models → harmful or useless alerts</a:t>
+            </a:r>
+          </a:p>
+          <a:p>
+            <a:pPr algn="l">
+              <a:lnSpc>
+                <a:spcPct val="128000"/>
+              </a:lnSpc>
+              <a:spcBef>
+                <a:spcPts val="0"/>
+              </a:spcBef>
+              <a:spcAft>
+                <a:spcPts val="1400"/>
+              </a:spcAft>
+            </a:pPr>
+            <a:r>
+              <a:rPr sz="2600" b="0" i="0">
+                <a:solidFill>
+                  <a:srgbClr val="1E2F38"/>
+                </a:solidFill>
+                <a:latin typeface="Calibri"/>
+              </a:rPr>
+              <a:t>Maternal &amp; adolescent programmes need participatory design</a:t>
+            </a:r>
+          </a:p>
+          <a:p>
+            <a:pPr algn="l">
+              <a:lnSpc>
+                <a:spcPct val="128000"/>
+              </a:lnSpc>
+              <a:spcBef>
+                <a:spcPts val="0"/>
+              </a:spcBef>
+              <a:spcAft>
+                <a:spcPts val="200"/>
+              </a:spcAft>
+            </a:pPr>
+            <a:r>
+              <a:rPr sz="2600" b="0" i="0">
+                <a:solidFill>
+                  <a:srgbClr val="1E2F38"/>
+                </a:solidFill>
+                <a:latin typeface="Calibri"/>
+              </a:rPr>
+              <a:t>FairBanks outreach is where ethics meets engineering</a:t>
             </a:r>
           </a:p>
         </p:txBody>
@@ -4521,7 +4753,17 @@
           </a:bodyPr>
           <a:lstStyle/>
           <a:p>
-            <a:pPr algn="l"/>
+            <a:pPr algn="l">
+              <a:lnSpc>
+                <a:spcPct val="115000"/>
+              </a:lnSpc>
+              <a:spcBef>
+                <a:spcPts val="0"/>
+              </a:spcBef>
+              <a:spcAft>
+                <a:spcPts val="200"/>
+              </a:spcAft>
+            </a:pPr>
             <a:r>
               <a:rPr sz="900" b="0" i="0">
                 <a:solidFill>
@@ -4556,7 +4798,17 @@
           </a:bodyPr>
           <a:lstStyle/>
           <a:p>
-            <a:pPr algn="r"/>
+            <a:pPr algn="r">
+              <a:lnSpc>
+                <a:spcPct val="115000"/>
+              </a:lnSpc>
+              <a:spcBef>
+                <a:spcPts val="0"/>
+              </a:spcBef>
+              <a:spcAft>
+                <a:spcPts val="200"/>
+              </a:spcAft>
+            </a:pPr>
             <a:r>
               <a:rPr sz="900" b="0" i="0">
                 <a:solidFill>
@@ -4695,7 +4947,17 @@
           </a:bodyPr>
           <a:lstStyle/>
           <a:p>
-            <a:pPr algn="l"/>
+            <a:pPr algn="l">
+              <a:lnSpc>
+                <a:spcPct val="115000"/>
+              </a:lnSpc>
+              <a:spcBef>
+                <a:spcPts val="0"/>
+              </a:spcBef>
+              <a:spcAft>
+                <a:spcPts val="200"/>
+              </a:spcAft>
+            </a:pPr>
             <a:r>
               <a:rPr sz="1100" b="1" i="0">
                 <a:solidFill>
@@ -4730,7 +4992,17 @@
           </a:bodyPr>
           <a:lstStyle/>
           <a:p>
-            <a:pPr algn="l"/>
+            <a:pPr algn="l">
+              <a:lnSpc>
+                <a:spcPct val="115000"/>
+              </a:lnSpc>
+              <a:spcBef>
+                <a:spcPts val="0"/>
+              </a:spcBef>
+              <a:spcAft>
+                <a:spcPts val="200"/>
+              </a:spcAft>
+            </a:pPr>
             <a:r>
               <a:rPr sz="2400" b="1" i="0">
                 <a:solidFill>
@@ -4810,7 +5082,17 @@
           </a:bodyPr>
           <a:lstStyle/>
           <a:p>
-            <a:pPr algn="l"/>
+            <a:pPr algn="l">
+              <a:lnSpc>
+                <a:spcPct val="115000"/>
+              </a:lnSpc>
+              <a:spcBef>
+                <a:spcPts val="0"/>
+              </a:spcBef>
+              <a:spcAft>
+                <a:spcPts val="200"/>
+              </a:spcAft>
+            </a:pPr>
             <a:r>
               <a:rPr sz="1400" b="1" i="0">
                 <a:solidFill>
@@ -4845,9 +5127,19 @@
           </a:bodyPr>
           <a:lstStyle/>
           <a:p>
-            <a:pPr algn="l"/>
-            <a:r>
-              <a:rPr sz="1400" b="0" i="0">
+            <a:pPr algn="l">
+              <a:lnSpc>
+                <a:spcPct val="115000"/>
+              </a:lnSpc>
+              <a:spcBef>
+                <a:spcPts val="0"/>
+              </a:spcBef>
+              <a:spcAft>
+                <a:spcPts val="200"/>
+              </a:spcAft>
+            </a:pPr>
+            <a:r>
+              <a:rPr sz="1800" b="0" i="0">
                 <a:solidFill>
                   <a:srgbClr val="1E2F38"/>
                 </a:solidFill>
@@ -4925,7 +5217,17 @@
           </a:bodyPr>
           <a:lstStyle/>
           <a:p>
-            <a:pPr algn="l"/>
+            <a:pPr algn="l">
+              <a:lnSpc>
+                <a:spcPct val="115000"/>
+              </a:lnSpc>
+              <a:spcBef>
+                <a:spcPts val="0"/>
+              </a:spcBef>
+              <a:spcAft>
+                <a:spcPts val="200"/>
+              </a:spcAft>
+            </a:pPr>
             <a:r>
               <a:rPr sz="1400" b="1" i="0">
                 <a:solidFill>
@@ -4960,9 +5262,19 @@
           </a:bodyPr>
           <a:lstStyle/>
           <a:p>
-            <a:pPr algn="l"/>
-            <a:r>
-              <a:rPr sz="1400" b="0" i="0">
+            <a:pPr algn="l">
+              <a:lnSpc>
+                <a:spcPct val="115000"/>
+              </a:lnSpc>
+              <a:spcBef>
+                <a:spcPts val="0"/>
+              </a:spcBef>
+              <a:spcAft>
+                <a:spcPts val="200"/>
+              </a:spcAft>
+            </a:pPr>
+            <a:r>
+              <a:rPr sz="1800" b="0" i="0">
                 <a:solidFill>
                   <a:srgbClr val="1E2F38"/>
                 </a:solidFill>
@@ -5040,7 +5352,17 @@
           </a:bodyPr>
           <a:lstStyle/>
           <a:p>
-            <a:pPr algn="l"/>
+            <a:pPr algn="l">
+              <a:lnSpc>
+                <a:spcPct val="115000"/>
+              </a:lnSpc>
+              <a:spcBef>
+                <a:spcPts val="0"/>
+              </a:spcBef>
+              <a:spcAft>
+                <a:spcPts val="200"/>
+              </a:spcAft>
+            </a:pPr>
             <a:r>
               <a:rPr sz="1400" b="1" i="0">
                 <a:solidFill>
@@ -5075,9 +5397,19 @@
           </a:bodyPr>
           <a:lstStyle/>
           <a:p>
-            <a:pPr algn="l"/>
-            <a:r>
-              <a:rPr sz="1400" b="0" i="0">
+            <a:pPr algn="l">
+              <a:lnSpc>
+                <a:spcPct val="115000"/>
+              </a:lnSpc>
+              <a:spcBef>
+                <a:spcPts val="0"/>
+              </a:spcBef>
+              <a:spcAft>
+                <a:spcPts val="200"/>
+              </a:spcAft>
+            </a:pPr>
+            <a:r>
+              <a:rPr sz="1800" b="0" i="0">
                 <a:solidFill>
                   <a:srgbClr val="1E2F38"/>
                 </a:solidFill>
@@ -5155,7 +5487,17 @@
           </a:bodyPr>
           <a:lstStyle/>
           <a:p>
-            <a:pPr algn="l"/>
+            <a:pPr algn="l">
+              <a:lnSpc>
+                <a:spcPct val="115000"/>
+              </a:lnSpc>
+              <a:spcBef>
+                <a:spcPts val="0"/>
+              </a:spcBef>
+              <a:spcAft>
+                <a:spcPts val="200"/>
+              </a:spcAft>
+            </a:pPr>
             <a:r>
               <a:rPr sz="1400" b="1" i="0">
                 <a:solidFill>
@@ -5190,9 +5532,19 @@
           </a:bodyPr>
           <a:lstStyle/>
           <a:p>
-            <a:pPr algn="l"/>
-            <a:r>
-              <a:rPr sz="1400" b="0" i="0">
+            <a:pPr algn="l">
+              <a:lnSpc>
+                <a:spcPct val="115000"/>
+              </a:lnSpc>
+              <a:spcBef>
+                <a:spcPts val="0"/>
+              </a:spcBef>
+              <a:spcAft>
+                <a:spcPts val="200"/>
+              </a:spcAft>
+            </a:pPr>
+            <a:r>
+              <a:rPr sz="1800" b="0" i="0">
                 <a:solidFill>
                   <a:srgbClr val="1E2F38"/>
                 </a:solidFill>
@@ -5268,7 +5620,17 @@
           </a:bodyPr>
           <a:lstStyle/>
           <a:p>
-            <a:pPr algn="l"/>
+            <a:pPr algn="l">
+              <a:lnSpc>
+                <a:spcPct val="115000"/>
+              </a:lnSpc>
+              <a:spcBef>
+                <a:spcPts val="0"/>
+              </a:spcBef>
+              <a:spcAft>
+                <a:spcPts val="200"/>
+              </a:spcAft>
+            </a:pPr>
             <a:r>
               <a:rPr sz="900" b="0" i="0">
                 <a:solidFill>
@@ -5303,7 +5665,17 @@
           </a:bodyPr>
           <a:lstStyle/>
           <a:p>
-            <a:pPr algn="r"/>
+            <a:pPr algn="r">
+              <a:lnSpc>
+                <a:spcPct val="115000"/>
+              </a:lnSpc>
+              <a:spcBef>
+                <a:spcPts val="0"/>
+              </a:spcBef>
+              <a:spcAft>
+                <a:spcPts val="200"/>
+              </a:spcAft>
+            </a:pPr>
             <a:r>
               <a:rPr sz="900" b="0" i="0">
                 <a:solidFill>
@@ -5442,7 +5814,17 @@
           </a:bodyPr>
           <a:lstStyle/>
           <a:p>
-            <a:pPr algn="l"/>
+            <a:pPr algn="l">
+              <a:lnSpc>
+                <a:spcPct val="115000"/>
+              </a:lnSpc>
+              <a:spcBef>
+                <a:spcPts val="0"/>
+              </a:spcBef>
+              <a:spcAft>
+                <a:spcPts val="200"/>
+              </a:spcAft>
+            </a:pPr>
             <a:r>
               <a:rPr sz="1100" b="1" i="0">
                 <a:solidFill>
@@ -5477,7 +5859,17 @@
           </a:bodyPr>
           <a:lstStyle/>
           <a:p>
-            <a:pPr algn="l"/>
+            <a:pPr algn="l">
+              <a:lnSpc>
+                <a:spcPct val="115000"/>
+              </a:lnSpc>
+              <a:spcBef>
+                <a:spcPts val="0"/>
+              </a:spcBef>
+              <a:spcAft>
+                <a:spcPts val="200"/>
+              </a:spcAft>
+            </a:pPr>
             <a:r>
               <a:rPr sz="2400" b="1" i="0">
                 <a:solidFill>
@@ -5536,18 +5928,91 @@
           </a:bodyPr>
           <a:lstStyle/>
           <a:p>
-            <a:pPr algn="l"/>
-            <a:r>
-              <a:rPr sz="1700" b="0" i="0">
+            <a:pPr algn="l">
+              <a:lnSpc>
+                <a:spcPct val="128000"/>
+              </a:lnSpc>
+              <a:spcBef>
+                <a:spcPts val="0"/>
+              </a:spcBef>
+              <a:spcAft>
+                <a:spcPts val="1400"/>
+              </a:spcAft>
+            </a:pPr>
+            <a:r>
+              <a:rPr sz="2600" b="0" i="0">
                 <a:solidFill>
                   <a:srgbClr val="3A4A54"/>
                 </a:solidFill>
                 <a:latin typeface="Calibri"/>
               </a:rPr>
-              <a:t>CHW-led follow-up
-Consent &amp; anonymisation
-Auditable dashboards
-No stigma by design</a:t>
+              <a:t>CHW-led follow-up</a:t>
+            </a:r>
+          </a:p>
+          <a:p>
+            <a:pPr algn="l">
+              <a:lnSpc>
+                <a:spcPct val="128000"/>
+              </a:lnSpc>
+              <a:spcBef>
+                <a:spcPts val="0"/>
+              </a:spcBef>
+              <a:spcAft>
+                <a:spcPts val="1400"/>
+              </a:spcAft>
+            </a:pPr>
+            <a:r>
+              <a:rPr sz="2600" b="0" i="0">
+                <a:solidFill>
+                  <a:srgbClr val="3A4A54"/>
+                </a:solidFill>
+                <a:latin typeface="Calibri"/>
+              </a:rPr>
+              <a:t>Consent &amp; anonymisation</a:t>
+            </a:r>
+          </a:p>
+          <a:p>
+            <a:pPr algn="l">
+              <a:lnSpc>
+                <a:spcPct val="128000"/>
+              </a:lnSpc>
+              <a:spcBef>
+                <a:spcPts val="0"/>
+              </a:spcBef>
+              <a:spcAft>
+                <a:spcPts val="1400"/>
+              </a:spcAft>
+            </a:pPr>
+            <a:r>
+              <a:rPr sz="2600" b="0" i="0">
+                <a:solidFill>
+                  <a:srgbClr val="3A4A54"/>
+                </a:solidFill>
+                <a:latin typeface="Calibri"/>
+              </a:rPr>
+              <a:t>Auditable dashboards</a:t>
+            </a:r>
+          </a:p>
+          <a:p>
+            <a:pPr algn="l">
+              <a:lnSpc>
+                <a:spcPct val="128000"/>
+              </a:lnSpc>
+              <a:spcBef>
+                <a:spcPts val="0"/>
+              </a:spcBef>
+              <a:spcAft>
+                <a:spcPts val="200"/>
+              </a:spcAft>
+            </a:pPr>
+            <a:r>
+              <a:rPr sz="2600" b="0" i="0">
+                <a:solidFill>
+                  <a:srgbClr val="3A4A54"/>
+                </a:solidFill>
+                <a:latin typeface="Calibri"/>
+              </a:rPr>
+              <a:t>No stigma by design</a:t>
             </a:r>
           </a:p>
         </p:txBody>
@@ -5617,7 +6082,17 @@
           </a:bodyPr>
           <a:lstStyle/>
           <a:p>
-            <a:pPr algn="l"/>
+            <a:pPr algn="l">
+              <a:lnSpc>
+                <a:spcPct val="115000"/>
+              </a:lnSpc>
+              <a:spcBef>
+                <a:spcPts val="0"/>
+              </a:spcBef>
+              <a:spcAft>
+                <a:spcPts val="200"/>
+              </a:spcAft>
+            </a:pPr>
             <a:r>
               <a:rPr sz="900" b="0" i="0">
                 <a:solidFill>
@@ -5652,7 +6127,17 @@
           </a:bodyPr>
           <a:lstStyle/>
           <a:p>
-            <a:pPr algn="r"/>
+            <a:pPr algn="r">
+              <a:lnSpc>
+                <a:spcPct val="115000"/>
+              </a:lnSpc>
+              <a:spcBef>
+                <a:spcPts val="0"/>
+              </a:spcBef>
+              <a:spcAft>
+                <a:spcPts val="200"/>
+              </a:spcAft>
+            </a:pPr>
             <a:r>
               <a:rPr sz="900" b="0" i="0">
                 <a:solidFill>
@@ -5791,7 +6276,17 @@
           </a:bodyPr>
           <a:lstStyle/>
           <a:p>
-            <a:pPr algn="l"/>
+            <a:pPr algn="l">
+              <a:lnSpc>
+                <a:spcPct val="115000"/>
+              </a:lnSpc>
+              <a:spcBef>
+                <a:spcPts val="0"/>
+              </a:spcBef>
+              <a:spcAft>
+                <a:spcPts val="200"/>
+              </a:spcAft>
+            </a:pPr>
             <a:r>
               <a:rPr sz="1100" b="1" i="0">
                 <a:solidFill>
@@ -5826,7 +6321,17 @@
           </a:bodyPr>
           <a:lstStyle/>
           <a:p>
-            <a:pPr algn="l"/>
+            <a:pPr algn="l">
+              <a:lnSpc>
+                <a:spcPct val="115000"/>
+              </a:lnSpc>
+              <a:spcBef>
+                <a:spcPts val="0"/>
+              </a:spcBef>
+              <a:spcAft>
+                <a:spcPts val="200"/>
+              </a:spcAft>
+            </a:pPr>
             <a:r>
               <a:rPr sz="2400" b="1" i="0">
                 <a:solidFill>
@@ -5906,7 +6411,17 @@
           </a:bodyPr>
           <a:lstStyle/>
           <a:p>
-            <a:pPr algn="l"/>
+            <a:pPr algn="l">
+              <a:lnSpc>
+                <a:spcPct val="115000"/>
+              </a:lnSpc>
+              <a:spcBef>
+                <a:spcPts val="0"/>
+              </a:spcBef>
+              <a:spcAft>
+                <a:spcPts val="200"/>
+              </a:spcAft>
+            </a:pPr>
             <a:r>
               <a:rPr sz="1600" b="1" i="0">
                 <a:solidFill>
@@ -5941,17 +6456,69 @@
           </a:bodyPr>
           <a:lstStyle/>
           <a:p>
-            <a:pPr algn="l"/>
-            <a:r>
-              <a:rPr sz="1400" b="0" i="0">
+            <a:pPr algn="l">
+              <a:lnSpc>
+                <a:spcPct val="115000"/>
+              </a:lnSpc>
+              <a:spcBef>
+                <a:spcPts val="0"/>
+              </a:spcBef>
+              <a:spcAft>
+                <a:spcPts val="200"/>
+              </a:spcAft>
+            </a:pPr>
+            <a:r>
+              <a:rPr sz="1800" b="0" i="0">
                 <a:solidFill>
                   <a:srgbClr val="1E2F38"/>
                 </a:solidFill>
                 <a:latin typeface="Calibri"/>
               </a:rPr>
-              <a:t>• A real HealthTech field site with maternal and adolescent programmes
-• Documented gender-responsive AI design process from Uganda
-• Case material linking feminist AI principles to community health</a:t>
+              <a:t>• A real HealthTech field site with maternal and adolescent programmes</a:t>
+            </a:r>
+          </a:p>
+          <a:p>
+            <a:pPr algn="l">
+              <a:lnSpc>
+                <a:spcPct val="115000"/>
+              </a:lnSpc>
+              <a:spcBef>
+                <a:spcPts val="0"/>
+              </a:spcBef>
+              <a:spcAft>
+                <a:spcPts val="200"/>
+              </a:spcAft>
+            </a:pPr>
+            <a:r>
+              <a:rPr sz="1800" b="0" i="0">
+                <a:solidFill>
+                  <a:srgbClr val="1E2F38"/>
+                </a:solidFill>
+                <a:latin typeface="Calibri"/>
+              </a:rPr>
+              <a:t>• Documented gender-responsive AI design process from Uganda</a:t>
+            </a:r>
+          </a:p>
+          <a:p>
+            <a:pPr algn="l">
+              <a:lnSpc>
+                <a:spcPct val="115000"/>
+              </a:lnSpc>
+              <a:spcBef>
+                <a:spcPts val="0"/>
+              </a:spcBef>
+              <a:spcAft>
+                <a:spcPts val="200"/>
+              </a:spcAft>
+            </a:pPr>
+            <a:r>
+              <a:rPr sz="1800" b="0" i="0">
+                <a:solidFill>
+                  <a:srgbClr val="1E2F38"/>
+                </a:solidFill>
+                <a:latin typeface="Calibri"/>
+              </a:rPr>
+              <a:t>• Case material linking feminist AI principles to community health</a:t>
             </a:r>
           </a:p>
         </p:txBody>
@@ -6023,7 +6590,17 @@
           </a:bodyPr>
           <a:lstStyle/>
           <a:p>
-            <a:pPr algn="l"/>
+            <a:pPr algn="l">
+              <a:lnSpc>
+                <a:spcPct val="115000"/>
+              </a:lnSpc>
+              <a:spcBef>
+                <a:spcPts val="0"/>
+              </a:spcBef>
+              <a:spcAft>
+                <a:spcPts val="200"/>
+              </a:spcAft>
+            </a:pPr>
             <a:r>
               <a:rPr sz="1600" b="1" i="0">
                 <a:solidFill>
@@ -6058,17 +6635,69 @@
           </a:bodyPr>
           <a:lstStyle/>
           <a:p>
-            <a:pPr algn="l"/>
-            <a:r>
-              <a:rPr sz="1400" b="0" i="0">
+            <a:pPr algn="l">
+              <a:lnSpc>
+                <a:spcPct val="115000"/>
+              </a:lnSpc>
+              <a:spcBef>
+                <a:spcPts val="0"/>
+              </a:spcBef>
+              <a:spcAft>
+                <a:spcPts val="200"/>
+              </a:spcAft>
+            </a:pPr>
+            <a:r>
+              <a:rPr sz="1800" b="0" i="0">
                 <a:solidFill>
                   <a:srgbClr val="1E2F38"/>
                 </a:solidFill>
                 <a:latin typeface="Calibri"/>
               </a:rPr>
-              <a:t>• Structured feminist AI curriculum and peer changemakers
-• Mentorship on bias, safety, and inclusive model design
-• Continental network to stress-test FCHIP ethics and narrative</a:t>
+              <a:t>• Structured feminist AI curriculum and peer changemakers</a:t>
+            </a:r>
+          </a:p>
+          <a:p>
+            <a:pPr algn="l">
+              <a:lnSpc>
+                <a:spcPct val="115000"/>
+              </a:lnSpc>
+              <a:spcBef>
+                <a:spcPts val="0"/>
+              </a:spcBef>
+              <a:spcAft>
+                <a:spcPts val="200"/>
+              </a:spcAft>
+            </a:pPr>
+            <a:r>
+              <a:rPr sz="1800" b="0" i="0">
+                <a:solidFill>
+                  <a:srgbClr val="1E2F38"/>
+                </a:solidFill>
+                <a:latin typeface="Calibri"/>
+              </a:rPr>
+              <a:t>• Mentorship on bias, safety, and inclusive model design</a:t>
+            </a:r>
+          </a:p>
+          <a:p>
+            <a:pPr algn="l">
+              <a:lnSpc>
+                <a:spcPct val="115000"/>
+              </a:lnSpc>
+              <a:spcBef>
+                <a:spcPts val="0"/>
+              </a:spcBef>
+              <a:spcAft>
+                <a:spcPts val="200"/>
+              </a:spcAft>
+            </a:pPr>
+            <a:r>
+              <a:rPr sz="1800" b="0" i="0">
+                <a:solidFill>
+                  <a:srgbClr val="1E2F38"/>
+                </a:solidFill>
+                <a:latin typeface="Calibri"/>
+              </a:rPr>
+              <a:t>• Continental network to stress-test FCHIP ethics and narrative</a:t>
             </a:r>
           </a:p>
         </p:txBody>
@@ -6138,7 +6767,17 @@
           </a:bodyPr>
           <a:lstStyle/>
           <a:p>
-            <a:pPr algn="l"/>
+            <a:pPr algn="l">
+              <a:lnSpc>
+                <a:spcPct val="115000"/>
+              </a:lnSpc>
+              <a:spcBef>
+                <a:spcPts val="0"/>
+              </a:spcBef>
+              <a:spcAft>
+                <a:spcPts val="200"/>
+              </a:spcAft>
+            </a:pPr>
             <a:r>
               <a:rPr sz="900" b="0" i="0">
                 <a:solidFill>
@@ -6173,7 +6812,17 @@
           </a:bodyPr>
           <a:lstStyle/>
           <a:p>
-            <a:pPr algn="r"/>
+            <a:pPr algn="r">
+              <a:lnSpc>
+                <a:spcPct val="115000"/>
+              </a:lnSpc>
+              <a:spcBef>
+                <a:spcPts val="0"/>
+              </a:spcBef>
+              <a:spcAft>
+                <a:spcPts val="200"/>
+              </a:spcAft>
+            </a:pPr>
             <a:r>
               <a:rPr sz="900" b="0" i="0">
                 <a:solidFill>
@@ -6312,7 +6961,17 @@
           </a:bodyPr>
           <a:lstStyle/>
           <a:p>
-            <a:pPr algn="l"/>
+            <a:pPr algn="l">
+              <a:lnSpc>
+                <a:spcPct val="115000"/>
+              </a:lnSpc>
+              <a:spcBef>
+                <a:spcPts val="0"/>
+              </a:spcBef>
+              <a:spcAft>
+                <a:spcPts val="200"/>
+              </a:spcAft>
+            </a:pPr>
             <a:r>
               <a:rPr sz="1100" b="1" i="0">
                 <a:solidFill>
@@ -6347,7 +7006,17 @@
           </a:bodyPr>
           <a:lstStyle/>
           <a:p>
-            <a:pPr algn="l"/>
+            <a:pPr algn="l">
+              <a:lnSpc>
+                <a:spcPct val="115000"/>
+              </a:lnSpc>
+              <a:spcBef>
+                <a:spcPts val="0"/>
+              </a:spcBef>
+              <a:spcAft>
+                <a:spcPts val="200"/>
+              </a:spcAft>
+            </a:pPr>
             <a:r>
               <a:rPr sz="2400" b="1" i="0">
                 <a:solidFill>
@@ -6406,17 +7075,69 @@
           </a:bodyPr>
           <a:lstStyle/>
           <a:p>
-            <a:pPr algn="l"/>
-            <a:r>
-              <a:rPr sz="1600" b="0" i="0">
+            <a:pPr algn="l">
+              <a:lnSpc>
+                <a:spcPct val="128000"/>
+              </a:lnSpc>
+              <a:spcBef>
+                <a:spcPts val="0"/>
+              </a:spcBef>
+              <a:spcAft>
+                <a:spcPts val="1400"/>
+              </a:spcAft>
+            </a:pPr>
+            <a:r>
+              <a:rPr sz="2600" b="0" i="0">
                 <a:solidFill>
                   <a:srgbClr val="1E2F38"/>
                 </a:solidFill>
                 <a:latin typeface="Calibri"/>
               </a:rPr>
-              <a:t>Weeks 1–4: Feminist AI foundations + dataset audit
-Weeks 5–8: Prototype Safe Signals with CHWs
-Weeks 9–12: Validate, document bias checks, share open brief</a:t>
+              <a:t>Weeks 1–4: Feminist AI foundations + dataset audit</a:t>
+            </a:r>
+          </a:p>
+          <a:p>
+            <a:pPr algn="l">
+              <a:lnSpc>
+                <a:spcPct val="128000"/>
+              </a:lnSpc>
+              <a:spcBef>
+                <a:spcPts val="0"/>
+              </a:spcBef>
+              <a:spcAft>
+                <a:spcPts val="1400"/>
+              </a:spcAft>
+            </a:pPr>
+            <a:r>
+              <a:rPr sz="2600" b="0" i="0">
+                <a:solidFill>
+                  <a:srgbClr val="1E2F38"/>
+                </a:solidFill>
+                <a:latin typeface="Calibri"/>
+              </a:rPr>
+              <a:t>Weeks 5–8: Prototype Safe Signals with CHWs</a:t>
+            </a:r>
+          </a:p>
+          <a:p>
+            <a:pPr algn="l">
+              <a:lnSpc>
+                <a:spcPct val="128000"/>
+              </a:lnSpc>
+              <a:spcBef>
+                <a:spcPts val="0"/>
+              </a:spcBef>
+              <a:spcAft>
+                <a:spcPts val="200"/>
+              </a:spcAft>
+            </a:pPr>
+            <a:r>
+              <a:rPr sz="2600" b="0" i="0">
+                <a:solidFill>
+                  <a:srgbClr val="1E2F38"/>
+                </a:solidFill>
+                <a:latin typeface="Calibri"/>
+              </a:rPr>
+              <a:t>Weeks 9–12: Validate, document bias checks, share open brief</a:t>
             </a:r>
           </a:p>
         </p:txBody>
@@ -6486,7 +7207,17 @@
           </a:bodyPr>
           <a:lstStyle/>
           <a:p>
-            <a:pPr algn="l"/>
+            <a:pPr algn="l">
+              <a:lnSpc>
+                <a:spcPct val="115000"/>
+              </a:lnSpc>
+              <a:spcBef>
+                <a:spcPts val="0"/>
+              </a:spcBef>
+              <a:spcAft>
+                <a:spcPts val="200"/>
+              </a:spcAft>
+            </a:pPr>
             <a:r>
               <a:rPr sz="900" b="0" i="0">
                 <a:solidFill>
@@ -6521,7 +7252,17 @@
           </a:bodyPr>
           <a:lstStyle/>
           <a:p>
-            <a:pPr algn="r"/>
+            <a:pPr algn="r">
+              <a:lnSpc>
+                <a:spcPct val="115000"/>
+              </a:lnSpc>
+              <a:spcBef>
+                <a:spcPts val="0"/>
+              </a:spcBef>
+              <a:spcAft>
+                <a:spcPts val="200"/>
+              </a:spcAft>
+            </a:pPr>
             <a:r>
               <a:rPr sz="900" b="0" i="0">
                 <a:solidFill>
@@ -6641,7 +7382,17 @@
           </a:bodyPr>
           <a:lstStyle/>
           <a:p>
-            <a:pPr algn="l"/>
+            <a:pPr algn="l">
+              <a:lnSpc>
+                <a:spcPct val="115000"/>
+              </a:lnSpc>
+              <a:spcBef>
+                <a:spcPts val="0"/>
+              </a:spcBef>
+              <a:spcAft>
+                <a:spcPts val="200"/>
+              </a:spcAft>
+            </a:pPr>
             <a:r>
               <a:rPr sz="2200" b="1" i="0">
                 <a:solidFill>
@@ -6676,7 +7427,17 @@
           </a:bodyPr>
           <a:lstStyle/>
           <a:p>
-            <a:pPr algn="l"/>
+            <a:pPr algn="l">
+              <a:lnSpc>
+                <a:spcPct val="115000"/>
+              </a:lnSpc>
+              <a:spcBef>
+                <a:spcPts val="0"/>
+              </a:spcBef>
+              <a:spcAft>
+                <a:spcPts val="200"/>
+              </a:spcAft>
+            </a:pPr>
             <a:r>
               <a:rPr sz="1400" b="1" i="0">
                 <a:solidFill>

--- a/applications/feminist-ai/documents/feminist-ai_ppt.pptx
+++ b/applications/feminist-ai/documents/feminist-ai_ppt.pptx
@@ -3347,6 +3347,96 @@
   <p:clrMapOvr>
     <a:masterClrMapping/>
   </p:clrMapOvr>
+  <p:timing>
+    <p:tnLst>
+      <p:par>
+        <p:cTn id="1" dur="indefinite" restart="never" nodeType="tmRoot">
+          <p:childTnLst>
+            <p:seq concurrent="true" nextAc="seek">
+              <p:cTn id="2" dur="indefinite" nodeType="mainSeq">
+                <p:childTnLst>
+                  <p:par>
+                    <p:cTn id="9" fill="hold">
+                      <p:stCondLst>
+                        <p:cond delay="0"/>
+                      </p:stCondLst>
+                      <p:childTnLst>
+                        <p:par>
+                          <p:cTn id="3" presetID="10" presetClass="entr" presetSubtype="0" fill="hold" nodeType="withEffect">
+                            <p:stCondLst>
+                              <p:cond delay="0"/>
+                            </p:stCondLst>
+                            <p:childTnLst>
+                              <p:animEffect transition="in" filter="fade">
+                                <p:cBhvr>
+                                  <p:cTn id="4" dur="450"/>
+                                  <p:tgtEl>
+                                    <p:spTgt spid="2"/>
+                                  </p:tgtEl>
+                                </p:cBhvr>
+                              </p:animEffect>
+                            </p:childTnLst>
+                          </p:cTn>
+                        </p:par>
+                        <p:par>
+                          <p:cTn id="5" presetID="10" presetClass="entr" presetSubtype="0" fill="hold" nodeType="withEffect">
+                            <p:stCondLst>
+                              <p:cond delay="200"/>
+                            </p:stCondLst>
+                            <p:childTnLst>
+                              <p:animEffect transition="in" filter="fade">
+                                <p:cBhvr>
+                                  <p:cTn id="6" dur="450"/>
+                                  <p:tgtEl>
+                                    <p:spTgt spid="3"/>
+                                  </p:tgtEl>
+                                </p:cBhvr>
+                              </p:animEffect>
+                            </p:childTnLst>
+                          </p:cTn>
+                        </p:par>
+                        <p:par>
+                          <p:cTn id="7" presetID="10" presetClass="entr" presetSubtype="0" fill="hold" nodeType="withEffect">
+                            <p:stCondLst>
+                              <p:cond delay="200"/>
+                            </p:stCondLst>
+                            <p:childTnLst>
+                              <p:animEffect transition="in" filter="fade">
+                                <p:cBhvr>
+                                  <p:cTn id="8" dur="450"/>
+                                  <p:tgtEl>
+                                    <p:spTgt spid="4"/>
+                                  </p:tgtEl>
+                                </p:cBhvr>
+                              </p:animEffect>
+                            </p:childTnLst>
+                          </p:cTn>
+                        </p:par>
+                      </p:childTnLst>
+                    </p:cTn>
+                  </p:par>
+                </p:childTnLst>
+              </p:cTn>
+              <p:prevCondLst>
+                <p:cond evt="onPrev" delay="0">
+                  <p:tgtEl>
+                    <p:sldTgt/>
+                  </p:tgtEl>
+                </p:cond>
+              </p:prevCondLst>
+              <p:nextCondLst>
+                <p:cond evt="onNext" delay="0">
+                  <p:tgtEl>
+                    <p:sldTgt/>
+                  </p:tgtEl>
+                </p:cond>
+              </p:nextCondLst>
+            </p:seq>
+          </p:childTnLst>
+        </p:cTn>
+      </p:par>
+    </p:tnLst>
+  </p:timing>
 </p:sld>
 </file>
 
@@ -4386,6 +4476,96 @@
   <p:clrMapOvr>
     <a:masterClrMapping/>
   </p:clrMapOvr>
+  <p:timing>
+    <p:tnLst>
+      <p:par>
+        <p:cTn id="1" dur="indefinite" restart="never" nodeType="tmRoot">
+          <p:childTnLst>
+            <p:seq concurrent="true" nextAc="seek">
+              <p:cTn id="2" dur="indefinite" nodeType="mainSeq">
+                <p:childTnLst>
+                  <p:par>
+                    <p:cTn id="9" fill="hold">
+                      <p:stCondLst>
+                        <p:cond delay="0"/>
+                      </p:stCondLst>
+                      <p:childTnLst>
+                        <p:par>
+                          <p:cTn id="3" presetID="10" presetClass="entr" presetSubtype="0" fill="hold" nodeType="withEffect">
+                            <p:stCondLst>
+                              <p:cond delay="0"/>
+                            </p:stCondLst>
+                            <p:childTnLst>
+                              <p:animEffect transition="in" filter="fade">
+                                <p:cBhvr>
+                                  <p:cTn id="4" dur="450"/>
+                                  <p:tgtEl>
+                                    <p:spTgt spid="2"/>
+                                  </p:tgtEl>
+                                </p:cBhvr>
+                              </p:animEffect>
+                            </p:childTnLst>
+                          </p:cTn>
+                        </p:par>
+                        <p:par>
+                          <p:cTn id="5" presetID="10" presetClass="entr" presetSubtype="0" fill="hold" nodeType="withEffect">
+                            <p:stCondLst>
+                              <p:cond delay="200"/>
+                            </p:stCondLst>
+                            <p:childTnLst>
+                              <p:animEffect transition="in" filter="fade">
+                                <p:cBhvr>
+                                  <p:cTn id="6" dur="450"/>
+                                  <p:tgtEl>
+                                    <p:spTgt spid="3"/>
+                                  </p:tgtEl>
+                                </p:cBhvr>
+                              </p:animEffect>
+                            </p:childTnLst>
+                          </p:cTn>
+                        </p:par>
+                        <p:par>
+                          <p:cTn id="7" presetID="10" presetClass="entr" presetSubtype="0" fill="hold" nodeType="withEffect">
+                            <p:stCondLst>
+                              <p:cond delay="200"/>
+                            </p:stCondLst>
+                            <p:childTnLst>
+                              <p:animEffect transition="in" filter="fade">
+                                <p:cBhvr>
+                                  <p:cTn id="8" dur="450"/>
+                                  <p:tgtEl>
+                                    <p:spTgt spid="4"/>
+                                  </p:tgtEl>
+                                </p:cBhvr>
+                              </p:animEffect>
+                            </p:childTnLst>
+                          </p:cTn>
+                        </p:par>
+                      </p:childTnLst>
+                    </p:cTn>
+                  </p:par>
+                </p:childTnLst>
+              </p:cTn>
+              <p:prevCondLst>
+                <p:cond evt="onPrev" delay="0">
+                  <p:tgtEl>
+                    <p:sldTgt/>
+                  </p:tgtEl>
+                </p:cond>
+              </p:prevCondLst>
+              <p:nextCondLst>
+                <p:cond evt="onNext" delay="0">
+                  <p:tgtEl>
+                    <p:sldTgt/>
+                  </p:tgtEl>
+                </p:cond>
+              </p:nextCondLst>
+            </p:seq>
+          </p:childTnLst>
+        </p:cTn>
+      </p:par>
+    </p:tnLst>
+  </p:timing>
 </p:sld>
 </file>
 
@@ -4826,6 +5006,96 @@
   <p:clrMapOvr>
     <a:masterClrMapping/>
   </p:clrMapOvr>
+  <p:timing>
+    <p:tnLst>
+      <p:par>
+        <p:cTn id="1" dur="indefinite" restart="never" nodeType="tmRoot">
+          <p:childTnLst>
+            <p:seq concurrent="true" nextAc="seek">
+              <p:cTn id="2" dur="indefinite" nodeType="mainSeq">
+                <p:childTnLst>
+                  <p:par>
+                    <p:cTn id="9" fill="hold">
+                      <p:stCondLst>
+                        <p:cond delay="0"/>
+                      </p:stCondLst>
+                      <p:childTnLst>
+                        <p:par>
+                          <p:cTn id="3" presetID="10" presetClass="entr" presetSubtype="0" fill="hold" nodeType="withEffect">
+                            <p:stCondLst>
+                              <p:cond delay="0"/>
+                            </p:stCondLst>
+                            <p:childTnLst>
+                              <p:animEffect transition="in" filter="fade">
+                                <p:cBhvr>
+                                  <p:cTn id="4" dur="450"/>
+                                  <p:tgtEl>
+                                    <p:spTgt spid="2"/>
+                                  </p:tgtEl>
+                                </p:cBhvr>
+                              </p:animEffect>
+                            </p:childTnLst>
+                          </p:cTn>
+                        </p:par>
+                        <p:par>
+                          <p:cTn id="5" presetID="10" presetClass="entr" presetSubtype="0" fill="hold" nodeType="withEffect">
+                            <p:stCondLst>
+                              <p:cond delay="200"/>
+                            </p:stCondLst>
+                            <p:childTnLst>
+                              <p:animEffect transition="in" filter="fade">
+                                <p:cBhvr>
+                                  <p:cTn id="6" dur="450"/>
+                                  <p:tgtEl>
+                                    <p:spTgt spid="3"/>
+                                  </p:tgtEl>
+                                </p:cBhvr>
+                              </p:animEffect>
+                            </p:childTnLst>
+                          </p:cTn>
+                        </p:par>
+                        <p:par>
+                          <p:cTn id="7" presetID="10" presetClass="entr" presetSubtype="0" fill="hold" nodeType="withEffect">
+                            <p:stCondLst>
+                              <p:cond delay="200"/>
+                            </p:stCondLst>
+                            <p:childTnLst>
+                              <p:animEffect transition="in" filter="fade">
+                                <p:cBhvr>
+                                  <p:cTn id="8" dur="450"/>
+                                  <p:tgtEl>
+                                    <p:spTgt spid="4"/>
+                                  </p:tgtEl>
+                                </p:cBhvr>
+                              </p:animEffect>
+                            </p:childTnLst>
+                          </p:cTn>
+                        </p:par>
+                      </p:childTnLst>
+                    </p:cTn>
+                  </p:par>
+                </p:childTnLst>
+              </p:cTn>
+              <p:prevCondLst>
+                <p:cond evt="onPrev" delay="0">
+                  <p:tgtEl>
+                    <p:sldTgt/>
+                  </p:tgtEl>
+                </p:cond>
+              </p:prevCondLst>
+              <p:nextCondLst>
+                <p:cond evt="onNext" delay="0">
+                  <p:tgtEl>
+                    <p:sldTgt/>
+                  </p:tgtEl>
+                </p:cond>
+              </p:nextCondLst>
+            </p:seq>
+          </p:childTnLst>
+        </p:cTn>
+      </p:par>
+    </p:tnLst>
+  </p:timing>
 </p:sld>
 </file>
 
@@ -5693,6 +5963,96 @@
   <p:clrMapOvr>
     <a:masterClrMapping/>
   </p:clrMapOvr>
+  <p:timing>
+    <p:tnLst>
+      <p:par>
+        <p:cTn id="1" dur="indefinite" restart="never" nodeType="tmRoot">
+          <p:childTnLst>
+            <p:seq concurrent="true" nextAc="seek">
+              <p:cTn id="2" dur="indefinite" nodeType="mainSeq">
+                <p:childTnLst>
+                  <p:par>
+                    <p:cTn id="9" fill="hold">
+                      <p:stCondLst>
+                        <p:cond delay="0"/>
+                      </p:stCondLst>
+                      <p:childTnLst>
+                        <p:par>
+                          <p:cTn id="3" presetID="10" presetClass="entr" presetSubtype="0" fill="hold" nodeType="withEffect">
+                            <p:stCondLst>
+                              <p:cond delay="0"/>
+                            </p:stCondLst>
+                            <p:childTnLst>
+                              <p:animEffect transition="in" filter="fade">
+                                <p:cBhvr>
+                                  <p:cTn id="4" dur="450"/>
+                                  <p:tgtEl>
+                                    <p:spTgt spid="2"/>
+                                  </p:tgtEl>
+                                </p:cBhvr>
+                              </p:animEffect>
+                            </p:childTnLst>
+                          </p:cTn>
+                        </p:par>
+                        <p:par>
+                          <p:cTn id="5" presetID="10" presetClass="entr" presetSubtype="0" fill="hold" nodeType="withEffect">
+                            <p:stCondLst>
+                              <p:cond delay="200"/>
+                            </p:stCondLst>
+                            <p:childTnLst>
+                              <p:animEffect transition="in" filter="fade">
+                                <p:cBhvr>
+                                  <p:cTn id="6" dur="450"/>
+                                  <p:tgtEl>
+                                    <p:spTgt spid="3"/>
+                                  </p:tgtEl>
+                                </p:cBhvr>
+                              </p:animEffect>
+                            </p:childTnLst>
+                          </p:cTn>
+                        </p:par>
+                        <p:par>
+                          <p:cTn id="7" presetID="10" presetClass="entr" presetSubtype="0" fill="hold" nodeType="withEffect">
+                            <p:stCondLst>
+                              <p:cond delay="200"/>
+                            </p:stCondLst>
+                            <p:childTnLst>
+                              <p:animEffect transition="in" filter="fade">
+                                <p:cBhvr>
+                                  <p:cTn id="8" dur="450"/>
+                                  <p:tgtEl>
+                                    <p:spTgt spid="4"/>
+                                  </p:tgtEl>
+                                </p:cBhvr>
+                              </p:animEffect>
+                            </p:childTnLst>
+                          </p:cTn>
+                        </p:par>
+                      </p:childTnLst>
+                    </p:cTn>
+                  </p:par>
+                </p:childTnLst>
+              </p:cTn>
+              <p:prevCondLst>
+                <p:cond evt="onPrev" delay="0">
+                  <p:tgtEl>
+                    <p:sldTgt/>
+                  </p:tgtEl>
+                </p:cond>
+              </p:prevCondLst>
+              <p:nextCondLst>
+                <p:cond evt="onNext" delay="0">
+                  <p:tgtEl>
+                    <p:sldTgt/>
+                  </p:tgtEl>
+                </p:cond>
+              </p:nextCondLst>
+            </p:seq>
+          </p:childTnLst>
+        </p:cTn>
+      </p:par>
+    </p:tnLst>
+  </p:timing>
 </p:sld>
 </file>
 
@@ -6155,6 +6515,96 @@
   <p:clrMapOvr>
     <a:masterClrMapping/>
   </p:clrMapOvr>
+  <p:timing>
+    <p:tnLst>
+      <p:par>
+        <p:cTn id="1" dur="indefinite" restart="never" nodeType="tmRoot">
+          <p:childTnLst>
+            <p:seq concurrent="true" nextAc="seek">
+              <p:cTn id="2" dur="indefinite" nodeType="mainSeq">
+                <p:childTnLst>
+                  <p:par>
+                    <p:cTn id="9" fill="hold">
+                      <p:stCondLst>
+                        <p:cond delay="0"/>
+                      </p:stCondLst>
+                      <p:childTnLst>
+                        <p:par>
+                          <p:cTn id="3" presetID="10" presetClass="entr" presetSubtype="0" fill="hold" nodeType="withEffect">
+                            <p:stCondLst>
+                              <p:cond delay="0"/>
+                            </p:stCondLst>
+                            <p:childTnLst>
+                              <p:animEffect transition="in" filter="fade">
+                                <p:cBhvr>
+                                  <p:cTn id="4" dur="450"/>
+                                  <p:tgtEl>
+                                    <p:spTgt spid="2"/>
+                                  </p:tgtEl>
+                                </p:cBhvr>
+                              </p:animEffect>
+                            </p:childTnLst>
+                          </p:cTn>
+                        </p:par>
+                        <p:par>
+                          <p:cTn id="5" presetID="10" presetClass="entr" presetSubtype="0" fill="hold" nodeType="withEffect">
+                            <p:stCondLst>
+                              <p:cond delay="200"/>
+                            </p:stCondLst>
+                            <p:childTnLst>
+                              <p:animEffect transition="in" filter="fade">
+                                <p:cBhvr>
+                                  <p:cTn id="6" dur="450"/>
+                                  <p:tgtEl>
+                                    <p:spTgt spid="3"/>
+                                  </p:tgtEl>
+                                </p:cBhvr>
+                              </p:animEffect>
+                            </p:childTnLst>
+                          </p:cTn>
+                        </p:par>
+                        <p:par>
+                          <p:cTn id="7" presetID="10" presetClass="entr" presetSubtype="0" fill="hold" nodeType="withEffect">
+                            <p:stCondLst>
+                              <p:cond delay="200"/>
+                            </p:stCondLst>
+                            <p:childTnLst>
+                              <p:animEffect transition="in" filter="fade">
+                                <p:cBhvr>
+                                  <p:cTn id="8" dur="450"/>
+                                  <p:tgtEl>
+                                    <p:spTgt spid="4"/>
+                                  </p:tgtEl>
+                                </p:cBhvr>
+                              </p:animEffect>
+                            </p:childTnLst>
+                          </p:cTn>
+                        </p:par>
+                      </p:childTnLst>
+                    </p:cTn>
+                  </p:par>
+                </p:childTnLst>
+              </p:cTn>
+              <p:prevCondLst>
+                <p:cond evt="onPrev" delay="0">
+                  <p:tgtEl>
+                    <p:sldTgt/>
+                  </p:tgtEl>
+                </p:cond>
+              </p:prevCondLst>
+              <p:nextCondLst>
+                <p:cond evt="onNext" delay="0">
+                  <p:tgtEl>
+                    <p:sldTgt/>
+                  </p:tgtEl>
+                </p:cond>
+              </p:nextCondLst>
+            </p:seq>
+          </p:childTnLst>
+        </p:cTn>
+      </p:par>
+    </p:tnLst>
+  </p:timing>
 </p:sld>
 </file>
 
@@ -6840,6 +7290,96 @@
   <p:clrMapOvr>
     <a:masterClrMapping/>
   </p:clrMapOvr>
+  <p:timing>
+    <p:tnLst>
+      <p:par>
+        <p:cTn id="1" dur="indefinite" restart="never" nodeType="tmRoot">
+          <p:childTnLst>
+            <p:seq concurrent="true" nextAc="seek">
+              <p:cTn id="2" dur="indefinite" nodeType="mainSeq">
+                <p:childTnLst>
+                  <p:par>
+                    <p:cTn id="9" fill="hold">
+                      <p:stCondLst>
+                        <p:cond delay="0"/>
+                      </p:stCondLst>
+                      <p:childTnLst>
+                        <p:par>
+                          <p:cTn id="3" presetID="10" presetClass="entr" presetSubtype="0" fill="hold" nodeType="withEffect">
+                            <p:stCondLst>
+                              <p:cond delay="0"/>
+                            </p:stCondLst>
+                            <p:childTnLst>
+                              <p:animEffect transition="in" filter="fade">
+                                <p:cBhvr>
+                                  <p:cTn id="4" dur="450"/>
+                                  <p:tgtEl>
+                                    <p:spTgt spid="2"/>
+                                  </p:tgtEl>
+                                </p:cBhvr>
+                              </p:animEffect>
+                            </p:childTnLst>
+                          </p:cTn>
+                        </p:par>
+                        <p:par>
+                          <p:cTn id="5" presetID="10" presetClass="entr" presetSubtype="0" fill="hold" nodeType="withEffect">
+                            <p:stCondLst>
+                              <p:cond delay="200"/>
+                            </p:stCondLst>
+                            <p:childTnLst>
+                              <p:animEffect transition="in" filter="fade">
+                                <p:cBhvr>
+                                  <p:cTn id="6" dur="450"/>
+                                  <p:tgtEl>
+                                    <p:spTgt spid="3"/>
+                                  </p:tgtEl>
+                                </p:cBhvr>
+                              </p:animEffect>
+                            </p:childTnLst>
+                          </p:cTn>
+                        </p:par>
+                        <p:par>
+                          <p:cTn id="7" presetID="10" presetClass="entr" presetSubtype="0" fill="hold" nodeType="withEffect">
+                            <p:stCondLst>
+                              <p:cond delay="200"/>
+                            </p:stCondLst>
+                            <p:childTnLst>
+                              <p:animEffect transition="in" filter="fade">
+                                <p:cBhvr>
+                                  <p:cTn id="8" dur="450"/>
+                                  <p:tgtEl>
+                                    <p:spTgt spid="4"/>
+                                  </p:tgtEl>
+                                </p:cBhvr>
+                              </p:animEffect>
+                            </p:childTnLst>
+                          </p:cTn>
+                        </p:par>
+                      </p:childTnLst>
+                    </p:cTn>
+                  </p:par>
+                </p:childTnLst>
+              </p:cTn>
+              <p:prevCondLst>
+                <p:cond evt="onPrev" delay="0">
+                  <p:tgtEl>
+                    <p:sldTgt/>
+                  </p:tgtEl>
+                </p:cond>
+              </p:prevCondLst>
+              <p:nextCondLst>
+                <p:cond evt="onNext" delay="0">
+                  <p:tgtEl>
+                    <p:sldTgt/>
+                  </p:tgtEl>
+                </p:cond>
+              </p:nextCondLst>
+            </p:seq>
+          </p:childTnLst>
+        </p:cTn>
+      </p:par>
+    </p:tnLst>
+  </p:timing>
 </p:sld>
 </file>
 
@@ -7280,6 +7820,96 @@
   <p:clrMapOvr>
     <a:masterClrMapping/>
   </p:clrMapOvr>
+  <p:timing>
+    <p:tnLst>
+      <p:par>
+        <p:cTn id="1" dur="indefinite" restart="never" nodeType="tmRoot">
+          <p:childTnLst>
+            <p:seq concurrent="true" nextAc="seek">
+              <p:cTn id="2" dur="indefinite" nodeType="mainSeq">
+                <p:childTnLst>
+                  <p:par>
+                    <p:cTn id="9" fill="hold">
+                      <p:stCondLst>
+                        <p:cond delay="0"/>
+                      </p:stCondLst>
+                      <p:childTnLst>
+                        <p:par>
+                          <p:cTn id="3" presetID="10" presetClass="entr" presetSubtype="0" fill="hold" nodeType="withEffect">
+                            <p:stCondLst>
+                              <p:cond delay="0"/>
+                            </p:stCondLst>
+                            <p:childTnLst>
+                              <p:animEffect transition="in" filter="fade">
+                                <p:cBhvr>
+                                  <p:cTn id="4" dur="450"/>
+                                  <p:tgtEl>
+                                    <p:spTgt spid="2"/>
+                                  </p:tgtEl>
+                                </p:cBhvr>
+                              </p:animEffect>
+                            </p:childTnLst>
+                          </p:cTn>
+                        </p:par>
+                        <p:par>
+                          <p:cTn id="5" presetID="10" presetClass="entr" presetSubtype="0" fill="hold" nodeType="withEffect">
+                            <p:stCondLst>
+                              <p:cond delay="200"/>
+                            </p:stCondLst>
+                            <p:childTnLst>
+                              <p:animEffect transition="in" filter="fade">
+                                <p:cBhvr>
+                                  <p:cTn id="6" dur="450"/>
+                                  <p:tgtEl>
+                                    <p:spTgt spid="3"/>
+                                  </p:tgtEl>
+                                </p:cBhvr>
+                              </p:animEffect>
+                            </p:childTnLst>
+                          </p:cTn>
+                        </p:par>
+                        <p:par>
+                          <p:cTn id="7" presetID="10" presetClass="entr" presetSubtype="0" fill="hold" nodeType="withEffect">
+                            <p:stCondLst>
+                              <p:cond delay="200"/>
+                            </p:stCondLst>
+                            <p:childTnLst>
+                              <p:animEffect transition="in" filter="fade">
+                                <p:cBhvr>
+                                  <p:cTn id="8" dur="450"/>
+                                  <p:tgtEl>
+                                    <p:spTgt spid="4"/>
+                                  </p:tgtEl>
+                                </p:cBhvr>
+                              </p:animEffect>
+                            </p:childTnLst>
+                          </p:cTn>
+                        </p:par>
+                      </p:childTnLst>
+                    </p:cTn>
+                  </p:par>
+                </p:childTnLst>
+              </p:cTn>
+              <p:prevCondLst>
+                <p:cond evt="onPrev" delay="0">
+                  <p:tgtEl>
+                    <p:sldTgt/>
+                  </p:tgtEl>
+                </p:cond>
+              </p:prevCondLst>
+              <p:nextCondLst>
+                <p:cond evt="onNext" delay="0">
+                  <p:tgtEl>
+                    <p:sldTgt/>
+                  </p:tgtEl>
+                </p:cond>
+              </p:nextCondLst>
+            </p:seq>
+          </p:childTnLst>
+        </p:cTn>
+      </p:par>
+    </p:tnLst>
+  </p:timing>
 </p:sld>
 </file>
 
@@ -7455,6 +8085,96 @@
   <p:clrMapOvr>
     <a:masterClrMapping/>
   </p:clrMapOvr>
+  <p:timing>
+    <p:tnLst>
+      <p:par>
+        <p:cTn id="1" dur="indefinite" restart="never" nodeType="tmRoot">
+          <p:childTnLst>
+            <p:seq concurrent="true" nextAc="seek">
+              <p:cTn id="2" dur="indefinite" nodeType="mainSeq">
+                <p:childTnLst>
+                  <p:par>
+                    <p:cTn id="9" fill="hold">
+                      <p:stCondLst>
+                        <p:cond delay="0"/>
+                      </p:stCondLst>
+                      <p:childTnLst>
+                        <p:par>
+                          <p:cTn id="3" presetID="10" presetClass="entr" presetSubtype="0" fill="hold" nodeType="withEffect">
+                            <p:stCondLst>
+                              <p:cond delay="0"/>
+                            </p:stCondLst>
+                            <p:childTnLst>
+                              <p:animEffect transition="in" filter="fade">
+                                <p:cBhvr>
+                                  <p:cTn id="4" dur="450"/>
+                                  <p:tgtEl>
+                                    <p:spTgt spid="2"/>
+                                  </p:tgtEl>
+                                </p:cBhvr>
+                              </p:animEffect>
+                            </p:childTnLst>
+                          </p:cTn>
+                        </p:par>
+                        <p:par>
+                          <p:cTn id="5" presetID="10" presetClass="entr" presetSubtype="0" fill="hold" nodeType="withEffect">
+                            <p:stCondLst>
+                              <p:cond delay="200"/>
+                            </p:stCondLst>
+                            <p:childTnLst>
+                              <p:animEffect transition="in" filter="fade">
+                                <p:cBhvr>
+                                  <p:cTn id="6" dur="450"/>
+                                  <p:tgtEl>
+                                    <p:spTgt spid="3"/>
+                                  </p:tgtEl>
+                                </p:cBhvr>
+                              </p:animEffect>
+                            </p:childTnLst>
+                          </p:cTn>
+                        </p:par>
+                        <p:par>
+                          <p:cTn id="7" presetID="10" presetClass="entr" presetSubtype="0" fill="hold" nodeType="withEffect">
+                            <p:stCondLst>
+                              <p:cond delay="200"/>
+                            </p:stCondLst>
+                            <p:childTnLst>
+                              <p:animEffect transition="in" filter="fade">
+                                <p:cBhvr>
+                                  <p:cTn id="8" dur="450"/>
+                                  <p:tgtEl>
+                                    <p:spTgt spid="4"/>
+                                  </p:tgtEl>
+                                </p:cBhvr>
+                              </p:animEffect>
+                            </p:childTnLst>
+                          </p:cTn>
+                        </p:par>
+                      </p:childTnLst>
+                    </p:cTn>
+                  </p:par>
+                </p:childTnLst>
+              </p:cTn>
+              <p:prevCondLst>
+                <p:cond evt="onPrev" delay="0">
+                  <p:tgtEl>
+                    <p:sldTgt/>
+                  </p:tgtEl>
+                </p:cond>
+              </p:prevCondLst>
+              <p:nextCondLst>
+                <p:cond evt="onNext" delay="0">
+                  <p:tgtEl>
+                    <p:sldTgt/>
+                  </p:tgtEl>
+                </p:cond>
+              </p:nextCondLst>
+            </p:seq>
+          </p:childTnLst>
+        </p:cTn>
+      </p:par>
+    </p:tnLst>
+  </p:timing>
 </p:sld>
 </file>
 
